--- a/docs/URP_중간보고_2026-08-03.pptx
+++ b/docs/URP_중간보고_2026-08-03.pptx
@@ -8,9 +8,10 @@
     <p:sldId id="256" r:id="rId2"/>
     <p:sldId id="257" r:id="rId3"/>
     <p:sldId id="258" r:id="rId4"/>
+    <p:sldId id="259" r:id="rId5"/>
   </p:sldIdLst>
   <p:notesMasterIdLst>
-    <p:notesMasterId r:id="rId5"/>
+    <p:notesMasterId r:id="rId6"/>
   </p:notesMasterIdLst>
   <p:sldSz cx="12192000" cy="6858000"/>
   <p:notesSz cx="6858000" cy="12192000"/>
@@ -592,7 +593,7 @@
           <a:p>
             <a:r>
               <a:rPr lang="en-US" dirty="0"/>
-              <a:t>경계식 a* = 2ρ/τ². ρ 는 Xu 논문의 네트 반경에 최악 방향 보정을 적용한 값, τ 는 왼쪽 카드의 분해값.</a:t>
+              <a:t>경계 1: a* = 2ρ/τ² = 39.3 (완벽 정렬 가정). 경계 2: a*(ψ) = 2d(tanθ − ψ)/τ², ψ = slew_audit 실측 4.26° → 25.8. 곡선 50% 교차 23.8 (hold n=1500). 곡선은 손튜닝 기준선의 것이지 학습 정책의 것이 아님.</a:t>
             </a:r>
             <a:endParaRPr lang="en-US" dirty="0"/>
           </a:p>
@@ -704,6 +705,94 @@
             <a:fld id="{F7021451-1387-4CA6-816F-3879F97B5CBC}" type="slidenum">
               <a:rPr lang="en-US"/>
               <a:t>3</a:t>
+            </a:fld>
+            <a:endParaRPr lang="en-US"/>
+          </a:p>
+        </p:txBody>
+      </p:sp>
+    </p:spTree>
+    <p:extLst>
+      <p:ext uri="{BB962C8B-B14F-4D97-AF65-F5344CB8AC3E}">
+        <p14:creationId xmlns:p14="http://schemas.microsoft.com/office/powerpoint/2010/main" val="1024086991"/>
+      </p:ext>
+    </p:extLst>
+  </p:cSld>
+  <p:clrMapOvr>
+    <a:masterClrMapping/>
+  </p:clrMapOvr>
+</p:notes>
+</file>
+
+<file path=ppt/notesSlides/notesSlide4.xml><?xml version="1.0" encoding="utf-8"?>
+<p:notes xmlns:a="http://schemas.openxmlformats.org/drawingml/2006/main" xmlns:r="http://schemas.openxmlformats.org/officeDocument/2006/relationships" xmlns:p="http://schemas.openxmlformats.org/presentationml/2006/main">
+  <p:cSld>
+    <p:spTree>
+      <p:nvGrpSpPr>
+        <p:cNvPr id="1" name=""/>
+        <p:cNvGrpSpPr/>
+        <p:nvPr/>
+      </p:nvGrpSpPr>
+      <p:grpSpPr>
+        <a:xfrm>
+          <a:off x="0" y="0"/>
+          <a:ext cx="0" cy="0"/>
+          <a:chOff x="0" y="0"/>
+          <a:chExt cx="0" cy="0"/>
+        </a:xfrm>
+      </p:grpSpPr>
+      <p:sp>
+        <p:nvSpPr>
+          <p:cNvPr id="2" name="Slide Image Placeholder 1"/>
+          <p:cNvSpPr>
+            <a:spLocks noGrp="1" noRot="1" noChangeAspect="1"/>
+          </p:cNvSpPr>
+          <p:nvPr>
+            <p:ph type="sldImg"/>
+          </p:nvPr>
+        </p:nvSpPr>
+        <p:spPr/>
+      </p:sp>
+      <p:sp>
+        <p:nvSpPr>
+          <p:cNvPr id="3" name="Notes Placeholder 2"/>
+          <p:cNvSpPr>
+            <a:spLocks noGrp="1"/>
+          </p:cNvSpPr>
+          <p:nvPr>
+            <p:ph type="body" idx="1"/>
+          </p:nvPr>
+        </p:nvSpPr>
+        <p:spPr/>
+        <p:txBody>
+          <a:bodyPr/>
+          <a:lstStyle/>
+          <a:p>
+            <a:r>
+              <a:rPr lang="en-US" dirty="0"/>
+              <a:t>부록. 교수님 피드백 3번(용어 정의)에 대응. 본문 숫자는 전부 이 표에서 옴. 연구비 금액은 채워 넣을 것.</a:t>
+            </a:r>
+            <a:endParaRPr lang="en-US" dirty="0"/>
+          </a:p>
+        </p:txBody>
+      </p:sp>
+      <p:sp>
+        <p:nvSpPr>
+          <p:cNvPr id="4" name="Slide Number Placeholder 3"/>
+          <p:cNvSpPr>
+            <a:spLocks noGrp="1"/>
+          </p:cNvSpPr>
+          <p:nvPr>
+            <p:ph type="sldNum" sz="quarter" idx="10"/>
+          </p:nvPr>
+        </p:nvSpPr>
+        <p:spPr/>
+        <p:txBody>
+          <a:bodyPr/>
+          <a:lstStyle/>
+          <a:p>
+            <a:fld id="{F7021451-1387-4CA6-816F-3879F97B5CBC}" type="slidenum">
+              <a:rPr lang="en-US"/>
+              <a:t>4</a:t>
             </a:fld>
             <a:endParaRPr lang="en-US"/>
           </a:p>
@@ -1118,7 +1207,7 @@
                 <a:ea typeface="Malgun Gothic" pitchFamily="34" charset="-122"/>
                 <a:cs typeface="Malgun Gothic" pitchFamily="34" charset="-120"/>
               </a:rPr>
-              <a:t>요격 시스템을 만들고 → 물리값을 실제 논문 값으로 확정하는 데까지 왔습니다  ·  2026년 8월 1일</a:t>
+              <a:t>요격 시스템을 만들고 → 물리값을 확정하고 → 학습 준비를 마쳤습니다  ·  2026년 8월 2일</a:t>
             </a:r>
             <a:endParaRPr lang="en-US" sz="1350" dirty="0"/>
           </a:p>
@@ -1140,8 +1229,8 @@
         </p:blipFill>
         <p:spPr>
           <a:xfrm>
-            <a:off x="457200" y="1225296"/>
-            <a:ext cx="6675120" cy="4050792"/>
+            <a:off x="457200" y="1207008"/>
+            <a:ext cx="6675120" cy="4105656"/>
           </a:xfrm>
           <a:prstGeom prst="rect">
             <a:avLst/>
@@ -1466,7 +1555,7 @@
                 <a:ea typeface="Malgun Gothic" pitchFamily="34" charset="-122"/>
                 <a:cs typeface="Malgun Gothic" pitchFamily="34" charset="-120"/>
               </a:rPr>
-              <a:t>값을 하나 고칠 때마다 “이 조건에서 협력이 의미가 있기는 한가”를 자동으로 되묻는 장치를 붙였습니다. 이번 기간에 네 번 걸렸고, 그 네 건이 3장의 내용입니다.</a:t>
+              <a:t>값을 하나 고칠 때마다 “이 조건에서 협력이 의미가 있기는 한가”를 자동으로 되묻는 장치를 붙였습니다. 이번 기간에 네 번 걸렸고, 그 네 건이 3장의 내용입니다. 학습을 돌리기 전에 전부 발견했습니다.</a:t>
             </a:r>
             <a:endParaRPr lang="en-US" sz="1010" dirty="0"/>
           </a:p>
@@ -1731,7 +1820,7 @@
                 <a:ea typeface="Malgun Gothic" pitchFamily="34" charset="-122"/>
                 <a:cs typeface="Malgun Gothic" pitchFamily="34" charset="-120"/>
               </a:rPr>
-              <a:t>준비 완료 · 미실행</a:t>
+              <a:t>준비 완료 · 착수 대기</a:t>
             </a:r>
             <a:endParaRPr lang="en-US" sz="1150" dirty="0"/>
           </a:p>
@@ -1928,7 +2017,7 @@
                 <a:ea typeface="Malgun Gothic" pitchFamily="34" charset="-122"/>
                 <a:cs typeface="Malgun Gothic" pitchFamily="34" charset="-120"/>
               </a:rPr>
-              <a:t>이번 기간 산출물 — 프로그램 15개(3,059줄) · 자동 검증 420항목 전부 통과 · 설계·검증 문서 18편.   학습은 아직 돌리지 않았고, 그 이유가 2·3장입니다.</a:t>
+              <a:t>이번 기간 산출물 — 자동 검증 447항목 전부 통과 · 설계·검증 문서 20편.   학습 준비는 마쳤고, 계산 자원 배정에 맞춰 다음 단계로 넘어갑니다.</a:t>
             </a:r>
             <a:endParaRPr lang="en-US" sz="1150" dirty="0"/>
           </a:p>
@@ -1992,7 +2081,7 @@
                 <a:ea typeface="Malgun Gothic" pitchFamily="34" charset="-122"/>
                 <a:cs typeface="Malgun Gothic" pitchFamily="34" charset="-120"/>
               </a:rPr>
-              <a:t>핵심 성과 — “언제부터 협력이 필요한가”에 수식으로 답이 나왔습니다</a:t>
+              <a:t>핵심 성과 — 경계가 하나가 아니라 둘이었습니다</a:t>
             </a:r>
             <a:endParaRPr lang="en-US" sz="2900" dirty="0"/>
           </a:p>
@@ -2031,7 +2120,7 @@
                 <a:ea typeface="Malgun Gothic" pitchFamily="34" charset="-122"/>
                 <a:cs typeface="Malgun Gothic" pitchFamily="34" charset="-120"/>
               </a:rPr>
-              <a:t>네트 드론 혼자로 충분한 공격자와, 여러 대가 몰아줘야만 잡히는 공격자를 가르는 선을 닫힌 식으로 얻었습니다</a:t>
+              <a:t>수식이 준 경계 39.3 은 실측에서 예외가 없었고(1,635판 중 0회), 곡선은 그보다 앞선 23.8 에서 무너집니다 — 그 사이가 학습이 먹을 자리입니다</a:t>
             </a:r>
             <a:endParaRPr lang="en-US" sz="1350" dirty="0"/>
           </a:p>
@@ -2053,8 +2142,8 @@
         </p:blipFill>
         <p:spPr>
           <a:xfrm>
-            <a:off x="457200" y="1243584"/>
-            <a:ext cx="5166360" cy="2962656"/>
+            <a:off x="457200" y="1225296"/>
+            <a:ext cx="4462272" cy="2560320"/>
           </a:xfrm>
           <a:prstGeom prst="rect">
             <a:avLst/>
@@ -2069,12 +2158,12 @@
         </p:nvSpPr>
         <p:spPr>
           <a:xfrm>
-            <a:off x="5760720" y="1243584"/>
-            <a:ext cx="5971032" cy="1389888"/>
+            <a:off x="5138928" y="1225296"/>
+            <a:ext cx="6592824" cy="786384"/>
           </a:xfrm>
           <a:prstGeom prst="roundRect">
             <a:avLst>
-              <a:gd name="adj" fmla="val 5263"/>
+              <a:gd name="adj" fmla="val 9302"/>
             </a:avLst>
           </a:prstGeom>
           <a:solidFill>
@@ -2096,24 +2185,24 @@
         </p:nvSpPr>
         <p:spPr>
           <a:xfrm>
-            <a:off x="5943600" y="1344168"/>
-            <a:ext cx="5605272" cy="256032"/>
-          </a:xfrm>
-          <a:prstGeom prst="rect">
-            <a:avLst/>
-          </a:prstGeom>
-          <a:noFill/>
-          <a:ln/>
-        </p:spPr>
-        <p:txBody>
-          <a:bodyPr wrap="square" lIns="0" tIns="0" rIns="0" bIns="0" rtlCol="0" anchor="ctr"/>
-          <a:lstStyle/>
-          <a:p>
-            <a:pPr indent="0" marL="0">
-              <a:buNone/>
-            </a:pPr>
-            <a:r>
-              <a:rPr lang="en-US" sz="1300" b="1" dirty="0">
+            <a:off x="5321808" y="1280160"/>
+            <a:ext cx="6227064" cy="219456"/>
+          </a:xfrm>
+          <a:prstGeom prst="rect">
+            <a:avLst/>
+          </a:prstGeom>
+          <a:noFill/>
+          <a:ln/>
+        </p:spPr>
+        <p:txBody>
+          <a:bodyPr wrap="square" lIns="0" tIns="0" rIns="0" bIns="0" rtlCol="0" anchor="ctr"/>
+          <a:lstStyle/>
+          <a:p>
+            <a:pPr indent="0" marL="0">
+              <a:buNone/>
+            </a:pPr>
+            <a:r>
+              <a:rPr lang="en-US" sz="1240" b="1" dirty="0">
                 <a:solidFill>
                   <a:srgbClr val="1E2761"/>
                 </a:solidFill>
@@ -2121,9 +2210,9 @@
                 <a:ea typeface="Malgun Gothic" pitchFamily="34" charset="-122"/>
                 <a:cs typeface="Malgun Gothic" pitchFamily="34" charset="-120"/>
               </a:rPr>
-              <a:t>① 발사에서 포획까지 걸리는 시간 τ 를 셋으로 쪼개 계산했습니다</a:t>
-            </a:r>
-            <a:endParaRPr lang="en-US" sz="1300" dirty="0"/>
+              <a:t>①  발사에서 포획까지 걸리는 시간 τ 를 셋으로 쪼갰습니다  —  0.30 초</a:t>
+            </a:r>
+            <a:endParaRPr lang="en-US" sz="1240" dirty="0"/>
           </a:p>
         </p:txBody>
       </p:sp>
@@ -2135,63 +2224,27 @@
         </p:nvSpPr>
         <p:spPr>
           <a:xfrm>
-            <a:off x="5943600" y="1645920"/>
-            <a:ext cx="1188720" cy="347472"/>
-          </a:xfrm>
-          <a:prstGeom prst="rect">
-            <a:avLst/>
-          </a:prstGeom>
-          <a:noFill/>
-          <a:ln/>
-        </p:spPr>
-        <p:txBody>
-          <a:bodyPr wrap="square" lIns="0" tIns="0" rIns="0" bIns="0" rtlCol="0" anchor="ctr"/>
-          <a:lstStyle/>
-          <a:p>
-            <a:pPr indent="0" marL="0">
-              <a:buNone/>
-            </a:pPr>
-            <a:r>
-              <a:rPr lang="en-US" sz="2100" b="1" dirty="0">
-                <a:solidFill>
-                  <a:srgbClr val="1E2761"/>
-                </a:solidFill>
-                <a:latin typeface="Malgun Gothic" pitchFamily="34" charset="0"/>
-                <a:ea typeface="Malgun Gothic" pitchFamily="34" charset="-122"/>
-                <a:cs typeface="Malgun Gothic" pitchFamily="34" charset="-120"/>
-              </a:rPr>
-              <a:t>0.30초</a:t>
-            </a:r>
-            <a:endParaRPr lang="en-US" sz="2100" dirty="0"/>
-          </a:p>
-        </p:txBody>
-      </p:sp>
-      <p:sp>
-        <p:nvSpPr>
-          <p:cNvPr id="8" name="Text 5"/>
-          <p:cNvSpPr/>
-          <p:nvPr/>
-        </p:nvSpPr>
-        <p:spPr>
-          <a:xfrm>
-            <a:off x="7178040" y="1645920"/>
-            <a:ext cx="4370832" cy="347472"/>
-          </a:xfrm>
-          <a:prstGeom prst="rect">
-            <a:avLst/>
-          </a:prstGeom>
-          <a:noFill/>
-          <a:ln/>
-        </p:spPr>
-        <p:txBody>
-          <a:bodyPr wrap="square" lIns="0" tIns="0" rIns="0" bIns="0" rtlCol="0" anchor="ctr"/>
-          <a:lstStyle/>
-          <a:p>
-            <a:pPr indent="0" marL="0">
-              <a:buNone/>
-            </a:pPr>
-            <a:r>
-              <a:rPr lang="en-US" sz="1020" b="1" dirty="0">
+            <a:off x="5321808" y="1517904"/>
+            <a:ext cx="6227064" cy="438912"/>
+          </a:xfrm>
+          <a:prstGeom prst="rect">
+            <a:avLst/>
+          </a:prstGeom>
+          <a:noFill/>
+          <a:ln/>
+        </p:spPr>
+        <p:txBody>
+          <a:bodyPr wrap="square" lIns="0" tIns="0" rIns="0" bIns="0" rtlCol="0" anchor="ctr"/>
+          <a:lstStyle/>
+          <a:p>
+            <a:pPr indent="0" marL="0">
+              <a:lnSpc>
+                <a:spcPct val="110000"/>
+              </a:lnSpc>
+              <a:buNone/>
+            </a:pPr>
+            <a:r>
+              <a:rPr lang="en-US" sz="950" b="1" dirty="0">
                 <a:solidFill>
                   <a:srgbClr val="4A5568"/>
                 </a:solidFill>
@@ -2199,13 +2252,16 @@
                 <a:ea typeface="Malgun Gothic" pitchFamily="34" charset="-122"/>
                 <a:cs typeface="Malgun Gothic" pitchFamily="34" charset="-120"/>
               </a:rPr>
-              <a:t>=  네트가 날아가 펼쳐지는 시간 0.15</a:t>
-            </a:r>
-            <a:pPr indent="0" marL="0">
-              <a:buNone/>
-            </a:pPr>
-            <a:r>
-              <a:rPr lang="en-US" sz="1020" dirty="0">
+              <a:t>네트가 날아가 펼쳐지는 0.15  +  표적을 다시 보는 0.10  +  판단 0.05  (초).  </a:t>
+            </a:r>
+            <a:pPr indent="0" marL="0">
+              <a:lnSpc>
+                <a:spcPct val="110000"/>
+              </a:lnSpc>
+              <a:buNone/>
+            </a:pPr>
+            <a:r>
+              <a:rPr lang="en-US" sz="950" dirty="0">
                 <a:solidFill>
                   <a:srgbClr val="4A5568"/>
                 </a:solidFill>
@@ -2213,76 +2269,34 @@
                 <a:ea typeface="Malgun Gothic" pitchFamily="34" charset="-122"/>
                 <a:cs typeface="Malgun Gothic" pitchFamily="34" charset="-120"/>
               </a:rPr>
-              <a:t>  +  표적을 다시 보는 데 걸리는 0.10  +  판단 0.05   (초)</a:t>
-            </a:r>
-            <a:endParaRPr lang="en-US" sz="1020" dirty="0"/>
-          </a:p>
-        </p:txBody>
-      </p:sp>
-      <p:sp>
-        <p:nvSpPr>
-          <p:cNvPr id="9" name="Text 6"/>
-          <p:cNvSpPr/>
-          <p:nvPr/>
-        </p:nvSpPr>
-        <p:spPr>
-          <a:xfrm>
-            <a:off x="5943600" y="2029968"/>
-            <a:ext cx="5605272" cy="548640"/>
-          </a:xfrm>
-          <a:prstGeom prst="rect">
-            <a:avLst/>
-          </a:prstGeom>
-          <a:noFill/>
-          <a:ln/>
-        </p:spPr>
-        <p:txBody>
-          <a:bodyPr wrap="square" lIns="0" tIns="0" rIns="0" bIns="0" rtlCol="0" anchor="ctr"/>
-          <a:lstStyle/>
-          <a:p>
-            <a:pPr indent="0" marL="0">
-              <a:lnSpc>
-                <a:spcPct val="114000"/>
-              </a:lnSpc>
-              <a:buNone/>
-            </a:pPr>
-            <a:r>
-              <a:rPr lang="en-US" sz="1010" dirty="0">
-                <a:solidFill>
-                  <a:srgbClr val="4A5568"/>
-                </a:solidFill>
-                <a:latin typeface="Malgun Gothic" pitchFamily="34" charset="0"/>
-                <a:ea typeface="Malgun Gothic" pitchFamily="34" charset="-122"/>
-                <a:cs typeface="Malgun Gothic" pitchFamily="34" charset="-120"/>
-              </a:rPr>
-              <a:t>이 지연을 실제로 재서 보고한 선행 연구가 없었습니다. 그래서 세 단계로 쪼개 각각을 실험 논문(네트 비행)과 센서 사양(탐지 주기)에서 가져와 더했습니다. 일부러 뺀 항목이 있으므로 0.30초는 “적어도 이만큼”인 하한값입니다.</a:t>
-            </a:r>
-            <a:endParaRPr lang="en-US" sz="1010" dirty="0"/>
-          </a:p>
-        </p:txBody>
-      </p:sp>
-      <p:sp>
-        <p:nvSpPr>
-          <p:cNvPr id="10" name="Shape 7"/>
-          <p:cNvSpPr/>
-          <p:nvPr/>
-        </p:nvSpPr>
-        <p:spPr>
-          <a:xfrm>
-            <a:off x="5760720" y="2761488"/>
-            <a:ext cx="5971032" cy="1408176"/>
+              <a:t>이 지연을 잰 선행 연구가 없어(검색 범위 = 네트 포획 드론 문헌) 세 단계로 쪼개 실험 논문·센서 사양에서 가져왔고, 일부러 뺀 항목이 있어 “적어도 이만큼”인 하한값입니다.</a:t>
+            </a:r>
+            <a:endParaRPr lang="en-US" sz="950" dirty="0"/>
+          </a:p>
+        </p:txBody>
+      </p:sp>
+      <p:sp>
+        <p:nvSpPr>
+          <p:cNvPr id="8" name="Shape 5"/>
+          <p:cNvSpPr/>
+          <p:nvPr/>
+        </p:nvSpPr>
+        <p:spPr>
+          <a:xfrm>
+            <a:off x="5138928" y="2084832"/>
+            <a:ext cx="6592824" cy="804672"/>
           </a:xfrm>
           <a:prstGeom prst="roundRect">
             <a:avLst>
-              <a:gd name="adj" fmla="val 5195"/>
+              <a:gd name="adj" fmla="val 9091"/>
             </a:avLst>
           </a:prstGeom>
           <a:solidFill>
-            <a:srgbClr val="EEF3FB"/>
+            <a:srgbClr val="FDF6EA"/>
           </a:solidFill>
           <a:ln w="12700">
             <a:solidFill>
-              <a:srgbClr val="D5DEEC"/>
+              <a:srgbClr val="E8D4B4"/>
             </a:solidFill>
             <a:prstDash val="solid"/>
           </a:ln>
@@ -2290,30 +2304,123 @@
       </p:sp>
       <p:sp>
         <p:nvSpPr>
-          <p:cNvPr id="11" name="Text 8"/>
-          <p:cNvSpPr/>
-          <p:nvPr/>
-        </p:nvSpPr>
-        <p:spPr>
-          <a:xfrm>
-            <a:off x="5943600" y="2852928"/>
-            <a:ext cx="5605272" cy="256032"/>
-          </a:xfrm>
-          <a:prstGeom prst="rect">
-            <a:avLst/>
-          </a:prstGeom>
-          <a:noFill/>
-          <a:ln/>
-        </p:spPr>
-        <p:txBody>
-          <a:bodyPr wrap="square" lIns="0" tIns="0" rIns="0" bIns="0" rtlCol="0" anchor="ctr"/>
-          <a:lstStyle/>
-          <a:p>
-            <a:pPr indent="0" marL="0">
-              <a:buNone/>
-            </a:pPr>
-            <a:r>
-              <a:rPr lang="en-US" sz="1300" b="1" dirty="0">
+          <p:cNvPr id="9" name="Text 6"/>
+          <p:cNvSpPr/>
+          <p:nvPr/>
+        </p:nvSpPr>
+        <p:spPr>
+          <a:xfrm>
+            <a:off x="5321808" y="2139696"/>
+            <a:ext cx="6227064" cy="219456"/>
+          </a:xfrm>
+          <a:prstGeom prst="rect">
+            <a:avLst/>
+          </a:prstGeom>
+          <a:noFill/>
+          <a:ln/>
+        </p:spPr>
+        <p:txBody>
+          <a:bodyPr wrap="square" lIns="0" tIns="0" rIns="0" bIns="0" rtlCol="0" anchor="ctr"/>
+          <a:lstStyle/>
+          <a:p>
+            <a:pPr indent="0" marL="0">
+              <a:buNone/>
+            </a:pPr>
+            <a:r>
+              <a:rPr lang="en-US" sz="1240" b="1" dirty="0">
+                <a:solidFill>
+                  <a:srgbClr val="D97706"/>
+                </a:solidFill>
+                <a:latin typeface="Malgun Gothic" pitchFamily="34" charset="0"/>
+                <a:ea typeface="Malgun Gothic" pitchFamily="34" charset="-122"/>
+                <a:cs typeface="Malgun Gothic" pitchFamily="34" charset="-120"/>
+              </a:rPr>
+              <a:t>②  첫 번째 경계 — 도달 범위가 정합니다  (왼쪽 그림)</a:t>
+            </a:r>
+            <a:endParaRPr lang="en-US" sz="1240" dirty="0"/>
+          </a:p>
+        </p:txBody>
+      </p:sp>
+      <p:sp>
+        <p:nvSpPr>
+          <p:cNvPr id="10" name="Text 7"/>
+          <p:cNvSpPr/>
+          <p:nvPr/>
+        </p:nvSpPr>
+        <p:spPr>
+          <a:xfrm>
+            <a:off x="5321808" y="2377440"/>
+            <a:ext cx="6227064" cy="457200"/>
+          </a:xfrm>
+          <a:prstGeom prst="rect">
+            <a:avLst/>
+          </a:prstGeom>
+          <a:noFill/>
+          <a:ln/>
+        </p:spPr>
+        <p:txBody>
+          <a:bodyPr wrap="square" lIns="0" tIns="0" rIns="0" bIns="0" rtlCol="0" anchor="ctr"/>
+          <a:lstStyle/>
+          <a:p>
+            <a:pPr indent="0" marL="0">
+              <a:lnSpc>
+                <a:spcPct val="110000"/>
+              </a:lnSpc>
+              <a:buNone/>
+            </a:pPr>
+            <a:r>
+              <a:rPr lang="en-US" sz="950" dirty="0">
+                <a:solidFill>
+                  <a:srgbClr val="4A5568"/>
+                </a:solidFill>
+                <a:latin typeface="Malgun Gothic" pitchFamily="34" charset="0"/>
+                <a:ea typeface="Malgun Gothic" pitchFamily="34" charset="-122"/>
+                <a:cs typeface="Malgun Gothic" pitchFamily="34" charset="-120"/>
+              </a:rPr>
+              <a:t>τ 동안 공격 드론은 옆으로 w = ½·a·τ² 만큼 빠져나갈 수 있습니다. 이게 네트가 덮는 반경 ρ 보다 커지면 네트를 어디에 놓아도 못 잡습니다. 경계는 </a:t>
+            </a:r>
+            <a:pPr indent="0" marL="0">
+              <a:lnSpc>
+                <a:spcPct val="110000"/>
+              </a:lnSpc>
+              <a:buNone/>
+            </a:pPr>
+            <a:r>
+              <a:rPr lang="en-US" sz="950" b="1" dirty="0">
+                <a:solidFill>
+                  <a:srgbClr val="D97706"/>
+                </a:solidFill>
+                <a:latin typeface="Malgun Gothic" pitchFamily="34" charset="0"/>
+                <a:ea typeface="Malgun Gothic" pitchFamily="34" charset="-122"/>
+                <a:cs typeface="Malgun Gothic" pitchFamily="34" charset="-120"/>
+              </a:rPr>
+              <a:t>a* = 2ρ / τ² = 39.3 m/s²</a:t>
+            </a:r>
+            <a:pPr indent="0" marL="0">
+              <a:lnSpc>
+                <a:spcPct val="110000"/>
+              </a:lnSpc>
+              <a:buNone/>
+            </a:pPr>
+            <a:r>
+              <a:rPr lang="en-US" sz="950" dirty="0">
+                <a:solidFill>
+                  <a:srgbClr val="4A5568"/>
+                </a:solidFill>
+                <a:latin typeface="Malgun Gothic" pitchFamily="34" charset="0"/>
+                <a:ea typeface="Malgun Gothic" pitchFamily="34" charset="-122"/>
+                <a:cs typeface="Malgun Gothic" pitchFamily="34" charset="-120"/>
+              </a:rPr>
+              <a:t> 이고, 이 위에서 네트 포획은 </a:t>
+            </a:r>
+            <a:pPr indent="0" marL="0">
+              <a:lnSpc>
+                <a:spcPct val="110000"/>
+              </a:lnSpc>
+              <a:buNone/>
+            </a:pPr>
+            <a:r>
+              <a:rPr lang="en-US" sz="950" b="1" dirty="0">
                 <a:solidFill>
                   <a:srgbClr val="1E2761"/>
                 </a:solidFill>
@@ -2321,11 +2428,55 @@
                 <a:ea typeface="Malgun Gothic" pitchFamily="34" charset="-122"/>
                 <a:cs typeface="Malgun Gothic" pitchFamily="34" charset="-120"/>
               </a:rPr>
-              <a:t>② 필요한 물리값을 실제 실험이 있는 논문에서 가져왔습니다</a:t>
-            </a:r>
-            <a:endParaRPr lang="en-US" sz="1300" dirty="0"/>
-          </a:p>
-        </p:txBody>
+              <a:t>1,635 판 중 0 회</a:t>
+            </a:r>
+            <a:pPr indent="0" marL="0">
+              <a:lnSpc>
+                <a:spcPct val="110000"/>
+              </a:lnSpc>
+              <a:buNone/>
+            </a:pPr>
+            <a:r>
+              <a:rPr lang="en-US" sz="950" dirty="0">
+                <a:solidFill>
+                  <a:srgbClr val="4A5568"/>
+                </a:solidFill>
+                <a:latin typeface="Malgun Gothic" pitchFamily="34" charset="0"/>
+                <a:ea typeface="Malgun Gothic" pitchFamily="34" charset="-122"/>
+                <a:cs typeface="Malgun Gothic" pitchFamily="34" charset="-120"/>
+              </a:rPr>
+              <a:t> — 예외가 없었습니다.</a:t>
+            </a:r>
+            <a:endParaRPr lang="en-US" sz="950" dirty="0"/>
+          </a:p>
+        </p:txBody>
+      </p:sp>
+      <p:sp>
+        <p:nvSpPr>
+          <p:cNvPr id="11" name="Shape 8"/>
+          <p:cNvSpPr/>
+          <p:nvPr/>
+        </p:nvSpPr>
+        <p:spPr>
+          <a:xfrm>
+            <a:off x="5138928" y="2962656"/>
+            <a:ext cx="6592824" cy="932688"/>
+          </a:xfrm>
+          <a:prstGeom prst="roundRect">
+            <a:avLst>
+              <a:gd name="adj" fmla="val 7843"/>
+            </a:avLst>
+          </a:prstGeom>
+          <a:solidFill>
+            <a:srgbClr val="F0F7F9"/>
+          </a:solidFill>
+          <a:ln w="12700">
+            <a:solidFill>
+              <a:srgbClr val="BBD6DC"/>
+            </a:solidFill>
+            <a:prstDash val="solid"/>
+          </a:ln>
+        </p:spPr>
       </p:sp>
       <p:sp>
         <p:nvSpPr>
@@ -2335,24 +2486,152 @@
         </p:nvSpPr>
         <p:spPr>
           <a:xfrm>
-            <a:off x="5943600" y="3182112"/>
-            <a:ext cx="1874520" cy="228600"/>
-          </a:xfrm>
-          <a:prstGeom prst="rect">
-            <a:avLst/>
-          </a:prstGeom>
-          <a:noFill/>
-          <a:ln/>
-        </p:spPr>
-        <p:txBody>
-          <a:bodyPr wrap="square" lIns="0" tIns="0" rIns="0" bIns="0" rtlCol="0" anchor="ctr"/>
-          <a:lstStyle/>
-          <a:p>
-            <a:pPr indent="0" marL="0">
-              <a:buNone/>
-            </a:pPr>
-            <a:r>
-              <a:rPr lang="en-US" sz="1000" b="1" dirty="0">
+            <a:off x="5321808" y="3017520"/>
+            <a:ext cx="6227064" cy="219456"/>
+          </a:xfrm>
+          <a:prstGeom prst="rect">
+            <a:avLst/>
+          </a:prstGeom>
+          <a:noFill/>
+          <a:ln/>
+        </p:spPr>
+        <p:txBody>
+          <a:bodyPr wrap="square" lIns="0" tIns="0" rIns="0" bIns="0" rtlCol="0" anchor="ctr"/>
+          <a:lstStyle/>
+          <a:p>
+            <a:pPr indent="0" marL="0">
+              <a:buNone/>
+            </a:pPr>
+            <a:r>
+              <a:rPr lang="en-US" sz="1240" b="1" dirty="0">
+                <a:solidFill>
+                  <a:srgbClr val="1F7A8C"/>
+                </a:solidFill>
+                <a:latin typeface="Malgun Gothic" pitchFamily="34" charset="0"/>
+                <a:ea typeface="Malgun Gothic" pitchFamily="34" charset="-122"/>
+                <a:cs typeface="Malgun Gothic" pitchFamily="34" charset="-120"/>
+              </a:rPr>
+              <a:t>③  두 번째 경계 — 도달 범위가 아니라 겨냥 정밀도가 정합니다</a:t>
+            </a:r>
+            <a:endParaRPr lang="en-US" sz="1240" dirty="0"/>
+          </a:p>
+        </p:txBody>
+      </p:sp>
+      <p:sp>
+        <p:nvSpPr>
+          <p:cNvPr id="13" name="Text 10"/>
+          <p:cNvSpPr/>
+          <p:nvPr/>
+        </p:nvSpPr>
+        <p:spPr>
+          <a:xfrm>
+            <a:off x="5321808" y="3255264"/>
+            <a:ext cx="6227064" cy="585216"/>
+          </a:xfrm>
+          <a:prstGeom prst="rect">
+            <a:avLst/>
+          </a:prstGeom>
+          <a:noFill/>
+          <a:ln/>
+        </p:spPr>
+        <p:txBody>
+          <a:bodyPr wrap="square" lIns="0" tIns="0" rIns="0" bIns="0" rtlCol="0" anchor="ctr"/>
+          <a:lstStyle/>
+          <a:p>
+            <a:pPr indent="0" marL="0">
+              <a:lnSpc>
+                <a:spcPct val="110000"/>
+              </a:lnSpc>
+              <a:buNone/>
+            </a:pPr>
+            <a:r>
+              <a:rPr lang="en-US" sz="950" dirty="0">
+                <a:solidFill>
+                  <a:srgbClr val="4A5568"/>
+                </a:solidFill>
+                <a:latin typeface="Malgun Gothic" pitchFamily="34" charset="0"/>
+                <a:ea typeface="Malgun Gothic" pitchFamily="34" charset="-122"/>
+                <a:cs typeface="Malgun Gothic" pitchFamily="34" charset="-120"/>
+              </a:rPr>
+              <a:t>실제로는 완벽히 겨눌 수 없습니다. 남는 조준각을 따로 쟀더니 중앙값 4.3° 였고, 이걸 넣은 a*(ψ) = 2d (tanθ − ψ) / τ² 는 </a:t>
+            </a:r>
+            <a:pPr indent="0" marL="0">
+              <a:lnSpc>
+                <a:spcPct val="110000"/>
+              </a:lnSpc>
+              <a:buNone/>
+            </a:pPr>
+            <a:r>
+              <a:rPr lang="en-US" sz="950" b="1" dirty="0">
+                <a:solidFill>
+                  <a:srgbClr val="1F7A8C"/>
+                </a:solidFill>
+                <a:latin typeface="Malgun Gothic" pitchFamily="34" charset="0"/>
+                <a:ea typeface="Malgun Gothic" pitchFamily="34" charset="-122"/>
+                <a:cs typeface="Malgun Gothic" pitchFamily="34" charset="-120"/>
+              </a:rPr>
+              <a:t>25.8</a:t>
+            </a:r>
+            <a:pPr indent="0" marL="0">
+              <a:lnSpc>
+                <a:spcPct val="110000"/>
+              </a:lnSpc>
+              <a:buNone/>
+            </a:pPr>
+            <a:r>
+              <a:rPr lang="en-US" sz="950" dirty="0">
+                <a:solidFill>
+                  <a:srgbClr val="4A5568"/>
+                </a:solidFill>
+                <a:latin typeface="Malgun Gothic" pitchFamily="34" charset="0"/>
+                <a:ea typeface="Malgun Gothic" pitchFamily="34" charset="-122"/>
+                <a:cs typeface="Malgun Gothic" pitchFamily="34" charset="-120"/>
+              </a:rPr>
+              <a:t> 입니다. 곡선이 실제로 무너지는 지점은 </a:t>
+            </a:r>
+            <a:pPr indent="0" marL="0">
+              <a:lnSpc>
+                <a:spcPct val="110000"/>
+              </a:lnSpc>
+              <a:buNone/>
+            </a:pPr>
+            <a:r>
+              <a:rPr lang="en-US" sz="950" b="1" dirty="0">
+                <a:solidFill>
+                  <a:srgbClr val="1F7A8C"/>
+                </a:solidFill>
+                <a:latin typeface="Malgun Gothic" pitchFamily="34" charset="0"/>
+                <a:ea typeface="Malgun Gothic" pitchFamily="34" charset="-122"/>
+                <a:cs typeface="Malgun Gothic" pitchFamily="34" charset="-120"/>
+              </a:rPr>
+              <a:t>23.8</a:t>
+            </a:r>
+            <a:pPr indent="0" marL="0">
+              <a:lnSpc>
+                <a:spcPct val="110000"/>
+              </a:lnSpc>
+              <a:buNone/>
+            </a:pPr>
+            <a:r>
+              <a:rPr lang="en-US" sz="950" dirty="0">
+                <a:solidFill>
+                  <a:srgbClr val="4A5568"/>
+                </a:solidFill>
+                <a:latin typeface="Malgun Gothic" pitchFamily="34" charset="0"/>
+                <a:ea typeface="Malgun Gothic" pitchFamily="34" charset="-122"/>
+                <a:cs typeface="Malgun Gothic" pitchFamily="34" charset="-120"/>
+              </a:rPr>
+              <a:t> — 전혀 다른 방법으로 잰 두 값이 7.5 % 안에서 만납니다.
+</a:t>
+            </a:r>
+            <a:pPr indent="0" marL="0">
+              <a:lnSpc>
+                <a:spcPct val="110000"/>
+              </a:lnSpc>
+              <a:buNone/>
+            </a:pPr>
+            <a:r>
+              <a:rPr lang="en-US" sz="950" b="1" dirty="0">
                 <a:solidFill>
                   <a:srgbClr val="1E2761"/>
                 </a:solidFill>
@@ -2360,38 +2639,16 @@
                 <a:ea typeface="Malgun Gothic" pitchFamily="34" charset="-122"/>
                 <a:cs typeface="Malgun Gothic" pitchFamily="34" charset="-120"/>
               </a:rPr>
-              <a:t>· 네트가 덮는 반경</a:t>
-            </a:r>
-            <a:endParaRPr lang="en-US" sz="1000" dirty="0"/>
-          </a:p>
-        </p:txBody>
-      </p:sp>
-      <p:sp>
-        <p:nvSpPr>
-          <p:cNvPr id="13" name="Text 10"/>
-          <p:cNvSpPr/>
-          <p:nvPr/>
-        </p:nvSpPr>
-        <p:spPr>
-          <a:xfrm>
-            <a:off x="7845552" y="3182112"/>
-            <a:ext cx="3703320" cy="228600"/>
-          </a:xfrm>
-          <a:prstGeom prst="rect">
-            <a:avLst/>
-          </a:prstGeom>
-          <a:noFill/>
-          <a:ln/>
-        </p:spPr>
-        <p:txBody>
-          <a:bodyPr wrap="square" lIns="0" tIns="0" rIns="0" bIns="0" rtlCol="0" anchor="ctr"/>
-          <a:lstStyle/>
-          <a:p>
-            <a:pPr indent="0" marL="0">
-              <a:buNone/>
-            </a:pPr>
-            <a:r>
-              <a:rPr lang="en-US" sz="960" dirty="0">
+              <a:t>몰아주는 배치가 이득을 못 낸 이유도 이것입니다  </a:t>
+            </a:r>
+            <a:pPr indent="0" marL="0">
+              <a:lnSpc>
+                <a:spcPct val="110000"/>
+              </a:lnSpc>
+              <a:buNone/>
+            </a:pPr>
+            <a:r>
+              <a:rPr lang="en-US" sz="950" dirty="0">
                 <a:solidFill>
                   <a:srgbClr val="4A5568"/>
                 </a:solidFill>
@@ -2399,249 +2656,15 @@
                 <a:ea typeface="Malgun Gothic" pitchFamily="34" charset="-122"/>
                 <a:cs typeface="Malgun Gothic" pitchFamily="34" charset="-120"/>
               </a:rPr>
-              <a:t>Xu 2025 (Drones) 실험표에서 역산 — 같은 논문의 다른 표 값과 정확히 일치하는 것까지 확인</a:t>
-            </a:r>
-            <a:endParaRPr lang="en-US" sz="960" dirty="0"/>
-          </a:p>
-        </p:txBody>
-      </p:sp>
-      <p:sp>
-        <p:nvSpPr>
-          <p:cNvPr id="14" name="Text 11"/>
-          <p:cNvSpPr/>
-          <p:nvPr/>
-        </p:nvSpPr>
-        <p:spPr>
-          <a:xfrm>
-            <a:off x="5943600" y="3419856"/>
-            <a:ext cx="1874520" cy="228600"/>
-          </a:xfrm>
-          <a:prstGeom prst="rect">
-            <a:avLst/>
-          </a:prstGeom>
-          <a:noFill/>
-          <a:ln/>
-        </p:spPr>
-        <p:txBody>
-          <a:bodyPr wrap="square" lIns="0" tIns="0" rIns="0" bIns="0" rtlCol="0" anchor="ctr"/>
-          <a:lstStyle/>
-          <a:p>
-            <a:pPr indent="0" marL="0">
-              <a:buNone/>
-            </a:pPr>
-            <a:r>
-              <a:rPr lang="en-US" sz="1000" b="1" dirty="0">
-                <a:solidFill>
-                  <a:srgbClr val="1E2761"/>
-                </a:solidFill>
-                <a:latin typeface="Malgun Gothic" pitchFamily="34" charset="0"/>
-                <a:ea typeface="Malgun Gothic" pitchFamily="34" charset="-122"/>
-                <a:cs typeface="Malgun Gothic" pitchFamily="34" charset="-120"/>
-              </a:rPr>
-              <a:t>· 네트가 펼쳐지는 시각</a:t>
-            </a:r>
-            <a:endParaRPr lang="en-US" sz="1000" dirty="0"/>
-          </a:p>
-        </p:txBody>
-      </p:sp>
-      <p:sp>
-        <p:nvSpPr>
-          <p:cNvPr id="15" name="Text 12"/>
-          <p:cNvSpPr/>
-          <p:nvPr/>
-        </p:nvSpPr>
-        <p:spPr>
-          <a:xfrm>
-            <a:off x="7845552" y="3419856"/>
-            <a:ext cx="3703320" cy="228600"/>
-          </a:xfrm>
-          <a:prstGeom prst="rect">
-            <a:avLst/>
-          </a:prstGeom>
-          <a:noFill/>
-          <a:ln/>
-        </p:spPr>
-        <p:txBody>
-          <a:bodyPr wrap="square" lIns="0" tIns="0" rIns="0" bIns="0" rtlCol="0" anchor="ctr"/>
-          <a:lstStyle/>
-          <a:p>
-            <a:pPr indent="0" marL="0">
-              <a:buNone/>
-            </a:pPr>
-            <a:r>
-              <a:rPr lang="en-US" sz="960" dirty="0">
-                <a:solidFill>
-                  <a:srgbClr val="4A5568"/>
-                </a:solidFill>
-                <a:latin typeface="Malgun Gothic" pitchFamily="34" charset="0"/>
-                <a:ea typeface="Malgun Gothic" pitchFamily="34" charset="-122"/>
-                <a:cs typeface="Malgun Gothic" pitchFamily="34" charset="-120"/>
-              </a:rPr>
-              <a:t>Xu 2025 의 외부 측정값 0.13초</a:t>
-            </a:r>
-            <a:endParaRPr lang="en-US" sz="960" dirty="0"/>
-          </a:p>
-        </p:txBody>
-      </p:sp>
-      <p:sp>
-        <p:nvSpPr>
-          <p:cNvPr id="16" name="Text 13"/>
-          <p:cNvSpPr/>
-          <p:nvPr/>
-        </p:nvSpPr>
-        <p:spPr>
-          <a:xfrm>
-            <a:off x="5943600" y="3657600"/>
-            <a:ext cx="1874520" cy="228600"/>
-          </a:xfrm>
-          <a:prstGeom prst="rect">
-            <a:avLst/>
-          </a:prstGeom>
-          <a:noFill/>
-          <a:ln/>
-        </p:spPr>
-        <p:txBody>
-          <a:bodyPr wrap="square" lIns="0" tIns="0" rIns="0" bIns="0" rtlCol="0" anchor="ctr"/>
-          <a:lstStyle/>
-          <a:p>
-            <a:pPr indent="0" marL="0">
-              <a:buNone/>
-            </a:pPr>
-            <a:r>
-              <a:rPr lang="en-US" sz="1000" b="1" dirty="0">
-                <a:solidFill>
-                  <a:srgbClr val="1E2761"/>
-                </a:solidFill>
-                <a:latin typeface="Malgun Gothic" pitchFamily="34" charset="0"/>
-                <a:ea typeface="Malgun Gothic" pitchFamily="34" charset="-122"/>
-                <a:cs typeface="Malgun Gothic" pitchFamily="34" charset="-120"/>
-              </a:rPr>
-              <a:t>· 방어자 대 공격자 성능비</a:t>
-            </a:r>
-            <a:endParaRPr lang="en-US" sz="1000" dirty="0"/>
-          </a:p>
-        </p:txBody>
-      </p:sp>
-      <p:sp>
-        <p:nvSpPr>
-          <p:cNvPr id="17" name="Text 14"/>
-          <p:cNvSpPr/>
-          <p:nvPr/>
-        </p:nvSpPr>
-        <p:spPr>
-          <a:xfrm>
-            <a:off x="7845552" y="3657600"/>
-            <a:ext cx="3703320" cy="228600"/>
-          </a:xfrm>
-          <a:prstGeom prst="rect">
-            <a:avLst/>
-          </a:prstGeom>
-          <a:noFill/>
-          <a:ln/>
-        </p:spPr>
-        <p:txBody>
-          <a:bodyPr wrap="square" lIns="0" tIns="0" rIns="0" bIns="0" rtlCol="0" anchor="ctr"/>
-          <a:lstStyle/>
-          <a:p>
-            <a:pPr indent="0" marL="0">
-              <a:buNone/>
-            </a:pPr>
-            <a:r>
-              <a:rPr lang="en-US" sz="960" dirty="0">
-                <a:solidFill>
-                  <a:srgbClr val="4A5568"/>
-                </a:solidFill>
-                <a:latin typeface="Malgun Gothic" pitchFamily="34" charset="0"/>
-                <a:ea typeface="Malgun Gothic" pitchFamily="34" charset="-122"/>
-                <a:cs typeface="Malgun Gothic" pitchFamily="34" charset="-120"/>
-              </a:rPr>
-              <a:t>Pliska 2024 (RA-L) 실기 비행 — 가속 0.36배, 속도는 동급</a:t>
-            </a:r>
-            <a:endParaRPr lang="en-US" sz="960" dirty="0"/>
-          </a:p>
-        </p:txBody>
-      </p:sp>
-      <p:sp>
-        <p:nvSpPr>
-          <p:cNvPr id="18" name="Text 15"/>
-          <p:cNvSpPr/>
-          <p:nvPr/>
-        </p:nvSpPr>
-        <p:spPr>
-          <a:xfrm>
-            <a:off x="5943600" y="3895344"/>
-            <a:ext cx="1874520" cy="228600"/>
-          </a:xfrm>
-          <a:prstGeom prst="rect">
-            <a:avLst/>
-          </a:prstGeom>
-          <a:noFill/>
-          <a:ln/>
-        </p:spPr>
-        <p:txBody>
-          <a:bodyPr wrap="square" lIns="0" tIns="0" rIns="0" bIns="0" rtlCol="0" anchor="ctr"/>
-          <a:lstStyle/>
-          <a:p>
-            <a:pPr indent="0" marL="0">
-              <a:buNone/>
-            </a:pPr>
-            <a:r>
-              <a:rPr lang="en-US" sz="1000" b="1" dirty="0">
-                <a:solidFill>
-                  <a:srgbClr val="1E2761"/>
-                </a:solidFill>
-                <a:latin typeface="Malgun Gothic" pitchFamily="34" charset="0"/>
-                <a:ea typeface="Malgun Gothic" pitchFamily="34" charset="-122"/>
-                <a:cs typeface="Malgun Gothic" pitchFamily="34" charset="-120"/>
-              </a:rPr>
-              <a:t>· 표적을 다시 보는 주기</a:t>
-            </a:r>
-            <a:endParaRPr lang="en-US" sz="1000" dirty="0"/>
-          </a:p>
-        </p:txBody>
-      </p:sp>
-      <p:sp>
-        <p:nvSpPr>
-          <p:cNvPr id="19" name="Text 16"/>
-          <p:cNvSpPr/>
-          <p:nvPr/>
-        </p:nvSpPr>
-        <p:spPr>
-          <a:xfrm>
-            <a:off x="7845552" y="3895344"/>
-            <a:ext cx="3703320" cy="228600"/>
-          </a:xfrm>
-          <a:prstGeom prst="rect">
-            <a:avLst/>
-          </a:prstGeom>
-          <a:noFill/>
-          <a:ln/>
-        </p:spPr>
-        <p:txBody>
-          <a:bodyPr wrap="square" lIns="0" tIns="0" rIns="0" bIns="0" rtlCol="0" anchor="ctr"/>
-          <a:lstStyle/>
-          <a:p>
-            <a:pPr indent="0" marL="0">
-              <a:buNone/>
-            </a:pPr>
-            <a:r>
-              <a:rPr lang="en-US" sz="960" dirty="0">
-                <a:solidFill>
-                  <a:srgbClr val="4A5568"/>
-                </a:solidFill>
-                <a:latin typeface="Malgun Gothic" pitchFamily="34" charset="0"/>
-                <a:ea typeface="Malgun Gothic" pitchFamily="34" charset="-122"/>
-                <a:cs typeface="Malgun Gothic" pitchFamily="34" charset="-120"/>
-              </a:rPr>
-              <a:t>센서 사양 — LiDAR 10 Hz · 카메라 5 Hz</a:t>
-            </a:r>
-            <a:endParaRPr lang="en-US" sz="960" dirty="0"/>
+              <a:t>— 옆방향 속도를 0.4 → 7.3 m/s 로 키워 이 경계를 왼쪽으로 밀었습니다.</a:t>
+            </a:r>
+            <a:endParaRPr lang="en-US" sz="950" dirty="0"/>
           </a:p>
         </p:txBody>
       </p:sp>
       <p:pic>
         <p:nvPicPr>
-          <p:cNvPr id="20" name="Image 1" descr="fig_line.png">    </p:cNvPr>
+          <p:cNvPr id="14" name="Image 1" descr="fig_curve.png">    </p:cNvPr>
           <p:cNvPicPr>
             <a:picLocks noChangeAspect="1"/>
           </p:cNvPicPr>
@@ -2655,8 +2678,8 @@
         </p:blipFill>
         <p:spPr>
           <a:xfrm>
-            <a:off x="640080" y="4224528"/>
-            <a:ext cx="10899648" cy="1609344"/>
+            <a:off x="758952" y="4005072"/>
+            <a:ext cx="10671048" cy="2194560"/>
           </a:xfrm>
           <a:prstGeom prst="rect">
             <a:avLst/>
@@ -2665,134 +2688,82 @@
       </p:pic>
       <p:sp>
         <p:nvSpPr>
-          <p:cNvPr id="21" name="Text 17"/>
-          <p:cNvSpPr/>
-          <p:nvPr/>
-        </p:nvSpPr>
-        <p:spPr>
-          <a:xfrm>
-            <a:off x="566928" y="5870448"/>
-            <a:ext cx="11055096" cy="237744"/>
-          </a:xfrm>
-          <a:prstGeom prst="rect">
-            <a:avLst/>
-          </a:prstGeom>
-          <a:noFill/>
-          <a:ln/>
-        </p:spPr>
-        <p:txBody>
-          <a:bodyPr wrap="square" lIns="0" tIns="0" rIns="0" bIns="0" rtlCol="0" anchor="ctr"/>
-          <a:lstStyle/>
-          <a:p>
-            <a:pPr indent="0" marL="0">
-              <a:buNone/>
-            </a:pPr>
-            <a:r>
-              <a:rPr lang="en-US" sz="1020" b="1" dirty="0">
-                <a:solidFill>
-                  <a:srgbClr val="D97706"/>
-                </a:solidFill>
-                <a:latin typeface="Malgun Gothic" pitchFamily="34" charset="0"/>
-                <a:ea typeface="Malgun Gothic" pitchFamily="34" charset="-122"/>
-                <a:cs typeface="Malgun Gothic" pitchFamily="34" charset="-120"/>
-              </a:rPr>
-              <a:t>단서 : </a:t>
-            </a:r>
-            <a:pPr indent="0" marL="0">
-              <a:buNone/>
-            </a:pPr>
-            <a:r>
-              <a:rPr lang="en-US" sz="1020" dirty="0">
-                <a:solidFill>
-                  <a:srgbClr val="4A5568"/>
-                </a:solidFill>
-                <a:latin typeface="Malgun Gothic" pitchFamily="34" charset="0"/>
-                <a:ea typeface="Malgun Gothic" pitchFamily="34" charset="-122"/>
-                <a:cs typeface="Malgun Gothic" pitchFamily="34" charset="-120"/>
-              </a:rPr>
-              <a:t>이 경계는 네트 드론이 이미 정렬을 끝낸 상태의 값입니다 — 겨냥 동작 자체의 속도 한계까지 넣으면 경계는 더 내려갑니다 (두 번째 경계로 정리 중).</a:t>
-            </a:r>
-            <a:endParaRPr lang="en-US" sz="1020" dirty="0"/>
-          </a:p>
-        </p:txBody>
-      </p:sp>
-      <p:sp>
-        <p:nvSpPr>
-          <p:cNvPr id="22" name="Shape 18"/>
-          <p:cNvSpPr/>
-          <p:nvPr/>
-        </p:nvSpPr>
-        <p:spPr>
-          <a:xfrm>
-            <a:off x="457200" y="6163056"/>
-            <a:ext cx="11274552" cy="530352"/>
-          </a:xfrm>
-          <a:prstGeom prst="roundRect">
-            <a:avLst>
-              <a:gd name="adj" fmla="val 12069"/>
-            </a:avLst>
-          </a:prstGeom>
-          <a:solidFill>
-            <a:srgbClr val="2F7A4F"/>
-          </a:solidFill>
-          <a:ln w="12700">
-            <a:solidFill>
-              <a:srgbClr val="2F7A4F"/>
-            </a:solidFill>
-            <a:prstDash val="solid"/>
-          </a:ln>
-        </p:spPr>
-      </p:sp>
-      <p:sp>
-        <p:nvSpPr>
-          <p:cNvPr id="23" name="Text 19"/>
-          <p:cNvSpPr/>
-          <p:nvPr/>
-        </p:nvSpPr>
-        <p:spPr>
-          <a:xfrm>
-            <a:off x="713232" y="6163056"/>
-            <a:ext cx="10789920" cy="530352"/>
-          </a:xfrm>
-          <a:prstGeom prst="rect">
-            <a:avLst/>
-          </a:prstGeom>
-          <a:noFill/>
-          <a:ln/>
-        </p:spPr>
-        <p:txBody>
-          <a:bodyPr wrap="square" lIns="0" tIns="0" rIns="0" bIns="0" rtlCol="0" anchor="ctr"/>
-          <a:lstStyle/>
-          <a:p>
-            <a:pPr indent="0" marL="0">
-              <a:buNone/>
-            </a:pPr>
-            <a:r>
-              <a:rPr lang="en-US" sz="1080" b="1" dirty="0">
-                <a:solidFill>
-                  <a:srgbClr val="FFFFFF"/>
-                </a:solidFill>
-                <a:latin typeface="Malgun Gothic" pitchFamily="34" charset="0"/>
-                <a:ea typeface="Malgun Gothic" pitchFamily="34" charset="-122"/>
-                <a:cs typeface="Malgun Gothic" pitchFamily="34" charset="-120"/>
-              </a:rPr>
-              <a:t>연구계획서에 미리 적어둔 진행/중단 기준 → 통과.  </a:t>
-            </a:r>
-            <a:pPr indent="0" marL="0">
-              <a:buNone/>
-            </a:pPr>
-            <a:r>
-              <a:rPr lang="en-US" sz="1080" dirty="0">
-                <a:solidFill>
-                  <a:srgbClr val="FFFFFF"/>
-                </a:solidFill>
-                <a:latin typeface="Malgun Gothic" pitchFamily="34" charset="0"/>
-                <a:ea typeface="Malgun Gothic" pitchFamily="34" charset="-122"/>
-                <a:cs typeface="Malgun Gothic" pitchFamily="34" charset="-120"/>
-              </a:rPr>
-              <a:t>협력이 필요한 영역이 실제로 존재하고, 그 경계가 현실 기체 등급의 한복판을 지납니다. 계획서에는 수치 실험을 반복해 찾겠다고 적었지만, 수식으로 얻어 약속보다 강한 형태가 되었습니다.</a:t>
-            </a:r>
-            <a:endParaRPr lang="en-US" sz="1080" dirty="0"/>
+          <p:cNvPr id="15" name="Text 11"/>
+          <p:cNvSpPr/>
+          <p:nvPr/>
+        </p:nvSpPr>
+        <p:spPr>
+          <a:xfrm>
+            <a:off x="566928" y="6236208"/>
+            <a:ext cx="11055096" cy="274320"/>
+          </a:xfrm>
+          <a:prstGeom prst="rect">
+            <a:avLst/>
+          </a:prstGeom>
+          <a:noFill/>
+          <a:ln/>
+        </p:spPr>
+        <p:txBody>
+          <a:bodyPr wrap="square" lIns="0" tIns="0" rIns="0" bIns="0" rtlCol="0" anchor="ctr"/>
+          <a:lstStyle/>
+          <a:p>
+            <a:pPr indent="0" marL="0">
+              <a:buNone/>
+            </a:pPr>
+            <a:r>
+              <a:rPr lang="en-US" sz="1040" b="1" dirty="0">
+                <a:solidFill>
+                  <a:srgbClr val="2F7A4F"/>
+                </a:solidFill>
+                <a:latin typeface="Malgun Gothic" pitchFamily="34" charset="0"/>
+                <a:ea typeface="Malgun Gothic" pitchFamily="34" charset="-122"/>
+                <a:cs typeface="Malgun Gothic" pitchFamily="34" charset="-120"/>
+              </a:rPr>
+              <a:t>연구계획서의 진행/중단 기준 → 통과.  </a:t>
+            </a:r>
+            <a:pPr indent="0" marL="0">
+              <a:buNone/>
+            </a:pPr>
+            <a:r>
+              <a:rPr lang="en-US" sz="1040" dirty="0">
+                <a:solidFill>
+                  <a:srgbClr val="1E2761"/>
+                </a:solidFill>
+                <a:latin typeface="Malgun Gothic" pitchFamily="34" charset="0"/>
+                <a:ea typeface="Malgun Gothic" pitchFamily="34" charset="-122"/>
+                <a:cs typeface="Malgun Gothic" pitchFamily="34" charset="-120"/>
+              </a:rPr>
+              <a:t>수식이 예측한 위치에서 경계가 관측됐고, 두 번째 경계는 예측→검증까지 닫혔습니다.   </a:t>
+            </a:r>
+            <a:pPr indent="0" marL="0">
+              <a:buNone/>
+            </a:pPr>
+            <a:r>
+              <a:rPr lang="en-US" sz="1040" b="1" dirty="0">
+                <a:solidFill>
+                  <a:srgbClr val="1E2761"/>
+                </a:solidFill>
+                <a:latin typeface="Malgun Gothic" pitchFamily="34" charset="0"/>
+                <a:ea typeface="Malgun Gothic" pitchFamily="34" charset="-122"/>
+                <a:cs typeface="Malgun Gothic" pitchFamily="34" charset="-120"/>
+              </a:rPr>
+              <a:t>학습이 이겨야 할 수도 정해집니다 : </a:t>
+            </a:r>
+            <a:pPr indent="0" marL="0">
+              <a:buNone/>
+            </a:pPr>
+            <a:r>
+              <a:rPr lang="en-US" sz="1040" dirty="0">
+                <a:solidFill>
+                  <a:srgbClr val="1E2761"/>
+                </a:solidFill>
+                <a:latin typeface="Malgun Gothic" pitchFamily="34" charset="0"/>
+                <a:ea typeface="Malgun Gothic" pitchFamily="34" charset="-122"/>
+                <a:cs typeface="Malgun Gothic" pitchFamily="34" charset="-120"/>
+              </a:rPr>
+              <a:t>겨냥 구간에서 손튜닝이 부딪쳐 내는 15.5 % 를, 기체를 부수지 않고.</a:t>
+            </a:r>
+            <a:endParaRPr lang="en-US" sz="1040" dirty="0"/>
           </a:p>
         </p:txBody>
       </p:sp>
@@ -2854,7 +2825,7 @@
                 <a:ea typeface="Malgun Gothic" pitchFamily="34" charset="-122"/>
                 <a:cs typeface="Malgun Gothic" pitchFamily="34" charset="-120"/>
               </a:rPr>
-              <a:t>사전 점검이 네 번 걸러냈습니다 — 남은 판단 하나</a:t>
+              <a:t>사전 점검이 네 번 걸러냈습니다 — 네 번째는 원인까지 찾았습니다</a:t>
             </a:r>
             <a:endParaRPr lang="en-US" sz="2900" dirty="0"/>
           </a:p>
@@ -2908,11 +2879,11 @@
         <p:spPr>
           <a:xfrm>
             <a:off x="457200" y="1243584"/>
-            <a:ext cx="7452360" cy="1060704"/>
+            <a:ext cx="7452360" cy="932688"/>
           </a:xfrm>
           <a:prstGeom prst="roundRect">
             <a:avLst>
-              <a:gd name="adj" fmla="val 6897"/>
+              <a:gd name="adj" fmla="val 7843"/>
             </a:avLst>
           </a:prstGeom>
           <a:solidFill>
@@ -2934,7 +2905,7 @@
         </p:nvSpPr>
         <p:spPr>
           <a:xfrm>
-            <a:off x="640080" y="1563624"/>
+            <a:off x="640080" y="1499616"/>
             <a:ext cx="420624" cy="420624"/>
           </a:xfrm>
           <a:prstGeom prst="ellipse">
@@ -2959,7 +2930,7 @@
         </p:nvSpPr>
         <p:spPr>
           <a:xfrm>
-            <a:off x="640080" y="1563624"/>
+            <a:off x="640080" y="1499616"/>
             <a:ext cx="420624" cy="420624"/>
           </a:xfrm>
           <a:prstGeom prst="rect">
@@ -2998,7 +2969,7 @@
         </p:nvSpPr>
         <p:spPr>
           <a:xfrm>
-            <a:off x="1188720" y="1325880"/>
+            <a:off x="1188720" y="1307592"/>
             <a:ext cx="5120640" cy="256032"/>
           </a:xfrm>
           <a:prstGeom prst="rect">
@@ -3037,7 +3008,7 @@
         </p:nvSpPr>
         <p:spPr>
           <a:xfrm>
-            <a:off x="6400800" y="1325880"/>
+            <a:off x="6400800" y="1307592"/>
             <a:ext cx="1325880" cy="256032"/>
           </a:xfrm>
           <a:prstGeom prst="rect">
@@ -3076,8 +3047,8 @@
         </p:nvSpPr>
         <p:spPr>
           <a:xfrm>
-            <a:off x="1188720" y="1609344"/>
-            <a:ext cx="6035040" cy="621792"/>
+            <a:off x="1188720" y="1581912"/>
+            <a:ext cx="6035040" cy="530352"/>
           </a:xfrm>
           <a:prstGeom prst="rect">
             <a:avLst/>
@@ -3118,12 +3089,12 @@
         </p:nvSpPr>
         <p:spPr>
           <a:xfrm>
-            <a:off x="457200" y="2359152"/>
-            <a:ext cx="7452360" cy="1060704"/>
+            <a:off x="457200" y="2231136"/>
+            <a:ext cx="7452360" cy="932688"/>
           </a:xfrm>
           <a:prstGeom prst="roundRect">
             <a:avLst>
-              <a:gd name="adj" fmla="val 6897"/>
+              <a:gd name="adj" fmla="val 7843"/>
             </a:avLst>
           </a:prstGeom>
           <a:solidFill>
@@ -3145,7 +3116,7 @@
         </p:nvSpPr>
         <p:spPr>
           <a:xfrm>
-            <a:off x="640080" y="2679192"/>
+            <a:off x="640080" y="2487168"/>
             <a:ext cx="420624" cy="420624"/>
           </a:xfrm>
           <a:prstGeom prst="ellipse">
@@ -3170,7 +3141,7 @@
         </p:nvSpPr>
         <p:spPr>
           <a:xfrm>
-            <a:off x="640080" y="2679192"/>
+            <a:off x="640080" y="2487168"/>
             <a:ext cx="420624" cy="420624"/>
           </a:xfrm>
           <a:prstGeom prst="rect">
@@ -3209,7 +3180,7 @@
         </p:nvSpPr>
         <p:spPr>
           <a:xfrm>
-            <a:off x="1188720" y="2441448"/>
+            <a:off x="1188720" y="2295144"/>
             <a:ext cx="5120640" cy="256032"/>
           </a:xfrm>
           <a:prstGeom prst="rect">
@@ -3248,7 +3219,7 @@
         </p:nvSpPr>
         <p:spPr>
           <a:xfrm>
-            <a:off x="6400800" y="2441448"/>
+            <a:off x="6400800" y="2295144"/>
             <a:ext cx="1325880" cy="256032"/>
           </a:xfrm>
           <a:prstGeom prst="rect">
@@ -3287,8 +3258,8 @@
         </p:nvSpPr>
         <p:spPr>
           <a:xfrm>
-            <a:off x="1188720" y="2724912"/>
-            <a:ext cx="6035040" cy="621792"/>
+            <a:off x="1188720" y="2569464"/>
+            <a:ext cx="6035040" cy="530352"/>
           </a:xfrm>
           <a:prstGeom prst="rect">
             <a:avLst/>
@@ -3329,12 +3300,12 @@
         </p:nvSpPr>
         <p:spPr>
           <a:xfrm>
-            <a:off x="457200" y="3474720"/>
-            <a:ext cx="7452360" cy="1060704"/>
+            <a:off x="457200" y="3218688"/>
+            <a:ext cx="7452360" cy="932688"/>
           </a:xfrm>
           <a:prstGeom prst="roundRect">
             <a:avLst>
-              <a:gd name="adj" fmla="val 6897"/>
+              <a:gd name="adj" fmla="val 7843"/>
             </a:avLst>
           </a:prstGeom>
           <a:solidFill>
@@ -3356,7 +3327,7 @@
         </p:nvSpPr>
         <p:spPr>
           <a:xfrm>
-            <a:off x="640080" y="3794760"/>
+            <a:off x="640080" y="3474720"/>
             <a:ext cx="420624" cy="420624"/>
           </a:xfrm>
           <a:prstGeom prst="ellipse">
@@ -3381,7 +3352,7 @@
         </p:nvSpPr>
         <p:spPr>
           <a:xfrm>
-            <a:off x="640080" y="3794760"/>
+            <a:off x="640080" y="3474720"/>
             <a:ext cx="420624" cy="420624"/>
           </a:xfrm>
           <a:prstGeom prst="rect">
@@ -3420,86 +3391,86 @@
         </p:nvSpPr>
         <p:spPr>
           <a:xfrm>
+            <a:off x="1188720" y="3282696"/>
+            <a:ext cx="5120640" cy="256032"/>
+          </a:xfrm>
+          <a:prstGeom prst="rect">
+            <a:avLst/>
+          </a:prstGeom>
+          <a:noFill/>
+          <a:ln/>
+        </p:spPr>
+        <p:txBody>
+          <a:bodyPr wrap="square" lIns="0" tIns="0" rIns="0" bIns="0" rtlCol="0" anchor="ctr"/>
+          <a:lstStyle/>
+          <a:p>
+            <a:pPr indent="0" marL="0">
+              <a:buNone/>
+            </a:pPr>
+            <a:r>
+              <a:rPr lang="en-US" sz="1240" b="1" dirty="0">
+                <a:solidFill>
+                  <a:srgbClr val="1E2761"/>
+                </a:solidFill>
+                <a:latin typeface="Malgun Gothic" pitchFamily="34" charset="0"/>
+                <a:ea typeface="Malgun Gothic" pitchFamily="34" charset="-122"/>
+                <a:cs typeface="Malgun Gothic" pitchFamily="34" charset="-120"/>
+              </a:rPr>
+              <a:t>비교 기준선이 공짜로 물리 요격을 쓰고 있었다</a:t>
+            </a:r>
+            <a:endParaRPr lang="en-US" sz="1240" dirty="0"/>
+          </a:p>
+        </p:txBody>
+      </p:sp>
+      <p:sp>
+        <p:nvSpPr>
+          <p:cNvPr id="20" name="Text 18"/>
+          <p:cNvSpPr/>
+          <p:nvPr/>
+        </p:nvSpPr>
+        <p:spPr>
+          <a:xfrm>
+            <a:off x="6400800" y="3282696"/>
+            <a:ext cx="1325880" cy="256032"/>
+          </a:xfrm>
+          <a:prstGeom prst="rect">
+            <a:avLst/>
+          </a:prstGeom>
+          <a:noFill/>
+          <a:ln/>
+        </p:spPr>
+        <p:txBody>
+          <a:bodyPr wrap="square" lIns="0" tIns="0" rIns="0" bIns="0" rtlCol="0" anchor="ctr"/>
+          <a:lstStyle/>
+          <a:p>
+            <a:pPr algn="r" indent="0" marL="0">
+              <a:buNone/>
+            </a:pPr>
+            <a:r>
+              <a:rPr lang="en-US" sz="1100" b="1" dirty="0">
+                <a:solidFill>
+                  <a:srgbClr val="2F7A4F"/>
+                </a:solidFill>
+                <a:latin typeface="Malgun Gothic" pitchFamily="34" charset="0"/>
+                <a:ea typeface="Malgun Gothic" pitchFamily="34" charset="-122"/>
+                <a:cs typeface="Malgun Gothic" pitchFamily="34" charset="-120"/>
+              </a:rPr>
+              <a:t>해결</a:t>
+            </a:r>
+            <a:endParaRPr lang="en-US" sz="1100" dirty="0"/>
+          </a:p>
+        </p:txBody>
+      </p:sp>
+      <p:sp>
+        <p:nvSpPr>
+          <p:cNvPr id="21" name="Text 19"/>
+          <p:cNvSpPr/>
+          <p:nvPr/>
+        </p:nvSpPr>
+        <p:spPr>
+          <a:xfrm>
             <a:off x="1188720" y="3557016"/>
-            <a:ext cx="5120640" cy="256032"/>
-          </a:xfrm>
-          <a:prstGeom prst="rect">
-            <a:avLst/>
-          </a:prstGeom>
-          <a:noFill/>
-          <a:ln/>
-        </p:spPr>
-        <p:txBody>
-          <a:bodyPr wrap="square" lIns="0" tIns="0" rIns="0" bIns="0" rtlCol="0" anchor="ctr"/>
-          <a:lstStyle/>
-          <a:p>
-            <a:pPr indent="0" marL="0">
-              <a:buNone/>
-            </a:pPr>
-            <a:r>
-              <a:rPr lang="en-US" sz="1240" b="1" dirty="0">
-                <a:solidFill>
-                  <a:srgbClr val="1E2761"/>
-                </a:solidFill>
-                <a:latin typeface="Malgun Gothic" pitchFamily="34" charset="0"/>
-                <a:ea typeface="Malgun Gothic" pitchFamily="34" charset="-122"/>
-                <a:cs typeface="Malgun Gothic" pitchFamily="34" charset="-120"/>
-              </a:rPr>
-              <a:t>비교 기준선이 공짜로 물리 요격을 쓰고 있었다</a:t>
-            </a:r>
-            <a:endParaRPr lang="en-US" sz="1240" dirty="0"/>
-          </a:p>
-        </p:txBody>
-      </p:sp>
-      <p:sp>
-        <p:nvSpPr>
-          <p:cNvPr id="20" name="Text 18"/>
-          <p:cNvSpPr/>
-          <p:nvPr/>
-        </p:nvSpPr>
-        <p:spPr>
-          <a:xfrm>
-            <a:off x="6400800" y="3557016"/>
-            <a:ext cx="1325880" cy="256032"/>
-          </a:xfrm>
-          <a:prstGeom prst="rect">
-            <a:avLst/>
-          </a:prstGeom>
-          <a:noFill/>
-          <a:ln/>
-        </p:spPr>
-        <p:txBody>
-          <a:bodyPr wrap="square" lIns="0" tIns="0" rIns="0" bIns="0" rtlCol="0" anchor="ctr"/>
-          <a:lstStyle/>
-          <a:p>
-            <a:pPr algn="r" indent="0" marL="0">
-              <a:buNone/>
-            </a:pPr>
-            <a:r>
-              <a:rPr lang="en-US" sz="1100" b="1" dirty="0">
-                <a:solidFill>
-                  <a:srgbClr val="2F7A4F"/>
-                </a:solidFill>
-                <a:latin typeface="Malgun Gothic" pitchFamily="34" charset="0"/>
-                <a:ea typeface="Malgun Gothic" pitchFamily="34" charset="-122"/>
-                <a:cs typeface="Malgun Gothic" pitchFamily="34" charset="-120"/>
-              </a:rPr>
-              <a:t>해결</a:t>
-            </a:r>
-            <a:endParaRPr lang="en-US" sz="1100" dirty="0"/>
-          </a:p>
-        </p:txBody>
-      </p:sp>
-      <p:sp>
-        <p:nvSpPr>
-          <p:cNvPr id="21" name="Text 19"/>
-          <p:cNvSpPr/>
-          <p:nvPr/>
-        </p:nvSpPr>
-        <p:spPr>
-          <a:xfrm>
-            <a:off x="1188720" y="3840480"/>
-            <a:ext cx="6035040" cy="621792"/>
+            <a:ext cx="6035040" cy="530352"/>
           </a:xfrm>
           <a:prstGeom prst="rect">
             <a:avLst/>
@@ -3540,12 +3511,12 @@
         </p:nvSpPr>
         <p:spPr>
           <a:xfrm>
-            <a:off x="457200" y="4590288"/>
-            <a:ext cx="7452360" cy="1060704"/>
+            <a:off x="457200" y="4206240"/>
+            <a:ext cx="7452360" cy="1371600"/>
           </a:xfrm>
           <a:prstGeom prst="roundRect">
             <a:avLst>
-              <a:gd name="adj" fmla="val 6897"/>
+              <a:gd name="adj" fmla="val 5333"/>
             </a:avLst>
           </a:prstGeom>
           <a:solidFill>
@@ -3567,18 +3538,18 @@
         </p:nvSpPr>
         <p:spPr>
           <a:xfrm>
-            <a:off x="640080" y="4910328"/>
+            <a:off x="640080" y="4681728"/>
             <a:ext cx="420624" cy="420624"/>
           </a:xfrm>
           <a:prstGeom prst="ellipse">
             <a:avLst/>
           </a:prstGeom>
           <a:solidFill>
-            <a:srgbClr val="B3423A"/>
+            <a:srgbClr val="D97706"/>
           </a:solidFill>
           <a:ln w="12700">
             <a:solidFill>
-              <a:srgbClr val="B3423A"/>
+              <a:srgbClr val="D97706"/>
             </a:solidFill>
             <a:prstDash val="solid"/>
           </a:ln>
@@ -3592,7 +3563,7 @@
         </p:nvSpPr>
         <p:spPr>
           <a:xfrm>
-            <a:off x="640080" y="4910328"/>
+            <a:off x="640080" y="4681728"/>
             <a:ext cx="420624" cy="420624"/>
           </a:xfrm>
           <a:prstGeom prst="rect">
@@ -3631,7 +3602,7 @@
         </p:nvSpPr>
         <p:spPr>
           <a:xfrm>
-            <a:off x="1188720" y="4672584"/>
+            <a:off x="1188720" y="4270248"/>
             <a:ext cx="5120640" cy="256032"/>
           </a:xfrm>
           <a:prstGeom prst="rect">
@@ -3656,7 +3627,7 @@
                 <a:ea typeface="Malgun Gothic" pitchFamily="34" charset="-122"/>
                 <a:cs typeface="Malgun Gothic" pitchFamily="34" charset="-120"/>
               </a:rPr>
-              <a:t>살상 반경을 실제 값으로 낮추니 협력 효과가 사라졌다</a:t>
+              <a:t>몰아주는 배치로는 이득이 나오지 않았습니다</a:t>
             </a:r>
             <a:endParaRPr lang="en-US" sz="1240" dirty="0"/>
           </a:p>
@@ -3670,7 +3641,7 @@
         </p:nvSpPr>
         <p:spPr>
           <a:xfrm>
-            <a:off x="6400800" y="4672584"/>
+            <a:off x="6400800" y="4270248"/>
             <a:ext cx="1325880" cy="256032"/>
           </a:xfrm>
           <a:prstGeom prst="rect">
@@ -3689,13 +3660,13 @@
             <a:r>
               <a:rPr lang="en-US" sz="1100" b="1" dirty="0">
                 <a:solidFill>
-                  <a:srgbClr val="B3423A"/>
-                </a:solidFill>
-                <a:latin typeface="Malgun Gothic" pitchFamily="34" charset="0"/>
-                <a:ea typeface="Malgun Gothic" pitchFamily="34" charset="-122"/>
-                <a:cs typeface="Malgun Gothic" pitchFamily="34" charset="-120"/>
-              </a:rPr>
-              <a:t>판단 필요</a:t>
+                  <a:srgbClr val="D97706"/>
+                </a:solidFill>
+                <a:latin typeface="Malgun Gothic" pitchFamily="34" charset="0"/>
+                <a:ea typeface="Malgun Gothic" pitchFamily="34" charset="-122"/>
+                <a:cs typeface="Malgun Gothic" pitchFamily="34" charset="-120"/>
+              </a:rPr>
+              <a:t>원인 규명</a:t>
             </a:r>
             <a:endParaRPr lang="en-US" sz="1100" dirty="0"/>
           </a:p>
@@ -3709,8 +3680,8 @@
         </p:nvSpPr>
         <p:spPr>
           <a:xfrm>
-            <a:off x="1188720" y="4956048"/>
-            <a:ext cx="6035040" cy="621792"/>
+            <a:off x="1188720" y="4544568"/>
+            <a:ext cx="6035040" cy="969264"/>
           </a:xfrm>
           <a:prstGeom prst="rect">
             <a:avLst/>
@@ -3729,6 +3700,23 @@
               <a:buNone/>
             </a:pPr>
             <a:r>
+              <a:rPr lang="en-US" sz="990" b="1" dirty="0">
+                <a:solidFill>
+                  <a:srgbClr val="1E2761"/>
+                </a:solidFill>
+                <a:latin typeface="Malgun Gothic" pitchFamily="34" charset="0"/>
+                <a:ea typeface="Malgun Gothic" pitchFamily="34" charset="-122"/>
+                <a:cs typeface="Malgun Gothic" pitchFamily="34" charset="-120"/>
+              </a:rPr>
+              <a:t>현상  </a:t>
+            </a:r>
+            <a:pPr indent="0" marL="0">
+              <a:lnSpc>
+                <a:spcPct val="112000"/>
+              </a:lnSpc>
+              <a:buNone/>
+            </a:pPr>
+            <a:r>
               <a:rPr lang="en-US" sz="990" dirty="0">
                 <a:solidFill>
                   <a:srgbClr val="4A5568"/>
@@ -3737,7 +3725,112 @@
                 <a:ea typeface="Malgun Gothic" pitchFamily="34" charset="-122"/>
                 <a:cs typeface="Malgun Gothic" pitchFamily="34" charset="-120"/>
               </a:rPr>
-              <a:t>같은 조건 48회를 짝지어 비교했더니, 경로제한 드론을 배치한 경우와 아예 없는 경우가 48번 모두 똑같은 결과였습니다. 원인은 한 값이 “맞으면 떨어지는 거리”와 “공격자가 무서워서 피해 가는 거리” 두 가지를 겸하고 있는 것 — 뒤엣것이 훨씬 커야 합니다.</a:t>
+              <a:t>같은 조건 48회를 짝지어 비교했더니, 몰아주는 배치가 있으나 없으나 48번 모두 같은 결과였습니다.
+</a:t>
+            </a:r>
+            <a:pPr indent="0" marL="0">
+              <a:lnSpc>
+                <a:spcPct val="112000"/>
+              </a:lnSpc>
+              <a:buNone/>
+            </a:pPr>
+            <a:r>
+              <a:rPr lang="en-US" sz="990" b="1" dirty="0">
+                <a:solidFill>
+                  <a:srgbClr val="1E2761"/>
+                </a:solidFill>
+                <a:latin typeface="Malgun Gothic" pitchFamily="34" charset="0"/>
+                <a:ea typeface="Malgun Gothic" pitchFamily="34" charset="-122"/>
+                <a:cs typeface="Malgun Gothic" pitchFamily="34" charset="-120"/>
+              </a:rPr>
+              <a:t>원인  </a:t>
+            </a:r>
+            <a:pPr indent="0" marL="0">
+              <a:lnSpc>
+                <a:spcPct val="112000"/>
+              </a:lnSpc>
+              <a:buNone/>
+            </a:pPr>
+            <a:r>
+              <a:rPr lang="en-US" sz="990" dirty="0">
+                <a:solidFill>
+                  <a:srgbClr val="4A5568"/>
+                </a:solidFill>
+                <a:latin typeface="Malgun Gothic" pitchFamily="34" charset="0"/>
+                <a:ea typeface="Malgun Gothic" pitchFamily="34" charset="-122"/>
+                <a:cs typeface="Malgun Gothic" pitchFamily="34" charset="-120"/>
+              </a:rPr>
+              <a:t>협력에 반대 방향 두 효과가 함께 있기 때문입니다 — 도망갈 길은 막아 주지만, 그 과정에서 옆방향 속도가 실려 네트 드론이 겨냥을 따라가지 못합니다. 2장 ②에서 이 손해의 크기를 수치로 닫았습니다.
+</a:t>
+            </a:r>
+            <a:pPr indent="0" marL="0">
+              <a:lnSpc>
+                <a:spcPct val="112000"/>
+              </a:lnSpc>
+              <a:buNone/>
+            </a:pPr>
+            <a:r>
+              <a:rPr lang="en-US" sz="990" b="1" dirty="0">
+                <a:solidFill>
+                  <a:srgbClr val="D97706"/>
+                </a:solidFill>
+                <a:latin typeface="Malgun Gothic" pitchFamily="34" charset="0"/>
+                <a:ea typeface="Malgun Gothic" pitchFamily="34" charset="-122"/>
+                <a:cs typeface="Malgun Gothic" pitchFamily="34" charset="-120"/>
+              </a:rPr>
+              <a:t>단, 부딪쳐 떨어뜨리는 배치는 다릅니다  </a:t>
+            </a:r>
+            <a:pPr indent="0" marL="0">
+              <a:lnSpc>
+                <a:spcPct val="112000"/>
+              </a:lnSpc>
+              <a:buNone/>
+            </a:pPr>
+            <a:r>
+              <a:rPr lang="en-US" sz="990" dirty="0">
+                <a:solidFill>
+                  <a:srgbClr val="4A5568"/>
+                </a:solidFill>
+                <a:latin typeface="Malgun Gothic" pitchFamily="34" charset="0"/>
+                <a:ea typeface="Malgun Gothic" pitchFamily="34" charset="-122"/>
+                <a:cs typeface="Malgun Gothic" pitchFamily="34" charset="-120"/>
+              </a:rPr>
+              <a:t>경계 위에서 731회 중 52회(7.1%), 그 앞 겨냥 구간에서 226회 중 35회(15.5%)를 막습니다. 전부 부딪쳐 떨어뜨린 것이고 대가는 비손실 포기입니다(무력화 중 67%만 네트 회수).
+</a:t>
+            </a:r>
+            <a:pPr indent="0" marL="0">
+              <a:lnSpc>
+                <a:spcPct val="112000"/>
+              </a:lnSpc>
+              <a:buNone/>
+            </a:pPr>
+            <a:r>
+              <a:rPr lang="en-US" sz="990" b="1" dirty="0">
+                <a:solidFill>
+                  <a:srgbClr val="1E2761"/>
+                </a:solidFill>
+                <a:latin typeface="Malgun Gothic" pitchFamily="34" charset="0"/>
+                <a:ea typeface="Malgun Gothic" pitchFamily="34" charset="-122"/>
+                <a:cs typeface="Malgun Gothic" pitchFamily="34" charset="-120"/>
+              </a:rPr>
+              <a:t>그래서 학습의 목표가 분명해집니다  </a:t>
+            </a:r>
+            <a:pPr indent="0" marL="0">
+              <a:lnSpc>
+                <a:spcPct val="112000"/>
+              </a:lnSpc>
+              <a:buNone/>
+            </a:pPr>
+            <a:r>
+              <a:rPr lang="en-US" sz="990" dirty="0">
+                <a:solidFill>
+                  <a:srgbClr val="4A5568"/>
+                </a:solidFill>
+                <a:latin typeface="Malgun Gothic" pitchFamily="34" charset="0"/>
+                <a:ea typeface="Malgun Gothic" pitchFamily="34" charset="-122"/>
+                <a:cs typeface="Malgun Gothic" pitchFamily="34" charset="-120"/>
+              </a:rPr>
+              <a:t>“비손실을 지키면서 그 영역을 방어할 수 있는가.” 두 효과를 따로 재는 장치를 만들고 이 질문을 학습 목표로 미리 선언했습니다.</a:t>
             </a:r>
             <a:endParaRPr lang="en-US" sz="990" dirty="0"/>
           </a:p>
@@ -3752,11 +3845,11 @@
         <p:spPr>
           <a:xfrm>
             <a:off x="8092440" y="1243584"/>
-            <a:ext cx="3639312" cy="2194560"/>
+            <a:ext cx="3639312" cy="2029968"/>
           </a:xfrm>
           <a:prstGeom prst="roundRect">
             <a:avLst>
-              <a:gd name="adj" fmla="val 3333"/>
+              <a:gd name="adj" fmla="val 3604"/>
             </a:avLst>
           </a:prstGeom>
           <a:solidFill>
@@ -3898,7 +3991,7 @@
         </p:nvSpPr>
         <p:spPr>
           <a:xfrm>
-            <a:off x="8284464" y="2743200"/>
+            <a:off x="8284464" y="2633472"/>
             <a:ext cx="3255264" cy="603504"/>
           </a:xfrm>
           <a:prstGeom prst="rect">
@@ -3926,7 +4019,7 @@
                 <a:ea typeface="Malgun Gothic" pitchFamily="34" charset="-122"/>
                 <a:cs typeface="Malgun Gothic" pitchFamily="34" charset="-120"/>
               </a:rPr>
-              <a:t>4번이 어느 쪽으로 결론나든 미리 적어둔 경로 안에 있고, 그때 필요한 산출물인 “경계”는 이미 2장에서 확보했습니다.</a:t>
+              <a:t>4번은 이 경로 안에 있고, 그 산출물인 “경계”는 이미 2장에서 확보했습니다. 게다가 원인까지 나와 결과가 한 단계 더 나아갔습니다.</a:t>
             </a:r>
             <a:endParaRPr lang="en-US" sz="1040" dirty="0"/>
           </a:p>
@@ -3940,12 +4033,12 @@
         </p:nvSpPr>
         <p:spPr>
           <a:xfrm>
-            <a:off x="8092440" y="3547872"/>
-            <a:ext cx="3639312" cy="2212848"/>
+            <a:off x="8092440" y="3364992"/>
+            <a:ext cx="3639312" cy="2231136"/>
           </a:xfrm>
           <a:prstGeom prst="roundRect">
             <a:avLst>
-              <a:gd name="adj" fmla="val 3306"/>
+              <a:gd name="adj" fmla="val 3279"/>
             </a:avLst>
           </a:prstGeom>
           <a:solidFill>
@@ -3967,7 +4060,7 @@
         </p:nvSpPr>
         <p:spPr>
           <a:xfrm>
-            <a:off x="8284464" y="3639312"/>
+            <a:off x="8284464" y="3456432"/>
             <a:ext cx="3255264" cy="256032"/>
           </a:xfrm>
           <a:prstGeom prst="rect">
@@ -4006,24 +4099,24 @@
         </p:nvSpPr>
         <p:spPr>
           <a:xfrm>
-            <a:off x="8284464" y="3931920"/>
-            <a:ext cx="3255264" cy="201168"/>
-          </a:xfrm>
-          <a:prstGeom prst="rect">
-            <a:avLst/>
-          </a:prstGeom>
-          <a:noFill/>
-          <a:ln/>
-        </p:spPr>
-        <p:txBody>
-          <a:bodyPr wrap="square" lIns="0" tIns="0" rIns="0" bIns="0" rtlCol="0" anchor="ctr"/>
-          <a:lstStyle/>
-          <a:p>
-            <a:pPr indent="0" marL="0">
-              <a:buNone/>
-            </a:pPr>
-            <a:r>
-              <a:rPr lang="en-US" sz="1100" b="1" dirty="0">
+            <a:off x="8284464" y="3749040"/>
+            <a:ext cx="3255264" cy="192024"/>
+          </a:xfrm>
+          <a:prstGeom prst="rect">
+            <a:avLst/>
+          </a:prstGeom>
+          <a:noFill/>
+          <a:ln/>
+        </p:spPr>
+        <p:txBody>
+          <a:bodyPr wrap="square" lIns="0" tIns="0" rIns="0" bIns="0" rtlCol="0" anchor="ctr"/>
+          <a:lstStyle/>
+          <a:p>
+            <a:pPr indent="0" marL="0">
+              <a:buNone/>
+            </a:pPr>
+            <a:r>
+              <a:rPr lang="en-US" sz="1080" b="1" dirty="0">
                 <a:solidFill>
                   <a:srgbClr val="1E2761"/>
                 </a:solidFill>
@@ -4031,9 +4124,9 @@
                 <a:ea typeface="Malgun Gothic" pitchFamily="34" charset="-122"/>
                 <a:cs typeface="Malgun Gothic" pitchFamily="34" charset="-120"/>
               </a:rPr>
-              <a:t>▸ 4번 판단</a:t>
-            </a:r>
-            <a:endParaRPr lang="en-US" sz="1100" dirty="0"/>
+              <a:t>▸ 학습 시험 가동</a:t>
+            </a:r>
+            <a:endParaRPr lang="en-US" sz="1080" dirty="0"/>
           </a:p>
         </p:txBody>
       </p:sp>
@@ -4045,24 +4138,24 @@
         </p:nvSpPr>
         <p:spPr>
           <a:xfrm>
-            <a:off x="8485632" y="4123944"/>
-            <a:ext cx="3054096" cy="201168"/>
-          </a:xfrm>
-          <a:prstGeom prst="rect">
-            <a:avLst/>
-          </a:prstGeom>
-          <a:noFill/>
-          <a:ln/>
-        </p:spPr>
-        <p:txBody>
-          <a:bodyPr wrap="square" lIns="0" tIns="0" rIns="0" bIns="0" rtlCol="0" anchor="ctr"/>
-          <a:lstStyle/>
-          <a:p>
-            <a:pPr indent="0" marL="0">
-              <a:buNone/>
-            </a:pPr>
-            <a:r>
-              <a:rPr lang="en-US" sz="950" dirty="0">
+            <a:off x="8449056" y="3922776"/>
+            <a:ext cx="3090672" cy="192024"/>
+          </a:xfrm>
+          <a:prstGeom prst="rect">
+            <a:avLst/>
+          </a:prstGeom>
+          <a:noFill/>
+          <a:ln/>
+        </p:spPr>
+        <p:txBody>
+          <a:bodyPr wrap="square" lIns="0" tIns="0" rIns="0" bIns="0" rtlCol="0" anchor="ctr"/>
+          <a:lstStyle/>
+          <a:p>
+            <a:pPr indent="0" marL="0">
+              <a:buNone/>
+            </a:pPr>
+            <a:r>
+              <a:rPr lang="en-US" sz="910" dirty="0">
                 <a:solidFill>
                   <a:srgbClr val="4A5568"/>
                 </a:solidFill>
@@ -4070,9 +4163,9 @@
                 <a:ea typeface="Malgun Gothic" pitchFamily="34" charset="-122"/>
                 <a:cs typeface="Malgun Gothic" pitchFamily="34" charset="-120"/>
               </a:rPr>
-              <a:t>두 거리를 분리할지 결정</a:t>
-            </a:r>
-            <a:endParaRPr lang="en-US" sz="950" dirty="0"/>
+              <a:t>3회 — 신호가 실제로 붙는지 확인</a:t>
+            </a:r>
+            <a:endParaRPr lang="en-US" sz="910" dirty="0"/>
           </a:p>
         </p:txBody>
       </p:sp>
@@ -4084,24 +4177,24 @@
         </p:nvSpPr>
         <p:spPr>
           <a:xfrm>
-            <a:off x="8284464" y="4306824"/>
-            <a:ext cx="3255264" cy="201168"/>
-          </a:xfrm>
-          <a:prstGeom prst="rect">
-            <a:avLst/>
-          </a:prstGeom>
-          <a:noFill/>
-          <a:ln/>
-        </p:spPr>
-        <p:txBody>
-          <a:bodyPr wrap="square" lIns="0" tIns="0" rIns="0" bIns="0" rtlCol="0" anchor="ctr"/>
-          <a:lstStyle/>
-          <a:p>
-            <a:pPr indent="0" marL="0">
-              <a:buNone/>
-            </a:pPr>
-            <a:r>
-              <a:rPr lang="en-US" sz="1100" b="1" dirty="0">
+            <a:off x="8284464" y="4105656"/>
+            <a:ext cx="3255264" cy="192024"/>
+          </a:xfrm>
+          <a:prstGeom prst="rect">
+            <a:avLst/>
+          </a:prstGeom>
+          <a:noFill/>
+          <a:ln/>
+        </p:spPr>
+        <p:txBody>
+          <a:bodyPr wrap="square" lIns="0" tIns="0" rIns="0" bIns="0" rtlCol="0" anchor="ctr"/>
+          <a:lstStyle/>
+          <a:p>
+            <a:pPr indent="0" marL="0">
+              <a:buNone/>
+            </a:pPr>
+            <a:r>
+              <a:rPr lang="en-US" sz="1080" b="1" dirty="0">
                 <a:solidFill>
                   <a:srgbClr val="1E2761"/>
                 </a:solidFill>
@@ -4109,9 +4202,9 @@
                 <a:ea typeface="Malgun Gothic" pitchFamily="34" charset="-122"/>
                 <a:cs typeface="Malgun Gothic" pitchFamily="34" charset="-120"/>
               </a:rPr>
-              <a:t>▸ 사전 점검 재실행</a:t>
-            </a:r>
-            <a:endParaRPr lang="en-US" sz="1100" dirty="0"/>
+              <a:t>▸ 본 학습</a:t>
+            </a:r>
+            <a:endParaRPr lang="en-US" sz="1080" dirty="0"/>
           </a:p>
         </p:txBody>
       </p:sp>
@@ -4123,24 +4216,24 @@
         </p:nvSpPr>
         <p:spPr>
           <a:xfrm>
-            <a:off x="8485632" y="4498848"/>
-            <a:ext cx="3054096" cy="201168"/>
-          </a:xfrm>
-          <a:prstGeom prst="rect">
-            <a:avLst/>
-          </a:prstGeom>
-          <a:noFill/>
-          <a:ln/>
-        </p:spPr>
-        <p:txBody>
-          <a:bodyPr wrap="square" lIns="0" tIns="0" rIns="0" bIns="0" rtlCol="0" anchor="ctr"/>
-          <a:lstStyle/>
-          <a:p>
-            <a:pPr indent="0" marL="0">
-              <a:buNone/>
-            </a:pPr>
-            <a:r>
-              <a:rPr lang="en-US" sz="950" dirty="0">
+            <a:off x="8449056" y="4279392"/>
+            <a:ext cx="3090672" cy="192024"/>
+          </a:xfrm>
+          <a:prstGeom prst="rect">
+            <a:avLst/>
+          </a:prstGeom>
+          <a:noFill/>
+          <a:ln/>
+        </p:spPr>
+        <p:txBody>
+          <a:bodyPr wrap="square" lIns="0" tIns="0" rIns="0" bIns="0" rtlCol="0" anchor="ctr"/>
+          <a:lstStyle/>
+          <a:p>
+            <a:pPr indent="0" marL="0">
+              <a:buNone/>
+            </a:pPr>
+            <a:r>
+              <a:rPr lang="en-US" sz="910" dirty="0">
                 <a:solidFill>
                   <a:srgbClr val="4A5568"/>
                 </a:solidFill>
@@ -4148,9 +4241,9 @@
                 <a:ea typeface="Malgun Gothic" pitchFamily="34" charset="-122"/>
                 <a:cs typeface="Malgun Gothic" pitchFamily="34" charset="-120"/>
               </a:rPr>
-              <a:t>통과해야 학습에 의미가 생김</a:t>
-            </a:r>
-            <a:endParaRPr lang="en-US" sz="950" dirty="0"/>
+              <a:t>40회 — 계산 서버에서 약 3일</a:t>
+            </a:r>
+            <a:endParaRPr lang="en-US" sz="910" dirty="0"/>
           </a:p>
         </p:txBody>
       </p:sp>
@@ -4162,24 +4255,24 @@
         </p:nvSpPr>
         <p:spPr>
           <a:xfrm>
-            <a:off x="8284464" y="4681728"/>
-            <a:ext cx="3255264" cy="201168"/>
-          </a:xfrm>
-          <a:prstGeom prst="rect">
-            <a:avLst/>
-          </a:prstGeom>
-          <a:noFill/>
-          <a:ln/>
-        </p:spPr>
-        <p:txBody>
-          <a:bodyPr wrap="square" lIns="0" tIns="0" rIns="0" bIns="0" rtlCol="0" anchor="ctr"/>
-          <a:lstStyle/>
-          <a:p>
-            <a:pPr indent="0" marL="0">
-              <a:buNone/>
-            </a:pPr>
-            <a:r>
-              <a:rPr lang="en-US" sz="1100" b="1" dirty="0">
+            <a:off x="8284464" y="4462272"/>
+            <a:ext cx="3255264" cy="192024"/>
+          </a:xfrm>
+          <a:prstGeom prst="rect">
+            <a:avLst/>
+          </a:prstGeom>
+          <a:noFill/>
+          <a:ln/>
+        </p:spPr>
+        <p:txBody>
+          <a:bodyPr wrap="square" lIns="0" tIns="0" rIns="0" bIns="0" rtlCol="0" anchor="ctr"/>
+          <a:lstStyle/>
+          <a:p>
+            <a:pPr indent="0" marL="0">
+              <a:buNone/>
+            </a:pPr>
+            <a:r>
+              <a:rPr lang="en-US" sz="1080" b="1" dirty="0">
                 <a:solidFill>
                   <a:srgbClr val="1E2761"/>
                 </a:solidFill>
@@ -4187,9 +4280,9 @@
                 <a:ea typeface="Malgun Gothic" pitchFamily="34" charset="-122"/>
                 <a:cs typeface="Malgun Gothic" pitchFamily="34" charset="-120"/>
               </a:rPr>
-              <a:t>▸ 학습 50회</a:t>
-            </a:r>
-            <a:endParaRPr lang="en-US" sz="1100" dirty="0"/>
+              <a:t>▸ 공격자 난이도 상향</a:t>
+            </a:r>
+            <a:endParaRPr lang="en-US" sz="1080" dirty="0"/>
           </a:p>
         </p:txBody>
       </p:sp>
@@ -4201,24 +4294,24 @@
         </p:nvSpPr>
         <p:spPr>
           <a:xfrm>
-            <a:off x="8485632" y="4873752"/>
-            <a:ext cx="3054096" cy="201168"/>
-          </a:xfrm>
-          <a:prstGeom prst="rect">
-            <a:avLst/>
-          </a:prstGeom>
-          <a:noFill/>
-          <a:ln/>
-        </p:spPr>
-        <p:txBody>
-          <a:bodyPr wrap="square" lIns="0" tIns="0" rIns="0" bIns="0" rtlCol="0" anchor="ctr"/>
-          <a:lstStyle/>
-          <a:p>
-            <a:pPr indent="0" marL="0">
-              <a:buNone/>
-            </a:pPr>
-            <a:r>
-              <a:rPr lang="en-US" sz="950" dirty="0">
+            <a:off x="8449056" y="4636008"/>
+            <a:ext cx="3090672" cy="192024"/>
+          </a:xfrm>
+          <a:prstGeom prst="rect">
+            <a:avLst/>
+          </a:prstGeom>
+          <a:noFill/>
+          <a:ln/>
+        </p:spPr>
+        <p:txBody>
+          <a:bodyPr wrap="square" lIns="0" tIns="0" rIns="0" bIns="0" rtlCol="0" anchor="ctr"/>
+          <a:lstStyle/>
+          <a:p>
+            <a:pPr indent="0" marL="0">
+              <a:buNone/>
+            </a:pPr>
+            <a:r>
+              <a:rPr lang="en-US" sz="910" dirty="0">
                 <a:solidFill>
                   <a:srgbClr val="4A5568"/>
                 </a:solidFill>
@@ -4226,9 +4319,9 @@
                 <a:ea typeface="Malgun Gothic" pitchFamily="34" charset="-122"/>
                 <a:cs typeface="Malgun Gothic" pitchFamily="34" charset="-120"/>
               </a:rPr>
-              <a:t>보상 5 × 난수 5 × 관측 2</a:t>
-            </a:r>
-            <a:endParaRPr lang="en-US" sz="950" dirty="0"/>
+              <a:t>회피가 더 정교한 상대 2단계 추가 (3 → 5단계)</a:t>
+            </a:r>
+            <a:endParaRPr lang="en-US" sz="910" dirty="0"/>
           </a:p>
         </p:txBody>
       </p:sp>
@@ -4240,24 +4333,24 @@
         </p:nvSpPr>
         <p:spPr>
           <a:xfrm>
-            <a:off x="8284464" y="5056632"/>
-            <a:ext cx="3255264" cy="201168"/>
-          </a:xfrm>
-          <a:prstGeom prst="rect">
-            <a:avLst/>
-          </a:prstGeom>
-          <a:noFill/>
-          <a:ln/>
-        </p:spPr>
-        <p:txBody>
-          <a:bodyPr wrap="square" lIns="0" tIns="0" rIns="0" bIns="0" rtlCol="0" anchor="ctr"/>
-          <a:lstStyle/>
-          <a:p>
-            <a:pPr indent="0" marL="0">
-              <a:buNone/>
-            </a:pPr>
-            <a:r>
-              <a:rPr lang="en-US" sz="1100" b="1" dirty="0">
+            <a:off x="8284464" y="4818888"/>
+            <a:ext cx="3255264" cy="192024"/>
+          </a:xfrm>
+          <a:prstGeom prst="rect">
+            <a:avLst/>
+          </a:prstGeom>
+          <a:noFill/>
+          <a:ln/>
+        </p:spPr>
+        <p:txBody>
+          <a:bodyPr wrap="square" lIns="0" tIns="0" rIns="0" bIns="0" rtlCol="0" anchor="ctr"/>
+          <a:lstStyle/>
+          <a:p>
+            <a:pPr indent="0" marL="0">
+              <a:buNone/>
+            </a:pPr>
+            <a:r>
+              <a:rPr lang="en-US" sz="1080" b="1" dirty="0">
                 <a:solidFill>
                   <a:srgbClr val="1E2761"/>
                 </a:solidFill>
@@ -4267,7 +4360,7 @@
               </a:rPr>
               <a:t>▸ 핵심 그림 채우기</a:t>
             </a:r>
-            <a:endParaRPr lang="en-US" sz="1100" dirty="0"/>
+            <a:endParaRPr lang="en-US" sz="1080" dirty="0"/>
           </a:p>
         </p:txBody>
       </p:sp>
@@ -4279,24 +4372,24 @@
         </p:nvSpPr>
         <p:spPr>
           <a:xfrm>
-            <a:off x="8485632" y="5248656"/>
-            <a:ext cx="3054096" cy="201168"/>
-          </a:xfrm>
-          <a:prstGeom prst="rect">
-            <a:avLst/>
-          </a:prstGeom>
-          <a:noFill/>
-          <a:ln/>
-        </p:spPr>
-        <p:txBody>
-          <a:bodyPr wrap="square" lIns="0" tIns="0" rIns="0" bIns="0" rtlCol="0" anchor="ctr"/>
-          <a:lstStyle/>
-          <a:p>
-            <a:pPr indent="0" marL="0">
-              <a:buNone/>
-            </a:pPr>
-            <a:r>
-              <a:rPr lang="en-US" sz="950" dirty="0">
+            <a:off x="8449056" y="4992624"/>
+            <a:ext cx="3090672" cy="192024"/>
+          </a:xfrm>
+          <a:prstGeom prst="rect">
+            <a:avLst/>
+          </a:prstGeom>
+          <a:noFill/>
+          <a:ln/>
+        </p:spPr>
+        <p:txBody>
+          <a:bodyPr wrap="square" lIns="0" tIns="0" rIns="0" bIns="0" rtlCol="0" anchor="ctr"/>
+          <a:lstStyle/>
+          <a:p>
+            <a:pPr indent="0" marL="0">
+              <a:buNone/>
+            </a:pPr>
+            <a:r>
+              <a:rPr lang="en-US" sz="910" dirty="0">
                 <a:solidFill>
                   <a:srgbClr val="4A5568"/>
                 </a:solidFill>
@@ -4304,9 +4397,9 @@
                 <a:ea typeface="Malgun Gothic" pitchFamily="34" charset="-122"/>
                 <a:cs typeface="Malgun Gothic" pitchFamily="34" charset="-120"/>
               </a:rPr>
-              <a:t>비교 실험 + 포획 확률 지도</a:t>
-            </a:r>
-            <a:endParaRPr lang="en-US" sz="950" dirty="0"/>
+              <a:t>학습 정책의 곡선을 2장 기준선 곡선 위에 겹치기</a:t>
+            </a:r>
+            <a:endParaRPr lang="en-US" sz="910" dirty="0"/>
           </a:p>
         </p:txBody>
       </p:sp>
@@ -4318,51 +4411,90 @@
         </p:nvSpPr>
         <p:spPr>
           <a:xfrm>
-            <a:off x="8284464" y="5477256"/>
-            <a:ext cx="3255264" cy="237744"/>
-          </a:xfrm>
-          <a:prstGeom prst="rect">
-            <a:avLst/>
-          </a:prstGeom>
-          <a:noFill/>
-          <a:ln/>
-        </p:spPr>
-        <p:txBody>
-          <a:bodyPr wrap="square" lIns="0" tIns="0" rIns="0" bIns="0" rtlCol="0" anchor="ctr"/>
-          <a:lstStyle/>
-          <a:p>
-            <a:pPr indent="0" marL="0">
-              <a:buNone/>
-            </a:pPr>
-            <a:r>
-              <a:rPr lang="en-US" sz="900" i="1" dirty="0">
-                <a:solidFill>
-                  <a:srgbClr val="8A94A6"/>
-                </a:solidFill>
-                <a:latin typeface="Malgun Gothic" pitchFamily="34" charset="0"/>
-                <a:ea typeface="Malgun Gothic" pitchFamily="34" charset="-122"/>
-                <a:cs typeface="Malgun Gothic" pitchFamily="34" charset="-120"/>
-              </a:rPr>
-              <a:t>그 다음이 실제 기체 사양을 넣어 조건을 확정하는 단계입니다</a:t>
-            </a:r>
-            <a:endParaRPr lang="en-US" sz="900" dirty="0"/>
-          </a:p>
-        </p:txBody>
-      </p:sp>
-      <p:sp>
-        <p:nvSpPr>
-          <p:cNvPr id="44" name="Shape 42"/>
-          <p:cNvSpPr/>
-          <p:nvPr/>
-        </p:nvSpPr>
-        <p:spPr>
-          <a:xfrm>
-            <a:off x="457200" y="5779008"/>
-            <a:ext cx="11274552" cy="658368"/>
+            <a:off x="8284464" y="5175504"/>
+            <a:ext cx="3255264" cy="192024"/>
+          </a:xfrm>
+          <a:prstGeom prst="rect">
+            <a:avLst/>
+          </a:prstGeom>
+          <a:noFill/>
+          <a:ln/>
+        </p:spPr>
+        <p:txBody>
+          <a:bodyPr wrap="square" lIns="0" tIns="0" rIns="0" bIns="0" rtlCol="0" anchor="ctr"/>
+          <a:lstStyle/>
+          <a:p>
+            <a:pPr indent="0" marL="0">
+              <a:buNone/>
+            </a:pPr>
+            <a:r>
+              <a:rPr lang="en-US" sz="1080" b="1" dirty="0">
+                <a:solidFill>
+                  <a:srgbClr val="1E2761"/>
+                </a:solidFill>
+                <a:latin typeface="Malgun Gothic" pitchFamily="34" charset="0"/>
+                <a:ea typeface="Malgun Gothic" pitchFamily="34" charset="-122"/>
+                <a:cs typeface="Malgun Gothic" pitchFamily="34" charset="-120"/>
+              </a:rPr>
+              <a:t>▸ 기체 사양 좁히기</a:t>
+            </a:r>
+            <a:endParaRPr lang="en-US" sz="1080" dirty="0"/>
+          </a:p>
+        </p:txBody>
+      </p:sp>
+      <p:sp>
+        <p:nvSpPr>
+          <p:cNvPr id="44" name="Text 42"/>
+          <p:cNvSpPr/>
+          <p:nvPr/>
+        </p:nvSpPr>
+        <p:spPr>
+          <a:xfrm>
+            <a:off x="8449056" y="5349240"/>
+            <a:ext cx="3090672" cy="192024"/>
+          </a:xfrm>
+          <a:prstGeom prst="rect">
+            <a:avLst/>
+          </a:prstGeom>
+          <a:noFill/>
+          <a:ln/>
+        </p:spPr>
+        <p:txBody>
+          <a:bodyPr wrap="square" lIns="0" tIns="0" rIns="0" bIns="0" rtlCol="0" anchor="ctr"/>
+          <a:lstStyle/>
+          <a:p>
+            <a:pPr indent="0" marL="0">
+              <a:buNone/>
+            </a:pPr>
+            <a:r>
+              <a:rPr lang="en-US" sz="910" dirty="0">
+                <a:solidFill>
+                  <a:srgbClr val="4A5568"/>
+                </a:solidFill>
+                <a:latin typeface="Malgun Gothic" pitchFamily="34" charset="0"/>
+                <a:ea typeface="Malgun Gothic" pitchFamily="34" charset="-122"/>
+                <a:cs typeface="Malgun Gothic" pitchFamily="34" charset="-120"/>
+              </a:rPr>
+              <a:t>지금은 등급 범위를 매 회 무작위로 훑는 중</a:t>
+            </a:r>
+            <a:endParaRPr lang="en-US" sz="910" dirty="0"/>
+          </a:p>
+        </p:txBody>
+      </p:sp>
+      <p:sp>
+        <p:nvSpPr>
+          <p:cNvPr id="45" name="Shape 43"/>
+          <p:cNvSpPr/>
+          <p:nvPr/>
+        </p:nvSpPr>
+        <p:spPr>
+          <a:xfrm>
+            <a:off x="457200" y="5724144"/>
+            <a:ext cx="11274552" cy="640080"/>
           </a:xfrm>
           <a:prstGeom prst="roundRect">
             <a:avLst>
-              <a:gd name="adj" fmla="val 11111"/>
+              <a:gd name="adj" fmla="val 11429"/>
             </a:avLst>
           </a:prstGeom>
           <a:solidFill>
@@ -4378,30 +4510,1741 @@
       </p:sp>
       <p:sp>
         <p:nvSpPr>
+          <p:cNvPr id="46" name="Text 44"/>
+          <p:cNvSpPr/>
+          <p:nvPr/>
+        </p:nvSpPr>
+        <p:spPr>
+          <a:xfrm>
+            <a:off x="713232" y="5724144"/>
+            <a:ext cx="10789920" cy="640080"/>
+          </a:xfrm>
+          <a:prstGeom prst="rect">
+            <a:avLst/>
+          </a:prstGeom>
+          <a:noFill/>
+          <a:ln/>
+        </p:spPr>
+        <p:txBody>
+          <a:bodyPr wrap="square" lIns="0" tIns="0" rIns="0" bIns="0" rtlCol="0" anchor="ctr"/>
+          <a:lstStyle/>
+          <a:p>
+            <a:pPr indent="0" marL="0">
+              <a:buNone/>
+            </a:pPr>
+            <a:r>
+              <a:rPr lang="en-US" sz="1120" b="1" dirty="0">
+                <a:solidFill>
+                  <a:srgbClr val="1E2761"/>
+                </a:solidFill>
+                <a:latin typeface="Malgun Gothic" pitchFamily="34" charset="0"/>
+                <a:ea typeface="Malgun Gothic" pitchFamily="34" charset="-122"/>
+                <a:cs typeface="Malgun Gothic" pitchFamily="34" charset="-120"/>
+              </a:rPr>
+              <a:t>경계 위에서 네트로 잡는 것은 1,635회 중 0회 — 손튜닝으로 막는 유일한 길은 물리 요격이고, 그 대가는 비손실 포기입니다.   </a:t>
+            </a:r>
+            <a:pPr indent="0" marL="0">
+              <a:buNone/>
+            </a:pPr>
+            <a:r>
+              <a:rPr lang="en-US" sz="1120" i="1" dirty="0">
+                <a:solidFill>
+                  <a:srgbClr val="1E2761"/>
+                </a:solidFill>
+                <a:latin typeface="Malgun Gothic" pitchFamily="34" charset="0"/>
+                <a:ea typeface="Malgun Gothic" pitchFamily="34" charset="-122"/>
+                <a:cs typeface="Malgun Gothic" pitchFamily="34" charset="-120"/>
+              </a:rPr>
+              <a:t>네 건 모두 학습을 돌리기 전에 발견했습니다. 평가 기준과 표본 수도 결과를 보기 전에 미리 정해 두었습니다.</a:t>
+            </a:r>
+            <a:endParaRPr lang="en-US" sz="1120" dirty="0"/>
+          </a:p>
+        </p:txBody>
+      </p:sp>
+    </p:spTree>
+  </p:cSld>
+  <p:clrMapOvr>
+    <a:masterClrMapping/>
+  </p:clrMapOvr>
+</p:sld>
+</file>
+
+<file path=ppt/slides/slide4.xml><?xml version="1.0" encoding="utf-8"?>
+<p:sld xmlns:a="http://schemas.openxmlformats.org/drawingml/2006/main" xmlns:r="http://schemas.openxmlformats.org/officeDocument/2006/relationships" xmlns:p="http://schemas.openxmlformats.org/presentationml/2006/main">
+  <p:cSld name="Slide 4">
+    <p:spTree>
+      <p:nvGrpSpPr>
+        <p:cNvPr id="1" name=""/>
+        <p:cNvGrpSpPr/>
+        <p:nvPr/>
+      </p:nvGrpSpPr>
+      <p:grpSpPr>
+        <a:xfrm>
+          <a:off x="0" y="0"/>
+          <a:ext cx="0" cy="0"/>
+          <a:chOff x="0" y="0"/>
+          <a:chExt cx="0" cy="0"/>
+        </a:xfrm>
+      </p:grpSpPr>
+      <p:sp>
+        <p:nvSpPr>
+          <p:cNvPr id="2" name="Text 0"/>
+          <p:cNvSpPr/>
+          <p:nvPr/>
+        </p:nvSpPr>
+        <p:spPr>
+          <a:xfrm>
+            <a:off x="502920" y="274320"/>
+            <a:ext cx="11247120" cy="566928"/>
+          </a:xfrm>
+          <a:prstGeom prst="rect">
+            <a:avLst/>
+          </a:prstGeom>
+          <a:noFill/>
+          <a:ln/>
+        </p:spPr>
+        <p:txBody>
+          <a:bodyPr wrap="square" lIns="0" tIns="0" rIns="0" bIns="0" rtlCol="0" anchor="ctr"/>
+          <a:lstStyle/>
+          <a:p>
+            <a:pPr indent="0" marL="0">
+              <a:buNone/>
+            </a:pPr>
+            <a:r>
+              <a:rPr lang="en-US" sz="2900" b="1" dirty="0">
+                <a:solidFill>
+                  <a:srgbClr val="1E2761"/>
+                </a:solidFill>
+                <a:latin typeface="Malgun Gothic" pitchFamily="34" charset="0"/>
+                <a:ea typeface="Malgun Gothic" pitchFamily="34" charset="-122"/>
+                <a:cs typeface="Malgun Gothic" pitchFamily="34" charset="-120"/>
+              </a:rPr>
+              <a:t>부록 — 용어와 값의 출처</a:t>
+            </a:r>
+            <a:endParaRPr lang="en-US" sz="2900" dirty="0"/>
+          </a:p>
+        </p:txBody>
+      </p:sp>
+      <p:sp>
+        <p:nvSpPr>
+          <p:cNvPr id="3" name="Text 1"/>
+          <p:cNvSpPr/>
+          <p:nvPr/>
+        </p:nvSpPr>
+        <p:spPr>
+          <a:xfrm>
+            <a:off x="502920" y="859536"/>
+            <a:ext cx="11247120" cy="329184"/>
+          </a:xfrm>
+          <a:prstGeom prst="rect">
+            <a:avLst/>
+          </a:prstGeom>
+          <a:noFill/>
+          <a:ln/>
+        </p:spPr>
+        <p:txBody>
+          <a:bodyPr wrap="square" lIns="0" tIns="0" rIns="0" bIns="0" rtlCol="0" anchor="ctr"/>
+          <a:lstStyle/>
+          <a:p>
+            <a:pPr indent="0" marL="0">
+              <a:buNone/>
+            </a:pPr>
+            <a:r>
+              <a:rPr lang="en-US" sz="1350" dirty="0">
+                <a:solidFill>
+                  <a:srgbClr val="4A5568"/>
+                </a:solidFill>
+                <a:latin typeface="Malgun Gothic" pitchFamily="34" charset="0"/>
+                <a:ea typeface="Malgun Gothic" pitchFamily="34" charset="-122"/>
+                <a:cs typeface="Malgun Gothic" pitchFamily="34" charset="-120"/>
+              </a:rPr>
+              <a:t>본문에 쓴 숫자는 전부 아래 표의 출처에서 왔습니다. 근거 없이 정한 값은 남아 있지 않습니다</a:t>
+            </a:r>
+            <a:endParaRPr lang="en-US" sz="1350" dirty="0"/>
+          </a:p>
+        </p:txBody>
+      </p:sp>
+      <p:sp>
+        <p:nvSpPr>
+          <p:cNvPr id="4" name="Shape 2"/>
+          <p:cNvSpPr/>
+          <p:nvPr/>
+        </p:nvSpPr>
+        <p:spPr>
+          <a:xfrm>
+            <a:off x="502920" y="1335024"/>
+            <a:ext cx="11228832" cy="292608"/>
+          </a:xfrm>
+          <a:prstGeom prst="rect">
+            <a:avLst/>
+          </a:prstGeom>
+          <a:solidFill>
+            <a:srgbClr val="1E2761"/>
+          </a:solidFill>
+          <a:ln w="12700">
+            <a:solidFill>
+              <a:srgbClr val="1E2761"/>
+            </a:solidFill>
+            <a:prstDash val="solid"/>
+          </a:ln>
+        </p:spPr>
+      </p:sp>
+      <p:sp>
+        <p:nvSpPr>
+          <p:cNvPr id="5" name="Text 3"/>
+          <p:cNvSpPr/>
+          <p:nvPr/>
+        </p:nvSpPr>
+        <p:spPr>
+          <a:xfrm>
+            <a:off x="594360" y="1335024"/>
+            <a:ext cx="1938528" cy="292608"/>
+          </a:xfrm>
+          <a:prstGeom prst="rect">
+            <a:avLst/>
+          </a:prstGeom>
+          <a:noFill/>
+          <a:ln/>
+        </p:spPr>
+        <p:txBody>
+          <a:bodyPr wrap="square" lIns="0" tIns="0" rIns="0" bIns="0" rtlCol="0" anchor="ctr"/>
+          <a:lstStyle/>
+          <a:p>
+            <a:pPr algn="l" indent="0" marL="0">
+              <a:buNone/>
+            </a:pPr>
+            <a:r>
+              <a:rPr lang="en-US" sz="1020" b="1" dirty="0">
+                <a:solidFill>
+                  <a:srgbClr val="FFFFFF"/>
+                </a:solidFill>
+                <a:latin typeface="Malgun Gothic" pitchFamily="34" charset="0"/>
+                <a:ea typeface="Malgun Gothic" pitchFamily="34" charset="-122"/>
+                <a:cs typeface="Malgun Gothic" pitchFamily="34" charset="-120"/>
+              </a:rPr>
+              <a:t>용어</a:t>
+            </a:r>
+            <a:endParaRPr lang="en-US" sz="1020" dirty="0"/>
+          </a:p>
+        </p:txBody>
+      </p:sp>
+      <p:sp>
+        <p:nvSpPr>
+          <p:cNvPr id="6" name="Text 4"/>
+          <p:cNvSpPr/>
+          <p:nvPr/>
+        </p:nvSpPr>
+        <p:spPr>
+          <a:xfrm>
+            <a:off x="2697480" y="1335024"/>
+            <a:ext cx="5230368" cy="292608"/>
+          </a:xfrm>
+          <a:prstGeom prst="rect">
+            <a:avLst/>
+          </a:prstGeom>
+          <a:noFill/>
+          <a:ln/>
+        </p:spPr>
+        <p:txBody>
+          <a:bodyPr wrap="square" lIns="0" tIns="0" rIns="0" bIns="0" rtlCol="0" anchor="ctr"/>
+          <a:lstStyle/>
+          <a:p>
+            <a:pPr algn="l" indent="0" marL="0">
+              <a:buNone/>
+            </a:pPr>
+            <a:r>
+              <a:rPr lang="en-US" sz="1020" b="1" dirty="0">
+                <a:solidFill>
+                  <a:srgbClr val="FFFFFF"/>
+                </a:solidFill>
+                <a:latin typeface="Malgun Gothic" pitchFamily="34" charset="0"/>
+                <a:ea typeface="Malgun Gothic" pitchFamily="34" charset="-122"/>
+                <a:cs typeface="Malgun Gothic" pitchFamily="34" charset="-120"/>
+              </a:rPr>
+              <a:t>이 연구에서의 뜻</a:t>
+            </a:r>
+            <a:endParaRPr lang="en-US" sz="1020" dirty="0"/>
+          </a:p>
+        </p:txBody>
+      </p:sp>
+      <p:sp>
+        <p:nvSpPr>
+          <p:cNvPr id="7" name="Text 5"/>
+          <p:cNvSpPr/>
+          <p:nvPr/>
+        </p:nvSpPr>
+        <p:spPr>
+          <a:xfrm>
+            <a:off x="8092440" y="1335024"/>
+            <a:ext cx="1024128" cy="292608"/>
+          </a:xfrm>
+          <a:prstGeom prst="rect">
+            <a:avLst/>
+          </a:prstGeom>
+          <a:noFill/>
+          <a:ln/>
+        </p:spPr>
+        <p:txBody>
+          <a:bodyPr wrap="square" lIns="0" tIns="0" rIns="0" bIns="0" rtlCol="0" anchor="ctr"/>
+          <a:lstStyle/>
+          <a:p>
+            <a:pPr algn="ctr" indent="0" marL="0">
+              <a:buNone/>
+            </a:pPr>
+            <a:r>
+              <a:rPr lang="en-US" sz="1020" b="1" dirty="0">
+                <a:solidFill>
+                  <a:srgbClr val="FFFFFF"/>
+                </a:solidFill>
+                <a:latin typeface="Malgun Gothic" pitchFamily="34" charset="0"/>
+                <a:ea typeface="Malgun Gothic" pitchFamily="34" charset="-122"/>
+                <a:cs typeface="Malgun Gothic" pitchFamily="34" charset="-120"/>
+              </a:rPr>
+              <a:t>우리 값</a:t>
+            </a:r>
+            <a:endParaRPr lang="en-US" sz="1020" dirty="0"/>
+          </a:p>
+        </p:txBody>
+      </p:sp>
+      <p:sp>
+        <p:nvSpPr>
+          <p:cNvPr id="8" name="Text 6"/>
+          <p:cNvSpPr/>
+          <p:nvPr/>
+        </p:nvSpPr>
+        <p:spPr>
+          <a:xfrm>
+            <a:off x="9281160" y="1335024"/>
+            <a:ext cx="2377440" cy="292608"/>
+          </a:xfrm>
+          <a:prstGeom prst="rect">
+            <a:avLst/>
+          </a:prstGeom>
+          <a:noFill/>
+          <a:ln/>
+        </p:spPr>
+        <p:txBody>
+          <a:bodyPr wrap="square" lIns="0" tIns="0" rIns="0" bIns="0" rtlCol="0" anchor="ctr"/>
+          <a:lstStyle/>
+          <a:p>
+            <a:pPr algn="l" indent="0" marL="0">
+              <a:buNone/>
+            </a:pPr>
+            <a:r>
+              <a:rPr lang="en-US" sz="1020" b="1" dirty="0">
+                <a:solidFill>
+                  <a:srgbClr val="FFFFFF"/>
+                </a:solidFill>
+                <a:latin typeface="Malgun Gothic" pitchFamily="34" charset="0"/>
+                <a:ea typeface="Malgun Gothic" pitchFamily="34" charset="-122"/>
+                <a:cs typeface="Malgun Gothic" pitchFamily="34" charset="-120"/>
+              </a:rPr>
+              <a:t>출처</a:t>
+            </a:r>
+            <a:endParaRPr lang="en-US" sz="1020" dirty="0"/>
+          </a:p>
+        </p:txBody>
+      </p:sp>
+      <p:sp>
+        <p:nvSpPr>
+          <p:cNvPr id="9" name="Text 7"/>
+          <p:cNvSpPr/>
+          <p:nvPr/>
+        </p:nvSpPr>
+        <p:spPr>
+          <a:xfrm>
+            <a:off x="594360" y="1627632"/>
+            <a:ext cx="1938528" cy="292608"/>
+          </a:xfrm>
+          <a:prstGeom prst="rect">
+            <a:avLst/>
+          </a:prstGeom>
+          <a:noFill/>
+          <a:ln/>
+        </p:spPr>
+        <p:txBody>
+          <a:bodyPr wrap="square" lIns="0" tIns="0" rIns="0" bIns="0" rtlCol="0" anchor="ctr"/>
+          <a:lstStyle/>
+          <a:p>
+            <a:pPr indent="0" marL="0">
+              <a:buNone/>
+            </a:pPr>
+            <a:r>
+              <a:rPr lang="en-US" sz="1000" b="1" dirty="0">
+                <a:solidFill>
+                  <a:srgbClr val="1E2761"/>
+                </a:solidFill>
+                <a:latin typeface="Malgun Gothic" pitchFamily="34" charset="0"/>
+                <a:ea typeface="Malgun Gothic" pitchFamily="34" charset="-122"/>
+                <a:cs typeface="Malgun Gothic" pitchFamily="34" charset="-120"/>
+              </a:rPr>
+              <a:t>네트 드론</a:t>
+            </a:r>
+            <a:endParaRPr lang="en-US" sz="1000" dirty="0"/>
+          </a:p>
+        </p:txBody>
+      </p:sp>
+      <p:sp>
+        <p:nvSpPr>
+          <p:cNvPr id="10" name="Text 8"/>
+          <p:cNvSpPr/>
+          <p:nvPr/>
+        </p:nvSpPr>
+        <p:spPr>
+          <a:xfrm>
+            <a:off x="2697480" y="1627632"/>
+            <a:ext cx="5230368" cy="292608"/>
+          </a:xfrm>
+          <a:prstGeom prst="rect">
+            <a:avLst/>
+          </a:prstGeom>
+          <a:noFill/>
+          <a:ln/>
+        </p:spPr>
+        <p:txBody>
+          <a:bodyPr wrap="square" lIns="0" tIns="0" rIns="0" bIns="0" rtlCol="0" anchor="ctr"/>
+          <a:lstStyle/>
+          <a:p>
+            <a:pPr indent="0" marL="0">
+              <a:lnSpc>
+                <a:spcPct val="105000"/>
+              </a:lnSpc>
+              <a:buNone/>
+            </a:pPr>
+            <a:r>
+              <a:rPr lang="en-US" sz="960" dirty="0">
+                <a:solidFill>
+                  <a:srgbClr val="4A5568"/>
+                </a:solidFill>
+                <a:latin typeface="Malgun Gothic" pitchFamily="34" charset="0"/>
+                <a:ea typeface="Malgun Gothic" pitchFamily="34" charset="-122"/>
+                <a:cs typeface="Malgun Gothic" pitchFamily="34" charset="-120"/>
+              </a:rPr>
+              <a:t>네트를 쏘아 공격 드론을 통째로 붙잡는 방어 드론</a:t>
+            </a:r>
+            <a:endParaRPr lang="en-US" sz="960" dirty="0"/>
+          </a:p>
+        </p:txBody>
+      </p:sp>
+      <p:sp>
+        <p:nvSpPr>
+          <p:cNvPr id="11" name="Text 9"/>
+          <p:cNvSpPr/>
+          <p:nvPr/>
+        </p:nvSpPr>
+        <p:spPr>
+          <a:xfrm>
+            <a:off x="8046720" y="1627632"/>
+            <a:ext cx="1097280" cy="292608"/>
+          </a:xfrm>
+          <a:prstGeom prst="rect">
+            <a:avLst/>
+          </a:prstGeom>
+          <a:noFill/>
+          <a:ln/>
+        </p:spPr>
+        <p:txBody>
+          <a:bodyPr wrap="square" lIns="0" tIns="0" rIns="0" bIns="0" rtlCol="0" anchor="ctr"/>
+          <a:lstStyle/>
+          <a:p>
+            <a:pPr algn="ctr" indent="0" marL="0">
+              <a:buNone/>
+            </a:pPr>
+            <a:r>
+              <a:rPr lang="en-US" sz="1020" b="1" dirty="0">
+                <a:solidFill>
+                  <a:srgbClr val="1E2761"/>
+                </a:solidFill>
+                <a:latin typeface="Malgun Gothic" pitchFamily="34" charset="0"/>
+                <a:ea typeface="Malgun Gothic" pitchFamily="34" charset="-122"/>
+                <a:cs typeface="Malgun Gothic" pitchFamily="34" charset="-120"/>
+              </a:rPr>
+              <a:t>1 대</a:t>
+            </a:r>
+            <a:endParaRPr lang="en-US" sz="1020" dirty="0"/>
+          </a:p>
+        </p:txBody>
+      </p:sp>
+      <p:sp>
+        <p:nvSpPr>
+          <p:cNvPr id="12" name="Text 10"/>
+          <p:cNvSpPr/>
+          <p:nvPr/>
+        </p:nvSpPr>
+        <p:spPr>
+          <a:xfrm>
+            <a:off x="9281160" y="1627632"/>
+            <a:ext cx="2377440" cy="292608"/>
+          </a:xfrm>
+          <a:prstGeom prst="rect">
+            <a:avLst/>
+          </a:prstGeom>
+          <a:noFill/>
+          <a:ln/>
+        </p:spPr>
+        <p:txBody>
+          <a:bodyPr wrap="square" lIns="0" tIns="0" rIns="0" bIns="0" rtlCol="0" anchor="ctr"/>
+          <a:lstStyle/>
+          <a:p>
+            <a:pPr indent="0" marL="0">
+              <a:buNone/>
+            </a:pPr>
+            <a:r>
+              <a:rPr lang="en-US" sz="930" dirty="0">
+                <a:solidFill>
+                  <a:srgbClr val="8A94A6"/>
+                </a:solidFill>
+                <a:latin typeface="Malgun Gothic" pitchFamily="34" charset="0"/>
+                <a:ea typeface="Malgun Gothic" pitchFamily="34" charset="-122"/>
+                <a:cs typeface="Malgun Gothic" pitchFamily="34" charset="-120"/>
+              </a:rPr>
+              <a:t>우리 설정</a:t>
+            </a:r>
+            <a:endParaRPr lang="en-US" sz="930" dirty="0"/>
+          </a:p>
+        </p:txBody>
+      </p:sp>
+      <p:sp>
+        <p:nvSpPr>
+          <p:cNvPr id="13" name="Shape 11"/>
+          <p:cNvSpPr/>
+          <p:nvPr/>
+        </p:nvSpPr>
+        <p:spPr>
+          <a:xfrm>
+            <a:off x="502920" y="1920240"/>
+            <a:ext cx="11228832" cy="0"/>
+          </a:xfrm>
+          <a:prstGeom prst="line">
+            <a:avLst/>
+          </a:prstGeom>
+          <a:noFill/>
+          <a:ln w="9525">
+            <a:solidFill>
+              <a:srgbClr val="E3EAF5"/>
+            </a:solidFill>
+            <a:prstDash val="solid"/>
+          </a:ln>
+        </p:spPr>
+      </p:sp>
+      <p:sp>
+        <p:nvSpPr>
+          <p:cNvPr id="14" name="Shape 12"/>
+          <p:cNvSpPr/>
+          <p:nvPr/>
+        </p:nvSpPr>
+        <p:spPr>
+          <a:xfrm>
+            <a:off x="502920" y="1920240"/>
+            <a:ext cx="11228832" cy="292608"/>
+          </a:xfrm>
+          <a:prstGeom prst="rect">
+            <a:avLst/>
+          </a:prstGeom>
+          <a:solidFill>
+            <a:srgbClr val="F6F9FE"/>
+          </a:solidFill>
+          <a:ln w="12700">
+            <a:solidFill>
+              <a:srgbClr val="F6F9FE"/>
+            </a:solidFill>
+            <a:prstDash val="solid"/>
+          </a:ln>
+        </p:spPr>
+      </p:sp>
+      <p:sp>
+        <p:nvSpPr>
+          <p:cNvPr id="15" name="Text 13"/>
+          <p:cNvSpPr/>
+          <p:nvPr/>
+        </p:nvSpPr>
+        <p:spPr>
+          <a:xfrm>
+            <a:off x="594360" y="1920240"/>
+            <a:ext cx="1938528" cy="292608"/>
+          </a:xfrm>
+          <a:prstGeom prst="rect">
+            <a:avLst/>
+          </a:prstGeom>
+          <a:noFill/>
+          <a:ln/>
+        </p:spPr>
+        <p:txBody>
+          <a:bodyPr wrap="square" lIns="0" tIns="0" rIns="0" bIns="0" rtlCol="0" anchor="ctr"/>
+          <a:lstStyle/>
+          <a:p>
+            <a:pPr indent="0" marL="0">
+              <a:buNone/>
+            </a:pPr>
+            <a:r>
+              <a:rPr lang="en-US" sz="1000" b="1" dirty="0">
+                <a:solidFill>
+                  <a:srgbClr val="1E2761"/>
+                </a:solidFill>
+                <a:latin typeface="Malgun Gothic" pitchFamily="34" charset="0"/>
+                <a:ea typeface="Malgun Gothic" pitchFamily="34" charset="-122"/>
+                <a:cs typeface="Malgun Gothic" pitchFamily="34" charset="-120"/>
+              </a:rPr>
+              <a:t>경로제한 드론</a:t>
+            </a:r>
+            <a:endParaRPr lang="en-US" sz="1000" dirty="0"/>
+          </a:p>
+        </p:txBody>
+      </p:sp>
+      <p:sp>
+        <p:nvSpPr>
+          <p:cNvPr id="16" name="Text 14"/>
+          <p:cNvSpPr/>
+          <p:nvPr/>
+        </p:nvSpPr>
+        <p:spPr>
+          <a:xfrm>
+            <a:off x="2697480" y="1920240"/>
+            <a:ext cx="5230368" cy="292608"/>
+          </a:xfrm>
+          <a:prstGeom prst="rect">
+            <a:avLst/>
+          </a:prstGeom>
+          <a:noFill/>
+          <a:ln/>
+        </p:spPr>
+        <p:txBody>
+          <a:bodyPr wrap="square" lIns="0" tIns="0" rIns="0" bIns="0" rtlCol="0" anchor="ctr"/>
+          <a:lstStyle/>
+          <a:p>
+            <a:pPr indent="0" marL="0">
+              <a:lnSpc>
+                <a:spcPct val="105000"/>
+              </a:lnSpc>
+              <a:buNone/>
+            </a:pPr>
+            <a:r>
+              <a:rPr lang="en-US" sz="960" dirty="0">
+                <a:solidFill>
+                  <a:srgbClr val="4A5568"/>
+                </a:solidFill>
+                <a:latin typeface="Malgun Gothic" pitchFamily="34" charset="0"/>
+                <a:ea typeface="Malgun Gothic" pitchFamily="34" charset="-122"/>
+                <a:cs typeface="Malgun Gothic" pitchFamily="34" charset="-120"/>
+              </a:rPr>
+              <a:t>공격 드론의 갈 길을 좁히는 드론. 학습 대상</a:t>
+            </a:r>
+            <a:endParaRPr lang="en-US" sz="960" dirty="0"/>
+          </a:p>
+        </p:txBody>
+      </p:sp>
+      <p:sp>
+        <p:nvSpPr>
+          <p:cNvPr id="17" name="Text 15"/>
+          <p:cNvSpPr/>
+          <p:nvPr/>
+        </p:nvSpPr>
+        <p:spPr>
+          <a:xfrm>
+            <a:off x="8046720" y="1920240"/>
+            <a:ext cx="1097280" cy="292608"/>
+          </a:xfrm>
+          <a:prstGeom prst="rect">
+            <a:avLst/>
+          </a:prstGeom>
+          <a:noFill/>
+          <a:ln/>
+        </p:spPr>
+        <p:txBody>
+          <a:bodyPr wrap="square" lIns="0" tIns="0" rIns="0" bIns="0" rtlCol="0" anchor="ctr"/>
+          <a:lstStyle/>
+          <a:p>
+            <a:pPr algn="ctr" indent="0" marL="0">
+              <a:buNone/>
+            </a:pPr>
+            <a:r>
+              <a:rPr lang="en-US" sz="1020" b="1" dirty="0">
+                <a:solidFill>
+                  <a:srgbClr val="1E2761"/>
+                </a:solidFill>
+                <a:latin typeface="Malgun Gothic" pitchFamily="34" charset="0"/>
+                <a:ea typeface="Malgun Gothic" pitchFamily="34" charset="-122"/>
+                <a:cs typeface="Malgun Gothic" pitchFamily="34" charset="-120"/>
+              </a:rPr>
+              <a:t>4 대</a:t>
+            </a:r>
+            <a:endParaRPr lang="en-US" sz="1020" dirty="0"/>
+          </a:p>
+        </p:txBody>
+      </p:sp>
+      <p:sp>
+        <p:nvSpPr>
+          <p:cNvPr id="18" name="Text 16"/>
+          <p:cNvSpPr/>
+          <p:nvPr/>
+        </p:nvSpPr>
+        <p:spPr>
+          <a:xfrm>
+            <a:off x="9281160" y="1920240"/>
+            <a:ext cx="2377440" cy="292608"/>
+          </a:xfrm>
+          <a:prstGeom prst="rect">
+            <a:avLst/>
+          </a:prstGeom>
+          <a:noFill/>
+          <a:ln/>
+        </p:spPr>
+        <p:txBody>
+          <a:bodyPr wrap="square" lIns="0" tIns="0" rIns="0" bIns="0" rtlCol="0" anchor="ctr"/>
+          <a:lstStyle/>
+          <a:p>
+            <a:pPr indent="0" marL="0">
+              <a:buNone/>
+            </a:pPr>
+            <a:r>
+              <a:rPr lang="en-US" sz="930" dirty="0">
+                <a:solidFill>
+                  <a:srgbClr val="8A94A6"/>
+                </a:solidFill>
+                <a:latin typeface="Malgun Gothic" pitchFamily="34" charset="0"/>
+                <a:ea typeface="Malgun Gothic" pitchFamily="34" charset="-122"/>
+                <a:cs typeface="Malgun Gothic" pitchFamily="34" charset="-120"/>
+              </a:rPr>
+              <a:t>우리 설정</a:t>
+            </a:r>
+            <a:endParaRPr lang="en-US" sz="930" dirty="0"/>
+          </a:p>
+        </p:txBody>
+      </p:sp>
+      <p:sp>
+        <p:nvSpPr>
+          <p:cNvPr id="19" name="Shape 17"/>
+          <p:cNvSpPr/>
+          <p:nvPr/>
+        </p:nvSpPr>
+        <p:spPr>
+          <a:xfrm>
+            <a:off x="502920" y="2212848"/>
+            <a:ext cx="11228832" cy="0"/>
+          </a:xfrm>
+          <a:prstGeom prst="line">
+            <a:avLst/>
+          </a:prstGeom>
+          <a:noFill/>
+          <a:ln w="9525">
+            <a:solidFill>
+              <a:srgbClr val="E3EAF5"/>
+            </a:solidFill>
+            <a:prstDash val="solid"/>
+          </a:ln>
+        </p:spPr>
+      </p:sp>
+      <p:sp>
+        <p:nvSpPr>
+          <p:cNvPr id="20" name="Text 18"/>
+          <p:cNvSpPr/>
+          <p:nvPr/>
+        </p:nvSpPr>
+        <p:spPr>
+          <a:xfrm>
+            <a:off x="594360" y="2212848"/>
+            <a:ext cx="1938528" cy="292608"/>
+          </a:xfrm>
+          <a:prstGeom prst="rect">
+            <a:avLst/>
+          </a:prstGeom>
+          <a:noFill/>
+          <a:ln/>
+        </p:spPr>
+        <p:txBody>
+          <a:bodyPr wrap="square" lIns="0" tIns="0" rIns="0" bIns="0" rtlCol="0" anchor="ctr"/>
+          <a:lstStyle/>
+          <a:p>
+            <a:pPr indent="0" marL="0">
+              <a:buNone/>
+            </a:pPr>
+            <a:r>
+              <a:rPr lang="en-US" sz="1000" b="1" dirty="0">
+                <a:solidFill>
+                  <a:srgbClr val="1E2761"/>
+                </a:solidFill>
+                <a:latin typeface="Malgun Gothic" pitchFamily="34" charset="0"/>
+                <a:ea typeface="Malgun Gothic" pitchFamily="34" charset="-122"/>
+                <a:cs typeface="Malgun Gothic" pitchFamily="34" charset="-120"/>
+              </a:rPr>
+              <a:t>보호 자산</a:t>
+            </a:r>
+            <a:endParaRPr lang="en-US" sz="1000" dirty="0"/>
+          </a:p>
+        </p:txBody>
+      </p:sp>
+      <p:sp>
+        <p:nvSpPr>
+          <p:cNvPr id="21" name="Text 19"/>
+          <p:cNvSpPr/>
+          <p:nvPr/>
+        </p:nvSpPr>
+        <p:spPr>
+          <a:xfrm>
+            <a:off x="2697480" y="2212848"/>
+            <a:ext cx="5230368" cy="292608"/>
+          </a:xfrm>
+          <a:prstGeom prst="rect">
+            <a:avLst/>
+          </a:prstGeom>
+          <a:noFill/>
+          <a:ln/>
+        </p:spPr>
+        <p:txBody>
+          <a:bodyPr wrap="square" lIns="0" tIns="0" rIns="0" bIns="0" rtlCol="0" anchor="ctr"/>
+          <a:lstStyle/>
+          <a:p>
+            <a:pPr indent="0" marL="0">
+              <a:lnSpc>
+                <a:spcPct val="105000"/>
+              </a:lnSpc>
+              <a:buNone/>
+            </a:pPr>
+            <a:r>
+              <a:rPr lang="en-US" sz="960" dirty="0">
+                <a:solidFill>
+                  <a:srgbClr val="4A5568"/>
+                </a:solidFill>
+                <a:latin typeface="Malgun Gothic" pitchFamily="34" charset="0"/>
+                <a:ea typeface="Malgun Gothic" pitchFamily="34" charset="-122"/>
+                <a:cs typeface="Malgun Gothic" pitchFamily="34" charset="-120"/>
+              </a:rPr>
+              <a:t>공격 드론이 도달하면 실패로 판정하는 지점</a:t>
+            </a:r>
+            <a:endParaRPr lang="en-US" sz="960" dirty="0"/>
+          </a:p>
+        </p:txBody>
+      </p:sp>
+      <p:sp>
+        <p:nvSpPr>
+          <p:cNvPr id="22" name="Text 20"/>
+          <p:cNvSpPr/>
+          <p:nvPr/>
+        </p:nvSpPr>
+        <p:spPr>
+          <a:xfrm>
+            <a:off x="8046720" y="2212848"/>
+            <a:ext cx="1097280" cy="292608"/>
+          </a:xfrm>
+          <a:prstGeom prst="rect">
+            <a:avLst/>
+          </a:prstGeom>
+          <a:noFill/>
+          <a:ln/>
+        </p:spPr>
+        <p:txBody>
+          <a:bodyPr wrap="square" lIns="0" tIns="0" rIns="0" bIns="0" rtlCol="0" anchor="ctr"/>
+          <a:lstStyle/>
+          <a:p>
+            <a:pPr algn="ctr" indent="0" marL="0">
+              <a:buNone/>
+            </a:pPr>
+            <a:r>
+              <a:rPr lang="en-US" sz="1020" b="1" dirty="0">
+                <a:solidFill>
+                  <a:srgbClr val="1E2761"/>
+                </a:solidFill>
+                <a:latin typeface="Malgun Gothic" pitchFamily="34" charset="0"/>
+                <a:ea typeface="Malgun Gothic" pitchFamily="34" charset="-122"/>
+                <a:cs typeface="Malgun Gothic" pitchFamily="34" charset="-120"/>
+              </a:rPr>
+              <a:t>원점</a:t>
+            </a:r>
+            <a:endParaRPr lang="en-US" sz="1020" dirty="0"/>
+          </a:p>
+        </p:txBody>
+      </p:sp>
+      <p:sp>
+        <p:nvSpPr>
+          <p:cNvPr id="23" name="Text 21"/>
+          <p:cNvSpPr/>
+          <p:nvPr/>
+        </p:nvSpPr>
+        <p:spPr>
+          <a:xfrm>
+            <a:off x="9281160" y="2212848"/>
+            <a:ext cx="2377440" cy="292608"/>
+          </a:xfrm>
+          <a:prstGeom prst="rect">
+            <a:avLst/>
+          </a:prstGeom>
+          <a:noFill/>
+          <a:ln/>
+        </p:spPr>
+        <p:txBody>
+          <a:bodyPr wrap="square" lIns="0" tIns="0" rIns="0" bIns="0" rtlCol="0" anchor="ctr"/>
+          <a:lstStyle/>
+          <a:p>
+            <a:pPr indent="0" marL="0">
+              <a:buNone/>
+            </a:pPr>
+            <a:r>
+              <a:rPr lang="en-US" sz="930" dirty="0">
+                <a:solidFill>
+                  <a:srgbClr val="8A94A6"/>
+                </a:solidFill>
+                <a:latin typeface="Malgun Gothic" pitchFamily="34" charset="0"/>
+                <a:ea typeface="Malgun Gothic" pitchFamily="34" charset="-122"/>
+                <a:cs typeface="Malgun Gothic" pitchFamily="34" charset="-120"/>
+              </a:rPr>
+              <a:t>우리 설정</a:t>
+            </a:r>
+            <a:endParaRPr lang="en-US" sz="930" dirty="0"/>
+          </a:p>
+        </p:txBody>
+      </p:sp>
+      <p:sp>
+        <p:nvSpPr>
+          <p:cNvPr id="24" name="Shape 22"/>
+          <p:cNvSpPr/>
+          <p:nvPr/>
+        </p:nvSpPr>
+        <p:spPr>
+          <a:xfrm>
+            <a:off x="502920" y="2505456"/>
+            <a:ext cx="11228832" cy="0"/>
+          </a:xfrm>
+          <a:prstGeom prst="line">
+            <a:avLst/>
+          </a:prstGeom>
+          <a:noFill/>
+          <a:ln w="9525">
+            <a:solidFill>
+              <a:srgbClr val="E3EAF5"/>
+            </a:solidFill>
+            <a:prstDash val="solid"/>
+          </a:ln>
+        </p:spPr>
+      </p:sp>
+      <p:sp>
+        <p:nvSpPr>
+          <p:cNvPr id="25" name="Shape 23"/>
+          <p:cNvSpPr/>
+          <p:nvPr/>
+        </p:nvSpPr>
+        <p:spPr>
+          <a:xfrm>
+            <a:off x="502920" y="2505456"/>
+            <a:ext cx="11228832" cy="292608"/>
+          </a:xfrm>
+          <a:prstGeom prst="rect">
+            <a:avLst/>
+          </a:prstGeom>
+          <a:solidFill>
+            <a:srgbClr val="F6F9FE"/>
+          </a:solidFill>
+          <a:ln w="12700">
+            <a:solidFill>
+              <a:srgbClr val="F6F9FE"/>
+            </a:solidFill>
+            <a:prstDash val="solid"/>
+          </a:ln>
+        </p:spPr>
+      </p:sp>
+      <p:sp>
+        <p:nvSpPr>
+          <p:cNvPr id="26" name="Text 24"/>
+          <p:cNvSpPr/>
+          <p:nvPr/>
+        </p:nvSpPr>
+        <p:spPr>
+          <a:xfrm>
+            <a:off x="594360" y="2505456"/>
+            <a:ext cx="1938528" cy="292608"/>
+          </a:xfrm>
+          <a:prstGeom prst="rect">
+            <a:avLst/>
+          </a:prstGeom>
+          <a:noFill/>
+          <a:ln/>
+        </p:spPr>
+        <p:txBody>
+          <a:bodyPr wrap="square" lIns="0" tIns="0" rIns="0" bIns="0" rtlCol="0" anchor="ctr"/>
+          <a:lstStyle/>
+          <a:p>
+            <a:pPr indent="0" marL="0">
+              <a:buNone/>
+            </a:pPr>
+            <a:r>
+              <a:rPr lang="en-US" sz="1000" b="1" dirty="0">
+                <a:solidFill>
+                  <a:srgbClr val="1E2761"/>
+                </a:solidFill>
+                <a:latin typeface="Malgun Gothic" pitchFamily="34" charset="0"/>
+                <a:ea typeface="Malgun Gothic" pitchFamily="34" charset="-122"/>
+                <a:cs typeface="Malgun Gothic" pitchFamily="34" charset="-120"/>
+              </a:rPr>
+              <a:t>네트 반경  ρ</a:t>
+            </a:r>
+            <a:endParaRPr lang="en-US" sz="1000" dirty="0"/>
+          </a:p>
+        </p:txBody>
+      </p:sp>
+      <p:sp>
+        <p:nvSpPr>
+          <p:cNvPr id="27" name="Text 25"/>
+          <p:cNvSpPr/>
+          <p:nvPr/>
+        </p:nvSpPr>
+        <p:spPr>
+          <a:xfrm>
+            <a:off x="2697480" y="2505456"/>
+            <a:ext cx="5230368" cy="292608"/>
+          </a:xfrm>
+          <a:prstGeom prst="rect">
+            <a:avLst/>
+          </a:prstGeom>
+          <a:noFill/>
+          <a:ln/>
+        </p:spPr>
+        <p:txBody>
+          <a:bodyPr wrap="square" lIns="0" tIns="0" rIns="0" bIns="0" rtlCol="0" anchor="ctr"/>
+          <a:lstStyle/>
+          <a:p>
+            <a:pPr indent="0" marL="0">
+              <a:lnSpc>
+                <a:spcPct val="105000"/>
+              </a:lnSpc>
+              <a:buNone/>
+            </a:pPr>
+            <a:r>
+              <a:rPr lang="en-US" sz="960" dirty="0">
+                <a:solidFill>
+                  <a:srgbClr val="4A5568"/>
+                </a:solidFill>
+                <a:latin typeface="Malgun Gothic" pitchFamily="34" charset="0"/>
+                <a:ea typeface="Malgun Gothic" pitchFamily="34" charset="-122"/>
+                <a:cs typeface="Malgun Gothic" pitchFamily="34" charset="-120"/>
+              </a:rPr>
+              <a:t>최악 방향에서 네트가 확실히 덮는 반경. 등가면적 반경(1.997 m)이 아니라 최대 내접원</a:t>
+            </a:r>
+            <a:endParaRPr lang="en-US" sz="960" dirty="0"/>
+          </a:p>
+        </p:txBody>
+      </p:sp>
+      <p:sp>
+        <p:nvSpPr>
+          <p:cNvPr id="28" name="Text 26"/>
+          <p:cNvSpPr/>
+          <p:nvPr/>
+        </p:nvSpPr>
+        <p:spPr>
+          <a:xfrm>
+            <a:off x="8046720" y="2505456"/>
+            <a:ext cx="1097280" cy="292608"/>
+          </a:xfrm>
+          <a:prstGeom prst="rect">
+            <a:avLst/>
+          </a:prstGeom>
+          <a:noFill/>
+          <a:ln/>
+        </p:spPr>
+        <p:txBody>
+          <a:bodyPr wrap="square" lIns="0" tIns="0" rIns="0" bIns="0" rtlCol="0" anchor="ctr"/>
+          <a:lstStyle/>
+          <a:p>
+            <a:pPr algn="ctr" indent="0" marL="0">
+              <a:buNone/>
+            </a:pPr>
+            <a:r>
+              <a:rPr lang="en-US" sz="1020" b="1" dirty="0">
+                <a:solidFill>
+                  <a:srgbClr val="1E2761"/>
+                </a:solidFill>
+                <a:latin typeface="Malgun Gothic" pitchFamily="34" charset="0"/>
+                <a:ea typeface="Malgun Gothic" pitchFamily="34" charset="-122"/>
+                <a:cs typeface="Malgun Gothic" pitchFamily="34" charset="-120"/>
+              </a:rPr>
+              <a:t>1.77 m</a:t>
+            </a:r>
+            <a:endParaRPr lang="en-US" sz="1020" dirty="0"/>
+          </a:p>
+        </p:txBody>
+      </p:sp>
+      <p:sp>
+        <p:nvSpPr>
+          <p:cNvPr id="29" name="Text 27"/>
+          <p:cNvSpPr/>
+          <p:nvPr/>
+        </p:nvSpPr>
+        <p:spPr>
+          <a:xfrm>
+            <a:off x="9281160" y="2505456"/>
+            <a:ext cx="2377440" cy="292608"/>
+          </a:xfrm>
+          <a:prstGeom prst="rect">
+            <a:avLst/>
+          </a:prstGeom>
+          <a:noFill/>
+          <a:ln/>
+        </p:spPr>
+        <p:txBody>
+          <a:bodyPr wrap="square" lIns="0" tIns="0" rIns="0" bIns="0" rtlCol="0" anchor="ctr"/>
+          <a:lstStyle/>
+          <a:p>
+            <a:pPr indent="0" marL="0">
+              <a:buNone/>
+            </a:pPr>
+            <a:r>
+              <a:rPr lang="en-US" sz="930" dirty="0">
+                <a:solidFill>
+                  <a:srgbClr val="8A94A6"/>
+                </a:solidFill>
+                <a:latin typeface="Malgun Gothic" pitchFamily="34" charset="0"/>
+                <a:ea typeface="Malgun Gothic" pitchFamily="34" charset="-122"/>
+                <a:cs typeface="Malgun Gothic" pitchFamily="34" charset="-120"/>
+              </a:rPr>
+              <a:t>Xu 2025 · Drones 9(3):190</a:t>
+            </a:r>
+            <a:endParaRPr lang="en-US" sz="930" dirty="0"/>
+          </a:p>
+        </p:txBody>
+      </p:sp>
+      <p:sp>
+        <p:nvSpPr>
+          <p:cNvPr id="30" name="Shape 28"/>
+          <p:cNvSpPr/>
+          <p:nvPr/>
+        </p:nvSpPr>
+        <p:spPr>
+          <a:xfrm>
+            <a:off x="502920" y="2798064"/>
+            <a:ext cx="11228832" cy="0"/>
+          </a:xfrm>
+          <a:prstGeom prst="line">
+            <a:avLst/>
+          </a:prstGeom>
+          <a:noFill/>
+          <a:ln w="9525">
+            <a:solidFill>
+              <a:srgbClr val="E3EAF5"/>
+            </a:solidFill>
+            <a:prstDash val="solid"/>
+          </a:ln>
+        </p:spPr>
+      </p:sp>
+      <p:sp>
+        <p:nvSpPr>
+          <p:cNvPr id="31" name="Text 29"/>
+          <p:cNvSpPr/>
+          <p:nvPr/>
+        </p:nvSpPr>
+        <p:spPr>
+          <a:xfrm>
+            <a:off x="594360" y="2798064"/>
+            <a:ext cx="1938528" cy="292608"/>
+          </a:xfrm>
+          <a:prstGeom prst="rect">
+            <a:avLst/>
+          </a:prstGeom>
+          <a:noFill/>
+          <a:ln/>
+        </p:spPr>
+        <p:txBody>
+          <a:bodyPr wrap="square" lIns="0" tIns="0" rIns="0" bIns="0" rtlCol="0" anchor="ctr"/>
+          <a:lstStyle/>
+          <a:p>
+            <a:pPr indent="0" marL="0">
+              <a:buNone/>
+            </a:pPr>
+            <a:r>
+              <a:rPr lang="en-US" sz="1000" b="1" dirty="0">
+                <a:solidFill>
+                  <a:srgbClr val="1E2761"/>
+                </a:solidFill>
+                <a:latin typeface="Malgun Gothic" pitchFamily="34" charset="0"/>
+                <a:ea typeface="Malgun Gothic" pitchFamily="34" charset="-122"/>
+                <a:cs typeface="Malgun Gothic" pitchFamily="34" charset="-120"/>
+              </a:rPr>
+              <a:t>전개 지연  τ</a:t>
+            </a:r>
+            <a:endParaRPr lang="en-US" sz="1000" dirty="0"/>
+          </a:p>
+        </p:txBody>
+      </p:sp>
+      <p:sp>
+        <p:nvSpPr>
+          <p:cNvPr id="32" name="Text 30"/>
+          <p:cNvSpPr/>
+          <p:nvPr/>
+        </p:nvSpPr>
+        <p:spPr>
+          <a:xfrm>
+            <a:off x="2697480" y="2798064"/>
+            <a:ext cx="5230368" cy="292608"/>
+          </a:xfrm>
+          <a:prstGeom prst="rect">
+            <a:avLst/>
+          </a:prstGeom>
+          <a:noFill/>
+          <a:ln/>
+        </p:spPr>
+        <p:txBody>
+          <a:bodyPr wrap="square" lIns="0" tIns="0" rIns="0" bIns="0" rtlCol="0" anchor="ctr"/>
+          <a:lstStyle/>
+          <a:p>
+            <a:pPr indent="0" marL="0">
+              <a:lnSpc>
+                <a:spcPct val="105000"/>
+              </a:lnSpc>
+              <a:buNone/>
+            </a:pPr>
+            <a:r>
+              <a:rPr lang="en-US" sz="960" dirty="0">
+                <a:solidFill>
+                  <a:srgbClr val="4A5568"/>
+                </a:solidFill>
+                <a:latin typeface="Malgun Gothic" pitchFamily="34" charset="0"/>
+                <a:ea typeface="Malgun Gothic" pitchFamily="34" charset="-122"/>
+                <a:cs typeface="Malgun Gothic" pitchFamily="34" charset="-120"/>
+              </a:rPr>
+              <a:t>발사 결심부터 포획 판정까지. 네트 비행 0.15 + 재관측 0.10 + 판단 0.05</a:t>
+            </a:r>
+            <a:endParaRPr lang="en-US" sz="960" dirty="0"/>
+          </a:p>
+        </p:txBody>
+      </p:sp>
+      <p:sp>
+        <p:nvSpPr>
+          <p:cNvPr id="33" name="Text 31"/>
+          <p:cNvSpPr/>
+          <p:nvPr/>
+        </p:nvSpPr>
+        <p:spPr>
+          <a:xfrm>
+            <a:off x="8046720" y="2798064"/>
+            <a:ext cx="1097280" cy="292608"/>
+          </a:xfrm>
+          <a:prstGeom prst="rect">
+            <a:avLst/>
+          </a:prstGeom>
+          <a:noFill/>
+          <a:ln/>
+        </p:spPr>
+        <p:txBody>
+          <a:bodyPr wrap="square" lIns="0" tIns="0" rIns="0" bIns="0" rtlCol="0" anchor="ctr"/>
+          <a:lstStyle/>
+          <a:p>
+            <a:pPr algn="ctr" indent="0" marL="0">
+              <a:buNone/>
+            </a:pPr>
+            <a:r>
+              <a:rPr lang="en-US" sz="1020" b="1" dirty="0">
+                <a:solidFill>
+                  <a:srgbClr val="1E2761"/>
+                </a:solidFill>
+                <a:latin typeface="Malgun Gothic" pitchFamily="34" charset="0"/>
+                <a:ea typeface="Malgun Gothic" pitchFamily="34" charset="-122"/>
+                <a:cs typeface="Malgun Gothic" pitchFamily="34" charset="-120"/>
+              </a:rPr>
+              <a:t>0.30 s</a:t>
+            </a:r>
+            <a:endParaRPr lang="en-US" sz="1020" dirty="0"/>
+          </a:p>
+        </p:txBody>
+      </p:sp>
+      <p:sp>
+        <p:nvSpPr>
+          <p:cNvPr id="34" name="Text 32"/>
+          <p:cNvSpPr/>
+          <p:nvPr/>
+        </p:nvSpPr>
+        <p:spPr>
+          <a:xfrm>
+            <a:off x="9281160" y="2798064"/>
+            <a:ext cx="2377440" cy="292608"/>
+          </a:xfrm>
+          <a:prstGeom prst="rect">
+            <a:avLst/>
+          </a:prstGeom>
+          <a:noFill/>
+          <a:ln/>
+        </p:spPr>
+        <p:txBody>
+          <a:bodyPr wrap="square" lIns="0" tIns="0" rIns="0" bIns="0" rtlCol="0" anchor="ctr"/>
+          <a:lstStyle/>
+          <a:p>
+            <a:pPr indent="0" marL="0">
+              <a:buNone/>
+            </a:pPr>
+            <a:r>
+              <a:rPr lang="en-US" sz="930" dirty="0">
+                <a:solidFill>
+                  <a:srgbClr val="8A94A6"/>
+                </a:solidFill>
+                <a:latin typeface="Malgun Gothic" pitchFamily="34" charset="0"/>
+                <a:ea typeface="Malgun Gothic" pitchFamily="34" charset="-122"/>
+                <a:cs typeface="Malgun Gothic" pitchFamily="34" charset="-120"/>
+              </a:rPr>
+              <a:t>Xu 2025 + 센서 사양</a:t>
+            </a:r>
+            <a:endParaRPr lang="en-US" sz="930" dirty="0"/>
+          </a:p>
+        </p:txBody>
+      </p:sp>
+      <p:sp>
+        <p:nvSpPr>
+          <p:cNvPr id="35" name="Shape 33"/>
+          <p:cNvSpPr/>
+          <p:nvPr/>
+        </p:nvSpPr>
+        <p:spPr>
+          <a:xfrm>
+            <a:off x="502920" y="3090672"/>
+            <a:ext cx="11228832" cy="0"/>
+          </a:xfrm>
+          <a:prstGeom prst="line">
+            <a:avLst/>
+          </a:prstGeom>
+          <a:noFill/>
+          <a:ln w="9525">
+            <a:solidFill>
+              <a:srgbClr val="E3EAF5"/>
+            </a:solidFill>
+            <a:prstDash val="solid"/>
+          </a:ln>
+        </p:spPr>
+      </p:sp>
+      <p:sp>
+        <p:nvSpPr>
+          <p:cNvPr id="36" name="Shape 34"/>
+          <p:cNvSpPr/>
+          <p:nvPr/>
+        </p:nvSpPr>
+        <p:spPr>
+          <a:xfrm>
+            <a:off x="502920" y="3090672"/>
+            <a:ext cx="11228832" cy="292608"/>
+          </a:xfrm>
+          <a:prstGeom prst="rect">
+            <a:avLst/>
+          </a:prstGeom>
+          <a:solidFill>
+            <a:srgbClr val="F6F9FE"/>
+          </a:solidFill>
+          <a:ln w="12700">
+            <a:solidFill>
+              <a:srgbClr val="F6F9FE"/>
+            </a:solidFill>
+            <a:prstDash val="solid"/>
+          </a:ln>
+        </p:spPr>
+      </p:sp>
+      <p:sp>
+        <p:nvSpPr>
+          <p:cNvPr id="37" name="Text 35"/>
+          <p:cNvSpPr/>
+          <p:nvPr/>
+        </p:nvSpPr>
+        <p:spPr>
+          <a:xfrm>
+            <a:off x="594360" y="3090672"/>
+            <a:ext cx="1938528" cy="292608"/>
+          </a:xfrm>
+          <a:prstGeom prst="rect">
+            <a:avLst/>
+          </a:prstGeom>
+          <a:noFill/>
+          <a:ln/>
+        </p:spPr>
+        <p:txBody>
+          <a:bodyPr wrap="square" lIns="0" tIns="0" rIns="0" bIns="0" rtlCol="0" anchor="ctr"/>
+          <a:lstStyle/>
+          <a:p>
+            <a:pPr indent="0" marL="0">
+              <a:buNone/>
+            </a:pPr>
+            <a:r>
+              <a:rPr lang="en-US" sz="1000" b="1" dirty="0">
+                <a:solidFill>
+                  <a:srgbClr val="1E2761"/>
+                </a:solidFill>
+                <a:latin typeface="Malgun Gothic" pitchFamily="34" charset="0"/>
+                <a:ea typeface="Malgun Gothic" pitchFamily="34" charset="-122"/>
+                <a:cs typeface="Malgun Gothic" pitchFamily="34" charset="-120"/>
+              </a:rPr>
+              <a:t>협력 필요 경계  a*</a:t>
+            </a:r>
+            <a:endParaRPr lang="en-US" sz="1000" dirty="0"/>
+          </a:p>
+        </p:txBody>
+      </p:sp>
+      <p:sp>
+        <p:nvSpPr>
+          <p:cNvPr id="38" name="Text 36"/>
+          <p:cNvSpPr/>
+          <p:nvPr/>
+        </p:nvSpPr>
+        <p:spPr>
+          <a:xfrm>
+            <a:off x="2697480" y="3090672"/>
+            <a:ext cx="5230368" cy="292608"/>
+          </a:xfrm>
+          <a:prstGeom prst="rect">
+            <a:avLst/>
+          </a:prstGeom>
+          <a:noFill/>
+          <a:ln/>
+        </p:spPr>
+        <p:txBody>
+          <a:bodyPr wrap="square" lIns="0" tIns="0" rIns="0" bIns="0" rtlCol="0" anchor="ctr"/>
+          <a:lstStyle/>
+          <a:p>
+            <a:pPr indent="0" marL="0">
+              <a:lnSpc>
+                <a:spcPct val="105000"/>
+              </a:lnSpc>
+              <a:buNone/>
+            </a:pPr>
+            <a:r>
+              <a:rPr lang="en-US" sz="960" dirty="0">
+                <a:solidFill>
+                  <a:srgbClr val="4A5568"/>
+                </a:solidFill>
+                <a:latin typeface="Malgun Gothic" pitchFamily="34" charset="0"/>
+                <a:ea typeface="Malgun Gothic" pitchFamily="34" charset="-122"/>
+                <a:cs typeface="Malgun Gothic" pitchFamily="34" charset="-120"/>
+              </a:rPr>
+              <a:t>완벽히 겨눴을 때의 상한. 넘으면 네트로는 불가능.   a* = 2ρ / τ²</a:t>
+            </a:r>
+            <a:endParaRPr lang="en-US" sz="960" dirty="0"/>
+          </a:p>
+        </p:txBody>
+      </p:sp>
+      <p:sp>
+        <p:nvSpPr>
+          <p:cNvPr id="39" name="Text 37"/>
+          <p:cNvSpPr/>
+          <p:nvPr/>
+        </p:nvSpPr>
+        <p:spPr>
+          <a:xfrm>
+            <a:off x="8046720" y="3090672"/>
+            <a:ext cx="1097280" cy="292608"/>
+          </a:xfrm>
+          <a:prstGeom prst="rect">
+            <a:avLst/>
+          </a:prstGeom>
+          <a:noFill/>
+          <a:ln/>
+        </p:spPr>
+        <p:txBody>
+          <a:bodyPr wrap="square" lIns="0" tIns="0" rIns="0" bIns="0" rtlCol="0" anchor="ctr"/>
+          <a:lstStyle/>
+          <a:p>
+            <a:pPr algn="ctr" indent="0" marL="0">
+              <a:buNone/>
+            </a:pPr>
+            <a:r>
+              <a:rPr lang="en-US" sz="1020" b="1" dirty="0">
+                <a:solidFill>
+                  <a:srgbClr val="1E2761"/>
+                </a:solidFill>
+                <a:latin typeface="Malgun Gothic" pitchFamily="34" charset="0"/>
+                <a:ea typeface="Malgun Gothic" pitchFamily="34" charset="-122"/>
+                <a:cs typeface="Malgun Gothic" pitchFamily="34" charset="-120"/>
+              </a:rPr>
+              <a:t>39.3 m/s²</a:t>
+            </a:r>
+            <a:endParaRPr lang="en-US" sz="1020" dirty="0"/>
+          </a:p>
+        </p:txBody>
+      </p:sp>
+      <p:sp>
+        <p:nvSpPr>
+          <p:cNvPr id="40" name="Text 38"/>
+          <p:cNvSpPr/>
+          <p:nvPr/>
+        </p:nvSpPr>
+        <p:spPr>
+          <a:xfrm>
+            <a:off x="9281160" y="3090672"/>
+            <a:ext cx="2377440" cy="292608"/>
+          </a:xfrm>
+          <a:prstGeom prst="rect">
+            <a:avLst/>
+          </a:prstGeom>
+          <a:noFill/>
+          <a:ln/>
+        </p:spPr>
+        <p:txBody>
+          <a:bodyPr wrap="square" lIns="0" tIns="0" rIns="0" bIns="0" rtlCol="0" anchor="ctr"/>
+          <a:lstStyle/>
+          <a:p>
+            <a:pPr indent="0" marL="0">
+              <a:buNone/>
+            </a:pPr>
+            <a:r>
+              <a:rPr lang="en-US" sz="930" dirty="0">
+                <a:solidFill>
+                  <a:srgbClr val="8A94A6"/>
+                </a:solidFill>
+                <a:latin typeface="Malgun Gothic" pitchFamily="34" charset="0"/>
+                <a:ea typeface="Malgun Gothic" pitchFamily="34" charset="-122"/>
+                <a:cs typeface="Malgun Gothic" pitchFamily="34" charset="-120"/>
+              </a:rPr>
+              <a:t>본 연구 유도</a:t>
+            </a:r>
+            <a:endParaRPr lang="en-US" sz="930" dirty="0"/>
+          </a:p>
+        </p:txBody>
+      </p:sp>
+      <p:sp>
+        <p:nvSpPr>
+          <p:cNvPr id="41" name="Shape 39"/>
+          <p:cNvSpPr/>
+          <p:nvPr/>
+        </p:nvSpPr>
+        <p:spPr>
+          <a:xfrm>
+            <a:off x="502920" y="3383280"/>
+            <a:ext cx="11228832" cy="0"/>
+          </a:xfrm>
+          <a:prstGeom prst="line">
+            <a:avLst/>
+          </a:prstGeom>
+          <a:noFill/>
+          <a:ln w="9525">
+            <a:solidFill>
+              <a:srgbClr val="E3EAF5"/>
+            </a:solidFill>
+            <a:prstDash val="solid"/>
+          </a:ln>
+        </p:spPr>
+      </p:sp>
+      <p:sp>
+        <p:nvSpPr>
+          <p:cNvPr id="42" name="Text 40"/>
+          <p:cNvSpPr/>
+          <p:nvPr/>
+        </p:nvSpPr>
+        <p:spPr>
+          <a:xfrm>
+            <a:off x="594360" y="3383280"/>
+            <a:ext cx="1938528" cy="292608"/>
+          </a:xfrm>
+          <a:prstGeom prst="rect">
+            <a:avLst/>
+          </a:prstGeom>
+          <a:noFill/>
+          <a:ln/>
+        </p:spPr>
+        <p:txBody>
+          <a:bodyPr wrap="square" lIns="0" tIns="0" rIns="0" bIns="0" rtlCol="0" anchor="ctr"/>
+          <a:lstStyle/>
+          <a:p>
+            <a:pPr indent="0" marL="0">
+              <a:buNone/>
+            </a:pPr>
+            <a:r>
+              <a:rPr lang="en-US" sz="1000" b="1" dirty="0">
+                <a:solidFill>
+                  <a:srgbClr val="1E2761"/>
+                </a:solidFill>
+                <a:latin typeface="Malgun Gothic" pitchFamily="34" charset="0"/>
+                <a:ea typeface="Malgun Gothic" pitchFamily="34" charset="-122"/>
+                <a:cs typeface="Malgun Gothic" pitchFamily="34" charset="-120"/>
+              </a:rPr>
+              <a:t>겨냥 경계  a*(ψ)</a:t>
+            </a:r>
+            <a:endParaRPr lang="en-US" sz="1000" dirty="0"/>
+          </a:p>
+        </p:txBody>
+      </p:sp>
+      <p:sp>
+        <p:nvSpPr>
+          <p:cNvPr id="43" name="Text 41"/>
+          <p:cNvSpPr/>
+          <p:nvPr/>
+        </p:nvSpPr>
+        <p:spPr>
+          <a:xfrm>
+            <a:off x="2697480" y="3383280"/>
+            <a:ext cx="5230368" cy="292608"/>
+          </a:xfrm>
+          <a:prstGeom prst="rect">
+            <a:avLst/>
+          </a:prstGeom>
+          <a:noFill/>
+          <a:ln/>
+        </p:spPr>
+        <p:txBody>
+          <a:bodyPr wrap="square" lIns="0" tIns="0" rIns="0" bIns="0" rtlCol="0" anchor="ctr"/>
+          <a:lstStyle/>
+          <a:p>
+            <a:pPr indent="0" marL="0">
+              <a:lnSpc>
+                <a:spcPct val="105000"/>
+              </a:lnSpc>
+              <a:buNone/>
+            </a:pPr>
+            <a:r>
+              <a:rPr lang="en-US" sz="960" dirty="0">
+                <a:solidFill>
+                  <a:srgbClr val="4A5568"/>
+                </a:solidFill>
+                <a:latin typeface="Malgun Gothic" pitchFamily="34" charset="0"/>
+                <a:ea typeface="Malgun Gothic" pitchFamily="34" charset="-122"/>
+                <a:cs typeface="Malgun Gothic" pitchFamily="34" charset="-120"/>
+              </a:rPr>
+              <a:t>남는 조준각 ψ 를 넣은 경계.   a*(ψ) = 2d (tanθ − ψ) / τ²,   ψ 실측 4.3°</a:t>
+            </a:r>
+            <a:endParaRPr lang="en-US" sz="960" dirty="0"/>
+          </a:p>
+        </p:txBody>
+      </p:sp>
+      <p:sp>
+        <p:nvSpPr>
+          <p:cNvPr id="44" name="Text 42"/>
+          <p:cNvSpPr/>
+          <p:nvPr/>
+        </p:nvSpPr>
+        <p:spPr>
+          <a:xfrm>
+            <a:off x="8046720" y="3383280"/>
+            <a:ext cx="1097280" cy="292608"/>
+          </a:xfrm>
+          <a:prstGeom prst="rect">
+            <a:avLst/>
+          </a:prstGeom>
+          <a:noFill/>
+          <a:ln/>
+        </p:spPr>
+        <p:txBody>
+          <a:bodyPr wrap="square" lIns="0" tIns="0" rIns="0" bIns="0" rtlCol="0" anchor="ctr"/>
+          <a:lstStyle/>
+          <a:p>
+            <a:pPr algn="ctr" indent="0" marL="0">
+              <a:buNone/>
+            </a:pPr>
+            <a:r>
+              <a:rPr lang="en-US" sz="1020" b="1" dirty="0">
+                <a:solidFill>
+                  <a:srgbClr val="1E2761"/>
+                </a:solidFill>
+                <a:latin typeface="Malgun Gothic" pitchFamily="34" charset="0"/>
+                <a:ea typeface="Malgun Gothic" pitchFamily="34" charset="-122"/>
+                <a:cs typeface="Malgun Gothic" pitchFamily="34" charset="-120"/>
+              </a:rPr>
+              <a:t>25.8 m/s²</a:t>
+            </a:r>
+            <a:endParaRPr lang="en-US" sz="1020" dirty="0"/>
+          </a:p>
+        </p:txBody>
+      </p:sp>
+      <p:sp>
+        <p:nvSpPr>
           <p:cNvPr id="45" name="Text 43"/>
           <p:cNvSpPr/>
           <p:nvPr/>
         </p:nvSpPr>
         <p:spPr>
           <a:xfrm>
-            <a:off x="713232" y="5779008"/>
-            <a:ext cx="10789920" cy="658368"/>
-          </a:xfrm>
-          <a:prstGeom prst="rect">
-            <a:avLst/>
-          </a:prstGeom>
-          <a:noFill/>
-          <a:ln/>
-        </p:spPr>
-        <p:txBody>
-          <a:bodyPr wrap="square" lIns="0" tIns="0" rIns="0" bIns="0" rtlCol="0" anchor="ctr"/>
-          <a:lstStyle/>
-          <a:p>
-            <a:pPr indent="0" marL="0">
-              <a:buNone/>
-            </a:pPr>
-            <a:r>
-              <a:rPr lang="en-US" sz="1120" b="1" dirty="0">
+            <a:off x="9281160" y="3383280"/>
+            <a:ext cx="2377440" cy="292608"/>
+          </a:xfrm>
+          <a:prstGeom prst="rect">
+            <a:avLst/>
+          </a:prstGeom>
+          <a:noFill/>
+          <a:ln/>
+        </p:spPr>
+        <p:txBody>
+          <a:bodyPr wrap="square" lIns="0" tIns="0" rIns="0" bIns="0" rtlCol="0" anchor="ctr"/>
+          <a:lstStyle/>
+          <a:p>
+            <a:pPr indent="0" marL="0">
+              <a:buNone/>
+            </a:pPr>
+            <a:r>
+              <a:rPr lang="en-US" sz="930" dirty="0">
+                <a:solidFill>
+                  <a:srgbClr val="8A94A6"/>
+                </a:solidFill>
+                <a:latin typeface="Malgun Gothic" pitchFamily="34" charset="0"/>
+                <a:ea typeface="Malgun Gothic" pitchFamily="34" charset="-122"/>
+                <a:cs typeface="Malgun Gothic" pitchFamily="34" charset="-120"/>
+              </a:rPr>
+              <a:t>본 연구 · ψ 실측</a:t>
+            </a:r>
+            <a:endParaRPr lang="en-US" sz="930" dirty="0"/>
+          </a:p>
+        </p:txBody>
+      </p:sp>
+      <p:sp>
+        <p:nvSpPr>
+          <p:cNvPr id="46" name="Shape 44"/>
+          <p:cNvSpPr/>
+          <p:nvPr/>
+        </p:nvSpPr>
+        <p:spPr>
+          <a:xfrm>
+            <a:off x="502920" y="3675888"/>
+            <a:ext cx="11228832" cy="0"/>
+          </a:xfrm>
+          <a:prstGeom prst="line">
+            <a:avLst/>
+          </a:prstGeom>
+          <a:noFill/>
+          <a:ln w="9525">
+            <a:solidFill>
+              <a:srgbClr val="E3EAF5"/>
+            </a:solidFill>
+            <a:prstDash val="solid"/>
+          </a:ln>
+        </p:spPr>
+      </p:sp>
+      <p:sp>
+        <p:nvSpPr>
+          <p:cNvPr id="47" name="Shape 45"/>
+          <p:cNvSpPr/>
+          <p:nvPr/>
+        </p:nvSpPr>
+        <p:spPr>
+          <a:xfrm>
+            <a:off x="502920" y="3675888"/>
+            <a:ext cx="11228832" cy="292608"/>
+          </a:xfrm>
+          <a:prstGeom prst="rect">
+            <a:avLst/>
+          </a:prstGeom>
+          <a:solidFill>
+            <a:srgbClr val="F6F9FE"/>
+          </a:solidFill>
+          <a:ln w="12700">
+            <a:solidFill>
+              <a:srgbClr val="F6F9FE"/>
+            </a:solidFill>
+            <a:prstDash val="solid"/>
+          </a:ln>
+        </p:spPr>
+      </p:sp>
+      <p:sp>
+        <p:nvSpPr>
+          <p:cNvPr id="48" name="Text 46"/>
+          <p:cNvSpPr/>
+          <p:nvPr/>
+        </p:nvSpPr>
+        <p:spPr>
+          <a:xfrm>
+            <a:off x="594360" y="3675888"/>
+            <a:ext cx="1938528" cy="292608"/>
+          </a:xfrm>
+          <a:prstGeom prst="rect">
+            <a:avLst/>
+          </a:prstGeom>
+          <a:noFill/>
+          <a:ln/>
+        </p:spPr>
+        <p:txBody>
+          <a:bodyPr wrap="square" lIns="0" tIns="0" rIns="0" bIns="0" rtlCol="0" anchor="ctr"/>
+          <a:lstStyle/>
+          <a:p>
+            <a:pPr indent="0" marL="0">
+              <a:buNone/>
+            </a:pPr>
+            <a:r>
+              <a:rPr lang="en-US" sz="1000" b="1" dirty="0">
                 <a:solidFill>
                   <a:srgbClr val="1E2761"/>
                 </a:solidFill>
@@ -4409,13 +6252,181 @@
                 <a:ea typeface="Malgun Gothic" pitchFamily="34" charset="-122"/>
                 <a:cs typeface="Malgun Gothic" pitchFamily="34" charset="-120"/>
               </a:rPr>
-              <a:t>4번은 오류가 아니라 모델링 판단입니다 — 물리적으로 옳은 형태로 구현한 뒤 그 결과에 승복하는 방식을 제안드립니다.   </a:t>
-            </a:r>
-            <a:pPr indent="0" marL="0">
-              <a:buNone/>
-            </a:pPr>
-            <a:r>
-              <a:rPr lang="en-US" sz="1120" i="1" dirty="0">
+              <a:t>무력화</a:t>
+            </a:r>
+            <a:endParaRPr lang="en-US" sz="1000" dirty="0"/>
+          </a:p>
+        </p:txBody>
+      </p:sp>
+      <p:sp>
+        <p:nvSpPr>
+          <p:cNvPr id="49" name="Text 47"/>
+          <p:cNvSpPr/>
+          <p:nvPr/>
+        </p:nvSpPr>
+        <p:spPr>
+          <a:xfrm>
+            <a:off x="2697480" y="3675888"/>
+            <a:ext cx="5230368" cy="292608"/>
+          </a:xfrm>
+          <a:prstGeom prst="rect">
+            <a:avLst/>
+          </a:prstGeom>
+          <a:noFill/>
+          <a:ln/>
+        </p:spPr>
+        <p:txBody>
+          <a:bodyPr wrap="square" lIns="0" tIns="0" rIns="0" bIns="0" rtlCol="0" anchor="ctr"/>
+          <a:lstStyle/>
+          <a:p>
+            <a:pPr indent="0" marL="0">
+              <a:lnSpc>
+                <a:spcPct val="105000"/>
+              </a:lnSpc>
+              <a:buNone/>
+            </a:pPr>
+            <a:r>
+              <a:rPr lang="en-US" sz="960" dirty="0">
+                <a:solidFill>
+                  <a:srgbClr val="4A5568"/>
+                </a:solidFill>
+                <a:latin typeface="Malgun Gothic" pitchFamily="34" charset="0"/>
+                <a:ea typeface="Malgun Gothic" pitchFamily="34" charset="-122"/>
+                <a:cs typeface="Malgun Gothic" pitchFamily="34" charset="-120"/>
+              </a:rPr>
+              <a:t>공격 드론을 막는 데 성공. 네트 포획과 물리 요격을 모두 포함</a:t>
+            </a:r>
+            <a:endParaRPr lang="en-US" sz="960" dirty="0"/>
+          </a:p>
+        </p:txBody>
+      </p:sp>
+      <p:sp>
+        <p:nvSpPr>
+          <p:cNvPr id="50" name="Text 48"/>
+          <p:cNvSpPr/>
+          <p:nvPr/>
+        </p:nvSpPr>
+        <p:spPr>
+          <a:xfrm>
+            <a:off x="8046720" y="3675888"/>
+            <a:ext cx="1097280" cy="292608"/>
+          </a:xfrm>
+          <a:prstGeom prst="rect">
+            <a:avLst/>
+          </a:prstGeom>
+          <a:noFill/>
+          <a:ln/>
+        </p:spPr>
+        <p:txBody>
+          <a:bodyPr wrap="square" lIns="0" tIns="0" rIns="0" bIns="0" rtlCol="0" anchor="ctr"/>
+          <a:lstStyle/>
+          <a:p>
+            <a:pPr algn="ctr" indent="0" marL="0">
+              <a:buNone/>
+            </a:pPr>
+            <a:r>
+              <a:rPr lang="en-US" sz="1020" b="1" dirty="0">
+                <a:solidFill>
+                  <a:srgbClr val="8A94A6"/>
+                </a:solidFill>
+                <a:latin typeface="Malgun Gothic" pitchFamily="34" charset="0"/>
+                <a:ea typeface="Malgun Gothic" pitchFamily="34" charset="-122"/>
+                <a:cs typeface="Malgun Gothic" pitchFamily="34" charset="-120"/>
+              </a:rPr>
+              <a:t>—</a:t>
+            </a:r>
+            <a:endParaRPr lang="en-US" sz="1020" dirty="0"/>
+          </a:p>
+        </p:txBody>
+      </p:sp>
+      <p:sp>
+        <p:nvSpPr>
+          <p:cNvPr id="51" name="Text 49"/>
+          <p:cNvSpPr/>
+          <p:nvPr/>
+        </p:nvSpPr>
+        <p:spPr>
+          <a:xfrm>
+            <a:off x="9281160" y="3675888"/>
+            <a:ext cx="2377440" cy="292608"/>
+          </a:xfrm>
+          <a:prstGeom prst="rect">
+            <a:avLst/>
+          </a:prstGeom>
+          <a:noFill/>
+          <a:ln/>
+        </p:spPr>
+        <p:txBody>
+          <a:bodyPr wrap="square" lIns="0" tIns="0" rIns="0" bIns="0" rtlCol="0" anchor="ctr"/>
+          <a:lstStyle/>
+          <a:p>
+            <a:pPr indent="0" marL="0">
+              <a:buNone/>
+            </a:pPr>
+            <a:r>
+              <a:rPr lang="en-US" sz="930" dirty="0">
+                <a:solidFill>
+                  <a:srgbClr val="8A94A6"/>
+                </a:solidFill>
+                <a:latin typeface="Malgun Gothic" pitchFamily="34" charset="0"/>
+                <a:ea typeface="Malgun Gothic" pitchFamily="34" charset="-122"/>
+                <a:cs typeface="Malgun Gothic" pitchFamily="34" charset="-120"/>
+              </a:rPr>
+              <a:t>우리 정의</a:t>
+            </a:r>
+            <a:endParaRPr lang="en-US" sz="930" dirty="0"/>
+          </a:p>
+        </p:txBody>
+      </p:sp>
+      <p:sp>
+        <p:nvSpPr>
+          <p:cNvPr id="52" name="Shape 50"/>
+          <p:cNvSpPr/>
+          <p:nvPr/>
+        </p:nvSpPr>
+        <p:spPr>
+          <a:xfrm>
+            <a:off x="502920" y="3968496"/>
+            <a:ext cx="11228832" cy="0"/>
+          </a:xfrm>
+          <a:prstGeom prst="line">
+            <a:avLst/>
+          </a:prstGeom>
+          <a:noFill/>
+          <a:ln w="9525">
+            <a:solidFill>
+              <a:srgbClr val="E3EAF5"/>
+            </a:solidFill>
+            <a:prstDash val="solid"/>
+          </a:ln>
+        </p:spPr>
+      </p:sp>
+      <p:sp>
+        <p:nvSpPr>
+          <p:cNvPr id="53" name="Text 51"/>
+          <p:cNvSpPr/>
+          <p:nvPr/>
+        </p:nvSpPr>
+        <p:spPr>
+          <a:xfrm>
+            <a:off x="594360" y="3968496"/>
+            <a:ext cx="1938528" cy="292608"/>
+          </a:xfrm>
+          <a:prstGeom prst="rect">
+            <a:avLst/>
+          </a:prstGeom>
+          <a:noFill/>
+          <a:ln/>
+        </p:spPr>
+        <p:txBody>
+          <a:bodyPr wrap="square" lIns="0" tIns="0" rIns="0" bIns="0" rtlCol="0" anchor="ctr"/>
+          <a:lstStyle/>
+          <a:p>
+            <a:pPr indent="0" marL="0">
+              <a:buNone/>
+            </a:pPr>
+            <a:r>
+              <a:rPr lang="en-US" sz="1000" b="1" dirty="0">
                 <a:solidFill>
                   <a:srgbClr val="1E2761"/>
                 </a:solidFill>
@@ -4423,9 +6434,1072 @@
                 <a:ea typeface="Malgun Gothic" pitchFamily="34" charset="-122"/>
                 <a:cs typeface="Malgun Gothic" pitchFamily="34" charset="-120"/>
               </a:rPr>
-              <a:t>학습이 늦어진 이유는 “아직 안 했다”가 아니라 “지금 돌렸으면 낭비였다는 것을 먼저 측정했다” 입니다.</a:t>
-            </a:r>
-            <a:endParaRPr lang="en-US" sz="1120" dirty="0"/>
+              <a:t>비손실</a:t>
+            </a:r>
+            <a:endParaRPr lang="en-US" sz="1000" dirty="0"/>
+          </a:p>
+        </p:txBody>
+      </p:sp>
+      <p:sp>
+        <p:nvSpPr>
+          <p:cNvPr id="54" name="Text 52"/>
+          <p:cNvSpPr/>
+          <p:nvPr/>
+        </p:nvSpPr>
+        <p:spPr>
+          <a:xfrm>
+            <a:off x="2697480" y="3968496"/>
+            <a:ext cx="5230368" cy="292608"/>
+          </a:xfrm>
+          <a:prstGeom prst="rect">
+            <a:avLst/>
+          </a:prstGeom>
+          <a:noFill/>
+          <a:ln/>
+        </p:spPr>
+        <p:txBody>
+          <a:bodyPr wrap="square" lIns="0" tIns="0" rIns="0" bIns="0" rtlCol="0" anchor="ctr"/>
+          <a:lstStyle/>
+          <a:p>
+            <a:pPr indent="0" marL="0">
+              <a:lnSpc>
+                <a:spcPct val="105000"/>
+              </a:lnSpc>
+              <a:buNone/>
+            </a:pPr>
+            <a:r>
+              <a:rPr lang="en-US" sz="960" dirty="0">
+                <a:solidFill>
+                  <a:srgbClr val="4A5568"/>
+                </a:solidFill>
+                <a:latin typeface="Malgun Gothic" pitchFamily="34" charset="0"/>
+                <a:ea typeface="Malgun Gothic" pitchFamily="34" charset="-122"/>
+                <a:cs typeface="Malgun Gothic" pitchFamily="34" charset="-120"/>
+              </a:rPr>
+              <a:t>무력화 중 기체가 온전한 비율. 우리 2차 지표</a:t>
+            </a:r>
+            <a:endParaRPr lang="en-US" sz="960" dirty="0"/>
+          </a:p>
+        </p:txBody>
+      </p:sp>
+      <p:sp>
+        <p:nvSpPr>
+          <p:cNvPr id="55" name="Text 53"/>
+          <p:cNvSpPr/>
+          <p:nvPr/>
+        </p:nvSpPr>
+        <p:spPr>
+          <a:xfrm>
+            <a:off x="8046720" y="3968496"/>
+            <a:ext cx="1097280" cy="292608"/>
+          </a:xfrm>
+          <a:prstGeom prst="rect">
+            <a:avLst/>
+          </a:prstGeom>
+          <a:noFill/>
+          <a:ln/>
+        </p:spPr>
+        <p:txBody>
+          <a:bodyPr wrap="square" lIns="0" tIns="0" rIns="0" bIns="0" rtlCol="0" anchor="ctr"/>
+          <a:lstStyle/>
+          <a:p>
+            <a:pPr algn="ctr" indent="0" marL="0">
+              <a:buNone/>
+            </a:pPr>
+            <a:r>
+              <a:rPr lang="en-US" sz="1020" b="1" dirty="0">
+                <a:solidFill>
+                  <a:srgbClr val="8A94A6"/>
+                </a:solidFill>
+                <a:latin typeface="Malgun Gothic" pitchFamily="34" charset="0"/>
+                <a:ea typeface="Malgun Gothic" pitchFamily="34" charset="-122"/>
+                <a:cs typeface="Malgun Gothic" pitchFamily="34" charset="-120"/>
+              </a:rPr>
+              <a:t>—</a:t>
+            </a:r>
+            <a:endParaRPr lang="en-US" sz="1020" dirty="0"/>
+          </a:p>
+        </p:txBody>
+      </p:sp>
+      <p:sp>
+        <p:nvSpPr>
+          <p:cNvPr id="56" name="Text 54"/>
+          <p:cNvSpPr/>
+          <p:nvPr/>
+        </p:nvSpPr>
+        <p:spPr>
+          <a:xfrm>
+            <a:off x="9281160" y="3968496"/>
+            <a:ext cx="2377440" cy="292608"/>
+          </a:xfrm>
+          <a:prstGeom prst="rect">
+            <a:avLst/>
+          </a:prstGeom>
+          <a:noFill/>
+          <a:ln/>
+        </p:spPr>
+        <p:txBody>
+          <a:bodyPr wrap="square" lIns="0" tIns="0" rIns="0" bIns="0" rtlCol="0" anchor="ctr"/>
+          <a:lstStyle/>
+          <a:p>
+            <a:pPr indent="0" marL="0">
+              <a:buNone/>
+            </a:pPr>
+            <a:r>
+              <a:rPr lang="en-US" sz="930" dirty="0">
+                <a:solidFill>
+                  <a:srgbClr val="8A94A6"/>
+                </a:solidFill>
+                <a:latin typeface="Malgun Gothic" pitchFamily="34" charset="0"/>
+                <a:ea typeface="Malgun Gothic" pitchFamily="34" charset="-122"/>
+                <a:cs typeface="Malgun Gothic" pitchFamily="34" charset="-120"/>
+              </a:rPr>
+              <a:t>우리 정의</a:t>
+            </a:r>
+            <a:endParaRPr lang="en-US" sz="930" dirty="0"/>
+          </a:p>
+        </p:txBody>
+      </p:sp>
+      <p:sp>
+        <p:nvSpPr>
+          <p:cNvPr id="57" name="Shape 55"/>
+          <p:cNvSpPr/>
+          <p:nvPr/>
+        </p:nvSpPr>
+        <p:spPr>
+          <a:xfrm>
+            <a:off x="502920" y="4261104"/>
+            <a:ext cx="11228832" cy="0"/>
+          </a:xfrm>
+          <a:prstGeom prst="line">
+            <a:avLst/>
+          </a:prstGeom>
+          <a:noFill/>
+          <a:ln w="9525">
+            <a:solidFill>
+              <a:srgbClr val="E3EAF5"/>
+            </a:solidFill>
+            <a:prstDash val="solid"/>
+          </a:ln>
+        </p:spPr>
+      </p:sp>
+      <p:sp>
+        <p:nvSpPr>
+          <p:cNvPr id="58" name="Shape 56"/>
+          <p:cNvSpPr/>
+          <p:nvPr/>
+        </p:nvSpPr>
+        <p:spPr>
+          <a:xfrm>
+            <a:off x="502920" y="4261104"/>
+            <a:ext cx="11228832" cy="292608"/>
+          </a:xfrm>
+          <a:prstGeom prst="rect">
+            <a:avLst/>
+          </a:prstGeom>
+          <a:solidFill>
+            <a:srgbClr val="F6F9FE"/>
+          </a:solidFill>
+          <a:ln w="12700">
+            <a:solidFill>
+              <a:srgbClr val="F6F9FE"/>
+            </a:solidFill>
+            <a:prstDash val="solid"/>
+          </a:ln>
+        </p:spPr>
+      </p:sp>
+      <p:sp>
+        <p:nvSpPr>
+          <p:cNvPr id="59" name="Text 57"/>
+          <p:cNvSpPr/>
+          <p:nvPr/>
+        </p:nvSpPr>
+        <p:spPr>
+          <a:xfrm>
+            <a:off x="594360" y="4261104"/>
+            <a:ext cx="1938528" cy="292608"/>
+          </a:xfrm>
+          <a:prstGeom prst="rect">
+            <a:avLst/>
+          </a:prstGeom>
+          <a:noFill/>
+          <a:ln/>
+        </p:spPr>
+        <p:txBody>
+          <a:bodyPr wrap="square" lIns="0" tIns="0" rIns="0" bIns="0" rtlCol="0" anchor="ctr"/>
+          <a:lstStyle/>
+          <a:p>
+            <a:pPr indent="0" marL="0">
+              <a:buNone/>
+            </a:pPr>
+            <a:r>
+              <a:rPr lang="en-US" sz="1000" b="1" dirty="0">
+                <a:solidFill>
+                  <a:srgbClr val="1E2761"/>
+                </a:solidFill>
+                <a:latin typeface="Malgun Gothic" pitchFamily="34" charset="0"/>
+                <a:ea typeface="Malgun Gothic" pitchFamily="34" charset="-122"/>
+                <a:cs typeface="Malgun Gothic" pitchFamily="34" charset="-120"/>
+              </a:rPr>
+              <a:t>물리 요격 성립 거리</a:t>
+            </a:r>
+            <a:endParaRPr lang="en-US" sz="1000" dirty="0"/>
+          </a:p>
+        </p:txBody>
+      </p:sp>
+      <p:sp>
+        <p:nvSpPr>
+          <p:cNvPr id="60" name="Text 58"/>
+          <p:cNvSpPr/>
+          <p:nvPr/>
+        </p:nvSpPr>
+        <p:spPr>
+          <a:xfrm>
+            <a:off x="2697480" y="4261104"/>
+            <a:ext cx="5230368" cy="292608"/>
+          </a:xfrm>
+          <a:prstGeom prst="rect">
+            <a:avLst/>
+          </a:prstGeom>
+          <a:noFill/>
+          <a:ln/>
+        </p:spPr>
+        <p:txBody>
+          <a:bodyPr wrap="square" lIns="0" tIns="0" rIns="0" bIns="0" rtlCol="0" anchor="ctr"/>
+          <a:lstStyle/>
+          <a:p>
+            <a:pPr indent="0" marL="0">
+              <a:lnSpc>
+                <a:spcPct val="105000"/>
+              </a:lnSpc>
+              <a:buNone/>
+            </a:pPr>
+            <a:r>
+              <a:rPr lang="en-US" sz="960" dirty="0">
+                <a:solidFill>
+                  <a:srgbClr val="4A5568"/>
+                </a:solidFill>
+                <a:latin typeface="Malgun Gothic" pitchFamily="34" charset="0"/>
+                <a:ea typeface="Malgun Gothic" pitchFamily="34" charset="-122"/>
+                <a:cs typeface="Malgun Gothic" pitchFamily="34" charset="-120"/>
+              </a:rPr>
+              <a:t>표적 반치수 0.21 + 요격기 0.25 + 유도오차 0.1~0.4</a:t>
+            </a:r>
+            <a:endParaRPr lang="en-US" sz="960" dirty="0"/>
+          </a:p>
+        </p:txBody>
+      </p:sp>
+      <p:sp>
+        <p:nvSpPr>
+          <p:cNvPr id="61" name="Text 59"/>
+          <p:cNvSpPr/>
+          <p:nvPr/>
+        </p:nvSpPr>
+        <p:spPr>
+          <a:xfrm>
+            <a:off x="8046720" y="4261104"/>
+            <a:ext cx="1097280" cy="292608"/>
+          </a:xfrm>
+          <a:prstGeom prst="rect">
+            <a:avLst/>
+          </a:prstGeom>
+          <a:noFill/>
+          <a:ln/>
+        </p:spPr>
+        <p:txBody>
+          <a:bodyPr wrap="square" lIns="0" tIns="0" rIns="0" bIns="0" rtlCol="0" anchor="ctr"/>
+          <a:lstStyle/>
+          <a:p>
+            <a:pPr algn="ctr" indent="0" marL="0">
+              <a:buNone/>
+            </a:pPr>
+            <a:r>
+              <a:rPr lang="en-US" sz="1020" b="1" dirty="0">
+                <a:solidFill>
+                  <a:srgbClr val="1E2761"/>
+                </a:solidFill>
+                <a:latin typeface="Malgun Gothic" pitchFamily="34" charset="0"/>
+                <a:ea typeface="Malgun Gothic" pitchFamily="34" charset="-122"/>
+                <a:cs typeface="Malgun Gothic" pitchFamily="34" charset="-120"/>
+              </a:rPr>
+              <a:t>0.75 m</a:t>
+            </a:r>
+            <a:endParaRPr lang="en-US" sz="1020" dirty="0"/>
+          </a:p>
+        </p:txBody>
+      </p:sp>
+      <p:sp>
+        <p:nvSpPr>
+          <p:cNvPr id="62" name="Text 60"/>
+          <p:cNvSpPr/>
+          <p:nvPr/>
+        </p:nvSpPr>
+        <p:spPr>
+          <a:xfrm>
+            <a:off x="9281160" y="4261104"/>
+            <a:ext cx="2377440" cy="292608"/>
+          </a:xfrm>
+          <a:prstGeom prst="rect">
+            <a:avLst/>
+          </a:prstGeom>
+          <a:noFill/>
+          <a:ln/>
+        </p:spPr>
+        <p:txBody>
+          <a:bodyPr wrap="square" lIns="0" tIns="0" rIns="0" bIns="0" rtlCol="0" anchor="ctr"/>
+          <a:lstStyle/>
+          <a:p>
+            <a:pPr indent="0" marL="0">
+              <a:buNone/>
+            </a:pPr>
+            <a:r>
+              <a:rPr lang="en-US" sz="930" dirty="0">
+                <a:solidFill>
+                  <a:srgbClr val="8A94A6"/>
+                </a:solidFill>
+                <a:latin typeface="Malgun Gothic" pitchFamily="34" charset="0"/>
+                <a:ea typeface="Malgun Gothic" pitchFamily="34" charset="-122"/>
+                <a:cs typeface="Malgun Gothic" pitchFamily="34" charset="-120"/>
+              </a:rPr>
+              <a:t>Drones 2026 · 10(6):420</a:t>
+            </a:r>
+            <a:endParaRPr lang="en-US" sz="930" dirty="0"/>
+          </a:p>
+        </p:txBody>
+      </p:sp>
+      <p:sp>
+        <p:nvSpPr>
+          <p:cNvPr id="63" name="Shape 61"/>
+          <p:cNvSpPr/>
+          <p:nvPr/>
+        </p:nvSpPr>
+        <p:spPr>
+          <a:xfrm>
+            <a:off x="502920" y="4553712"/>
+            <a:ext cx="11228832" cy="0"/>
+          </a:xfrm>
+          <a:prstGeom prst="line">
+            <a:avLst/>
+          </a:prstGeom>
+          <a:noFill/>
+          <a:ln w="9525">
+            <a:solidFill>
+              <a:srgbClr val="E3EAF5"/>
+            </a:solidFill>
+            <a:prstDash val="solid"/>
+          </a:ln>
+        </p:spPr>
+      </p:sp>
+      <p:sp>
+        <p:nvSpPr>
+          <p:cNvPr id="64" name="Text 62"/>
+          <p:cNvSpPr/>
+          <p:nvPr/>
+        </p:nvSpPr>
+        <p:spPr>
+          <a:xfrm>
+            <a:off x="594360" y="4553712"/>
+            <a:ext cx="1938528" cy="292608"/>
+          </a:xfrm>
+          <a:prstGeom prst="rect">
+            <a:avLst/>
+          </a:prstGeom>
+          <a:noFill/>
+          <a:ln/>
+        </p:spPr>
+        <p:txBody>
+          <a:bodyPr wrap="square" lIns="0" tIns="0" rIns="0" bIns="0" rtlCol="0" anchor="ctr"/>
+          <a:lstStyle/>
+          <a:p>
+            <a:pPr indent="0" marL="0">
+              <a:buNone/>
+            </a:pPr>
+            <a:r>
+              <a:rPr lang="en-US" sz="1000" b="1" dirty="0">
+                <a:solidFill>
+                  <a:srgbClr val="1E2761"/>
+                </a:solidFill>
+                <a:latin typeface="Malgun Gothic" pitchFamily="34" charset="0"/>
+                <a:ea typeface="Malgun Gothic" pitchFamily="34" charset="-122"/>
+                <a:cs typeface="Malgun Gothic" pitchFamily="34" charset="-120"/>
+              </a:rPr>
+              <a:t>지향 각속도 한계</a:t>
+            </a:r>
+            <a:endParaRPr lang="en-US" sz="1000" dirty="0"/>
+          </a:p>
+        </p:txBody>
+      </p:sp>
+      <p:sp>
+        <p:nvSpPr>
+          <p:cNvPr id="65" name="Text 63"/>
+          <p:cNvSpPr/>
+          <p:nvPr/>
+        </p:nvSpPr>
+        <p:spPr>
+          <a:xfrm>
+            <a:off x="2697480" y="4553712"/>
+            <a:ext cx="5230368" cy="292608"/>
+          </a:xfrm>
+          <a:prstGeom prst="rect">
+            <a:avLst/>
+          </a:prstGeom>
+          <a:noFill/>
+          <a:ln/>
+        </p:spPr>
+        <p:txBody>
+          <a:bodyPr wrap="square" lIns="0" tIns="0" rIns="0" bIns="0" rtlCol="0" anchor="ctr"/>
+          <a:lstStyle/>
+          <a:p>
+            <a:pPr indent="0" marL="0">
+              <a:lnSpc>
+                <a:spcPct val="105000"/>
+              </a:lnSpc>
+              <a:buNone/>
+            </a:pPr>
+            <a:r>
+              <a:rPr lang="en-US" sz="960" dirty="0">
+                <a:solidFill>
+                  <a:srgbClr val="4A5568"/>
+                </a:solidFill>
+                <a:latin typeface="Malgun Gothic" pitchFamily="34" charset="0"/>
+                <a:ea typeface="Malgun Gothic" pitchFamily="34" charset="-122"/>
+                <a:cs typeface="Malgun Gothic" pitchFamily="34" charset="-120"/>
+              </a:rPr>
+              <a:t>네트를 겨눌 때 방향을 돌릴 수 있는 최대 속도</a:t>
+            </a:r>
+            <a:endParaRPr lang="en-US" sz="960" dirty="0"/>
+          </a:p>
+        </p:txBody>
+      </p:sp>
+      <p:sp>
+        <p:nvSpPr>
+          <p:cNvPr id="66" name="Text 64"/>
+          <p:cNvSpPr/>
+          <p:nvPr/>
+        </p:nvSpPr>
+        <p:spPr>
+          <a:xfrm>
+            <a:off x="8046720" y="4553712"/>
+            <a:ext cx="1097280" cy="292608"/>
+          </a:xfrm>
+          <a:prstGeom prst="rect">
+            <a:avLst/>
+          </a:prstGeom>
+          <a:noFill/>
+          <a:ln/>
+        </p:spPr>
+        <p:txBody>
+          <a:bodyPr wrap="square" lIns="0" tIns="0" rIns="0" bIns="0" rtlCol="0" anchor="ctr"/>
+          <a:lstStyle/>
+          <a:p>
+            <a:pPr algn="ctr" indent="0" marL="0">
+              <a:buNone/>
+            </a:pPr>
+            <a:r>
+              <a:rPr lang="en-US" sz="1020" b="1" dirty="0">
+                <a:solidFill>
+                  <a:srgbClr val="1E2761"/>
+                </a:solidFill>
+                <a:latin typeface="Malgun Gothic" pitchFamily="34" charset="0"/>
+                <a:ea typeface="Malgun Gothic" pitchFamily="34" charset="-122"/>
+                <a:cs typeface="Malgun Gothic" pitchFamily="34" charset="-120"/>
+              </a:rPr>
+              <a:t>2.0 rad/s</a:t>
+            </a:r>
+            <a:endParaRPr lang="en-US" sz="1020" dirty="0"/>
+          </a:p>
+        </p:txBody>
+      </p:sp>
+      <p:sp>
+        <p:nvSpPr>
+          <p:cNvPr id="67" name="Text 65"/>
+          <p:cNvSpPr/>
+          <p:nvPr/>
+        </p:nvSpPr>
+        <p:spPr>
+          <a:xfrm>
+            <a:off x="9281160" y="4553712"/>
+            <a:ext cx="2377440" cy="292608"/>
+          </a:xfrm>
+          <a:prstGeom prst="rect">
+            <a:avLst/>
+          </a:prstGeom>
+          <a:noFill/>
+          <a:ln/>
+        </p:spPr>
+        <p:txBody>
+          <a:bodyPr wrap="square" lIns="0" tIns="0" rIns="0" bIns="0" rtlCol="0" anchor="ctr"/>
+          <a:lstStyle/>
+          <a:p>
+            <a:pPr indent="0" marL="0">
+              <a:buNone/>
+            </a:pPr>
+            <a:r>
+              <a:rPr lang="en-US" sz="930" dirty="0">
+                <a:solidFill>
+                  <a:srgbClr val="8A94A6"/>
+                </a:solidFill>
+                <a:latin typeface="Malgun Gothic" pitchFamily="34" charset="0"/>
+                <a:ea typeface="Malgun Gothic" pitchFamily="34" charset="-122"/>
+                <a:cs typeface="Malgun Gothic" pitchFamily="34" charset="-120"/>
+              </a:rPr>
+              <a:t>Pliska 2024 · RA-L</a:t>
+            </a:r>
+            <a:endParaRPr lang="en-US" sz="930" dirty="0"/>
+          </a:p>
+        </p:txBody>
+      </p:sp>
+      <p:sp>
+        <p:nvSpPr>
+          <p:cNvPr id="68" name="Shape 66"/>
+          <p:cNvSpPr/>
+          <p:nvPr/>
+        </p:nvSpPr>
+        <p:spPr>
+          <a:xfrm>
+            <a:off x="502920" y="4846320"/>
+            <a:ext cx="11228832" cy="0"/>
+          </a:xfrm>
+          <a:prstGeom prst="line">
+            <a:avLst/>
+          </a:prstGeom>
+          <a:noFill/>
+          <a:ln w="9525">
+            <a:solidFill>
+              <a:srgbClr val="E3EAF5"/>
+            </a:solidFill>
+            <a:prstDash val="solid"/>
+          </a:ln>
+        </p:spPr>
+      </p:sp>
+      <p:sp>
+        <p:nvSpPr>
+          <p:cNvPr id="69" name="Shape 67"/>
+          <p:cNvSpPr/>
+          <p:nvPr/>
+        </p:nvSpPr>
+        <p:spPr>
+          <a:xfrm>
+            <a:off x="502920" y="4846320"/>
+            <a:ext cx="11228832" cy="292608"/>
+          </a:xfrm>
+          <a:prstGeom prst="rect">
+            <a:avLst/>
+          </a:prstGeom>
+          <a:solidFill>
+            <a:srgbClr val="F6F9FE"/>
+          </a:solidFill>
+          <a:ln w="12700">
+            <a:solidFill>
+              <a:srgbClr val="F6F9FE"/>
+            </a:solidFill>
+            <a:prstDash val="solid"/>
+          </a:ln>
+        </p:spPr>
+      </p:sp>
+      <p:sp>
+        <p:nvSpPr>
+          <p:cNvPr id="70" name="Text 68"/>
+          <p:cNvSpPr/>
+          <p:nvPr/>
+        </p:nvSpPr>
+        <p:spPr>
+          <a:xfrm>
+            <a:off x="594360" y="4846320"/>
+            <a:ext cx="1938528" cy="292608"/>
+          </a:xfrm>
+          <a:prstGeom prst="rect">
+            <a:avLst/>
+          </a:prstGeom>
+          <a:noFill/>
+          <a:ln/>
+        </p:spPr>
+        <p:txBody>
+          <a:bodyPr wrap="square" lIns="0" tIns="0" rIns="0" bIns="0" rtlCol="0" anchor="ctr"/>
+          <a:lstStyle/>
+          <a:p>
+            <a:pPr indent="0" marL="0">
+              <a:buNone/>
+            </a:pPr>
+            <a:r>
+              <a:rPr lang="en-US" sz="1000" b="1" dirty="0">
+                <a:solidFill>
+                  <a:srgbClr val="1E2761"/>
+                </a:solidFill>
+                <a:latin typeface="Malgun Gothic" pitchFamily="34" charset="0"/>
+                <a:ea typeface="Malgun Gothic" pitchFamily="34" charset="-122"/>
+                <a:cs typeface="Malgun Gothic" pitchFamily="34" charset="-120"/>
+              </a:rPr>
+              <a:t>공격자 최대 기동 가속도</a:t>
+            </a:r>
+            <a:endParaRPr lang="en-US" sz="1000" dirty="0"/>
+          </a:p>
+        </p:txBody>
+      </p:sp>
+      <p:sp>
+        <p:nvSpPr>
+          <p:cNvPr id="71" name="Text 69"/>
+          <p:cNvSpPr/>
+          <p:nvPr/>
+        </p:nvSpPr>
+        <p:spPr>
+          <a:xfrm>
+            <a:off x="2697480" y="4846320"/>
+            <a:ext cx="5230368" cy="292608"/>
+          </a:xfrm>
+          <a:prstGeom prst="rect">
+            <a:avLst/>
+          </a:prstGeom>
+          <a:noFill/>
+          <a:ln/>
+        </p:spPr>
+        <p:txBody>
+          <a:bodyPr wrap="square" lIns="0" tIns="0" rIns="0" bIns="0" rtlCol="0" anchor="ctr"/>
+          <a:lstStyle/>
+          <a:p>
+            <a:pPr indent="0" marL="0">
+              <a:lnSpc>
+                <a:spcPct val="105000"/>
+              </a:lnSpc>
+              <a:buNone/>
+            </a:pPr>
+            <a:r>
+              <a:rPr lang="en-US" sz="960" dirty="0">
+                <a:solidFill>
+                  <a:srgbClr val="4A5568"/>
+                </a:solidFill>
+                <a:latin typeface="Malgun Gothic" pitchFamily="34" charset="0"/>
+                <a:ea typeface="Malgun Gothic" pitchFamily="34" charset="-122"/>
+                <a:cs typeface="Malgun Gothic" pitchFamily="34" charset="-120"/>
+              </a:rPr>
+              <a:t>매 판 무작위로 뽑는 위협 등급. 방어자 능력은 비례해 따라감(가속 0.35배)</a:t>
+            </a:r>
+            <a:endParaRPr lang="en-US" sz="960" dirty="0"/>
+          </a:p>
+        </p:txBody>
+      </p:sp>
+      <p:sp>
+        <p:nvSpPr>
+          <p:cNvPr id="72" name="Text 70"/>
+          <p:cNvSpPr/>
+          <p:nvPr/>
+        </p:nvSpPr>
+        <p:spPr>
+          <a:xfrm>
+            <a:off x="8046720" y="4846320"/>
+            <a:ext cx="1097280" cy="292608"/>
+          </a:xfrm>
+          <a:prstGeom prst="rect">
+            <a:avLst/>
+          </a:prstGeom>
+          <a:noFill/>
+          <a:ln/>
+        </p:spPr>
+        <p:txBody>
+          <a:bodyPr wrap="square" lIns="0" tIns="0" rIns="0" bIns="0" rtlCol="0" anchor="ctr"/>
+          <a:lstStyle/>
+          <a:p>
+            <a:pPr algn="ctr" indent="0" marL="0">
+              <a:buNone/>
+            </a:pPr>
+            <a:r>
+              <a:rPr lang="en-US" sz="1020" b="1" dirty="0">
+                <a:solidFill>
+                  <a:srgbClr val="1E2761"/>
+                </a:solidFill>
+                <a:latin typeface="Malgun Gothic" pitchFamily="34" charset="0"/>
+                <a:ea typeface="Malgun Gothic" pitchFamily="34" charset="-122"/>
+                <a:cs typeface="Malgun Gothic" pitchFamily="34" charset="-120"/>
+              </a:rPr>
+              <a:t>11~78 m/s²</a:t>
+            </a:r>
+            <a:endParaRPr lang="en-US" sz="1020" dirty="0"/>
+          </a:p>
+        </p:txBody>
+      </p:sp>
+      <p:sp>
+        <p:nvSpPr>
+          <p:cNvPr id="73" name="Text 71"/>
+          <p:cNvSpPr/>
+          <p:nvPr/>
+        </p:nvSpPr>
+        <p:spPr>
+          <a:xfrm>
+            <a:off x="9281160" y="4846320"/>
+            <a:ext cx="2377440" cy="292608"/>
+          </a:xfrm>
+          <a:prstGeom prst="rect">
+            <a:avLst/>
+          </a:prstGeom>
+          <a:noFill/>
+          <a:ln/>
+        </p:spPr>
+        <p:txBody>
+          <a:bodyPr wrap="square" lIns="0" tIns="0" rIns="0" bIns="0" rtlCol="0" anchor="ctr"/>
+          <a:lstStyle/>
+          <a:p>
+            <a:pPr indent="0" marL="0">
+              <a:buNone/>
+            </a:pPr>
+            <a:r>
+              <a:rPr lang="en-US" sz="930" dirty="0">
+                <a:solidFill>
+                  <a:srgbClr val="8A94A6"/>
+                </a:solidFill>
+                <a:latin typeface="Malgun Gothic" pitchFamily="34" charset="0"/>
+                <a:ea typeface="Malgun Gothic" pitchFamily="34" charset="-122"/>
+                <a:cs typeface="Malgun Gothic" pitchFamily="34" charset="-120"/>
+              </a:rPr>
+              <a:t>Pliska 2024 · RA-L</a:t>
+            </a:r>
+            <a:endParaRPr lang="en-US" sz="930" dirty="0"/>
+          </a:p>
+        </p:txBody>
+      </p:sp>
+      <p:sp>
+        <p:nvSpPr>
+          <p:cNvPr id="74" name="Shape 72"/>
+          <p:cNvSpPr/>
+          <p:nvPr/>
+        </p:nvSpPr>
+        <p:spPr>
+          <a:xfrm>
+            <a:off x="502920" y="5138928"/>
+            <a:ext cx="11228832" cy="0"/>
+          </a:xfrm>
+          <a:prstGeom prst="line">
+            <a:avLst/>
+          </a:prstGeom>
+          <a:noFill/>
+          <a:ln w="9525">
+            <a:solidFill>
+              <a:srgbClr val="E3EAF5"/>
+            </a:solidFill>
+            <a:prstDash val="solid"/>
+          </a:ln>
+        </p:spPr>
+      </p:sp>
+      <p:sp>
+        <p:nvSpPr>
+          <p:cNvPr id="75" name="Shape 73"/>
+          <p:cNvSpPr/>
+          <p:nvPr/>
+        </p:nvSpPr>
+        <p:spPr>
+          <a:xfrm>
+            <a:off x="502920" y="5212080"/>
+            <a:ext cx="11228832" cy="859536"/>
+          </a:xfrm>
+          <a:prstGeom prst="roundRect">
+            <a:avLst>
+              <a:gd name="adj" fmla="val 8511"/>
+            </a:avLst>
+          </a:prstGeom>
+          <a:solidFill>
+            <a:srgbClr val="F4F8FF"/>
+          </a:solidFill>
+          <a:ln w="12700">
+            <a:solidFill>
+              <a:srgbClr val="C6D6EE"/>
+            </a:solidFill>
+            <a:prstDash val="solid"/>
+          </a:ln>
+        </p:spPr>
+      </p:sp>
+      <p:sp>
+        <p:nvSpPr>
+          <p:cNvPr id="76" name="Text 74"/>
+          <p:cNvSpPr/>
+          <p:nvPr/>
+        </p:nvSpPr>
+        <p:spPr>
+          <a:xfrm>
+            <a:off x="713232" y="5248656"/>
+            <a:ext cx="2377440" cy="201168"/>
+          </a:xfrm>
+          <a:prstGeom prst="rect">
+            <a:avLst/>
+          </a:prstGeom>
+          <a:noFill/>
+          <a:ln/>
+        </p:spPr>
+        <p:txBody>
+          <a:bodyPr wrap="square" lIns="0" tIns="0" rIns="0" bIns="0" rtlCol="0" anchor="ctr"/>
+          <a:lstStyle/>
+          <a:p>
+            <a:pPr indent="0" marL="0">
+              <a:buNone/>
+            </a:pPr>
+            <a:r>
+              <a:rPr lang="en-US" sz="1150" b="1" dirty="0">
+                <a:solidFill>
+                  <a:srgbClr val="1E2761"/>
+                </a:solidFill>
+                <a:latin typeface="Malgun Gothic" pitchFamily="34" charset="0"/>
+                <a:ea typeface="Malgun Gothic" pitchFamily="34" charset="-122"/>
+                <a:cs typeface="Malgun Gothic" pitchFamily="34" charset="-120"/>
+              </a:rPr>
+              <a:t>참고문헌</a:t>
+            </a:r>
+            <a:endParaRPr lang="en-US" sz="1150" dirty="0"/>
+          </a:p>
+        </p:txBody>
+      </p:sp>
+      <p:sp>
+        <p:nvSpPr>
+          <p:cNvPr id="77" name="Text 75"/>
+          <p:cNvSpPr/>
+          <p:nvPr/>
+        </p:nvSpPr>
+        <p:spPr>
+          <a:xfrm>
+            <a:off x="713232" y="5449824"/>
+            <a:ext cx="10835640" cy="566928"/>
+          </a:xfrm>
+          <a:prstGeom prst="rect">
+            <a:avLst/>
+          </a:prstGeom>
+          <a:noFill/>
+          <a:ln/>
+        </p:spPr>
+        <p:txBody>
+          <a:bodyPr wrap="square" lIns="0" tIns="0" rIns="0" bIns="0" rtlCol="0" anchor="t"/>
+          <a:lstStyle/>
+          <a:p>
+            <a:pPr indent="0" marL="0">
+              <a:lnSpc>
+                <a:spcPct val="108000"/>
+              </a:lnSpc>
+              <a:buNone/>
+            </a:pPr>
+            <a:r>
+              <a:rPr lang="en-US" sz="720" b="1" dirty="0">
+                <a:solidFill>
+                  <a:srgbClr val="1E2761"/>
+                </a:solidFill>
+                <a:latin typeface="Malgun Gothic" pitchFamily="34" charset="0"/>
+                <a:ea typeface="Malgun Gothic" pitchFamily="34" charset="-122"/>
+                <a:cs typeface="Malgun Gothic" pitchFamily="34" charset="-120"/>
+              </a:rPr>
+              <a:t>[1] </a:t>
+            </a:r>
+            <a:pPr indent="0" marL="0">
+              <a:lnSpc>
+                <a:spcPct val="108000"/>
+              </a:lnSpc>
+              <a:buNone/>
+            </a:pPr>
+            <a:r>
+              <a:rPr lang="en-US" sz="720" dirty="0">
+                <a:solidFill>
+                  <a:srgbClr val="4A5568"/>
+                </a:solidFill>
+                <a:latin typeface="Malgun Gothic" pitchFamily="34" charset="0"/>
+                <a:ea typeface="Malgun Gothic" pitchFamily="34" charset="-122"/>
+                <a:cs typeface="Malgun Gothic" pitchFamily="34" charset="-120"/>
+              </a:rPr>
+              <a:t>Xu, R.; Peng, Q.; Wu, H. “Optimization Design of Flexible Net Capture System for Low, Slow, and Small Unmanned Aerial Vehicles Based on Improved Multi-Objective Wolf Pack Algorithm.” Drones 2025, 9(3), 190.  doi:10.3390/drones9030190
+</a:t>
+            </a:r>
+            <a:pPr indent="0" marL="0">
+              <a:lnSpc>
+                <a:spcPct val="108000"/>
+              </a:lnSpc>
+              <a:buNone/>
+            </a:pPr>
+            <a:r>
+              <a:rPr lang="en-US" sz="720" b="1" dirty="0">
+                <a:solidFill>
+                  <a:srgbClr val="1E2761"/>
+                </a:solidFill>
+                <a:latin typeface="Malgun Gothic" pitchFamily="34" charset="0"/>
+                <a:ea typeface="Malgun Gothic" pitchFamily="34" charset="-122"/>
+                <a:cs typeface="Malgun Gothic" pitchFamily="34" charset="-120"/>
+              </a:rPr>
+              <a:t>[2] </a:t>
+            </a:r>
+            <a:pPr indent="0" marL="0">
+              <a:lnSpc>
+                <a:spcPct val="108000"/>
+              </a:lnSpc>
+              <a:buNone/>
+            </a:pPr>
+            <a:r>
+              <a:rPr lang="en-US" sz="720" dirty="0">
+                <a:solidFill>
+                  <a:srgbClr val="4A5568"/>
+                </a:solidFill>
+                <a:latin typeface="Malgun Gothic" pitchFamily="34" charset="0"/>
+                <a:ea typeface="Malgun Gothic" pitchFamily="34" charset="-122"/>
+                <a:cs typeface="Malgun Gothic" pitchFamily="34" charset="-120"/>
+              </a:rPr>
+              <a:t>Pliska, M.; Vrba, M.; Báča, T.; Saska, M. “Towards Safe Mid-Air Drone Interception: Strategies for Tracking &amp; Capture.” IEEE Robotics and Automation Letters 2024, 9(10), 8810–8817.  arXiv:2405.13542
+</a:t>
+            </a:r>
+            <a:pPr indent="0" marL="0">
+              <a:lnSpc>
+                <a:spcPct val="108000"/>
+              </a:lnSpc>
+              <a:buNone/>
+            </a:pPr>
+            <a:r>
+              <a:rPr lang="en-US" sz="720" b="1" dirty="0">
+                <a:solidFill>
+                  <a:srgbClr val="1E2761"/>
+                </a:solidFill>
+                <a:latin typeface="Malgun Gothic" pitchFamily="34" charset="0"/>
+                <a:ea typeface="Malgun Gothic" pitchFamily="34" charset="-122"/>
+                <a:cs typeface="Malgun Gothic" pitchFamily="34" charset="-120"/>
+              </a:rPr>
+              <a:t>[3] </a:t>
+            </a:r>
+            <a:pPr indent="0" marL="0">
+              <a:lnSpc>
+                <a:spcPct val="108000"/>
+              </a:lnSpc>
+              <a:buNone/>
+            </a:pPr>
+            <a:r>
+              <a:rPr lang="en-US" sz="720" dirty="0">
+                <a:solidFill>
+                  <a:srgbClr val="4A5568"/>
+                </a:solidFill>
+                <a:latin typeface="Malgun Gothic" pitchFamily="34" charset="0"/>
+                <a:ea typeface="Malgun Gothic" pitchFamily="34" charset="-122"/>
+                <a:cs typeface="Malgun Gothic" pitchFamily="34" charset="-120"/>
+              </a:rPr>
+              <a:t>Rothe, J. et al. “Autonomous Drone-on-Drone Interception Using an Integrated LiDAR–Vision Detection System for High-Precision Capture.” Drones 2026, 10(6), 420.
+</a:t>
+            </a:r>
+            <a:pPr indent="0" marL="0">
+              <a:lnSpc>
+                <a:spcPct val="108000"/>
+              </a:lnSpc>
+              <a:buNone/>
+            </a:pPr>
+            <a:r>
+              <a:rPr lang="en-US" sz="720" b="1" dirty="0">
+                <a:solidFill>
+                  <a:srgbClr val="1E2761"/>
+                </a:solidFill>
+                <a:latin typeface="Malgun Gothic" pitchFamily="34" charset="0"/>
+                <a:ea typeface="Malgun Gothic" pitchFamily="34" charset="-122"/>
+                <a:cs typeface="Malgun Gothic" pitchFamily="34" charset="-120"/>
+              </a:rPr>
+              <a:t>[4] </a:t>
+            </a:r>
+            <a:pPr indent="0" marL="0">
+              <a:lnSpc>
+                <a:spcPct val="108000"/>
+              </a:lnSpc>
+              <a:buNone/>
+            </a:pPr>
+            <a:r>
+              <a:rPr lang="en-US" sz="720" dirty="0">
+                <a:solidFill>
+                  <a:srgbClr val="4A5568"/>
+                </a:solidFill>
+                <a:latin typeface="Malgun Gothic" pitchFamily="34" charset="0"/>
+                <a:ea typeface="Malgun Gothic" pitchFamily="34" charset="-122"/>
+                <a:cs typeface="Malgun Gothic" pitchFamily="34" charset="-120"/>
+              </a:rPr>
+              <a:t>Gavin, Bronz. “Intercepting an Agile Target with Net-Carrying Drones using Competitive Multi-Agent Reinforcement Learning.” arXiv:2607.05939 (preprint) — 가장 가까운 경쟁 연구</a:t>
+            </a:r>
+            <a:endParaRPr lang="en-US" sz="720" dirty="0"/>
+          </a:p>
+        </p:txBody>
+      </p:sp>
+      <p:sp>
+        <p:nvSpPr>
+          <p:cNvPr id="78" name="Shape 76"/>
+          <p:cNvSpPr/>
+          <p:nvPr/>
+        </p:nvSpPr>
+        <p:spPr>
+          <a:xfrm>
+            <a:off x="502920" y="6199632"/>
+            <a:ext cx="11228832" cy="475488"/>
+          </a:xfrm>
+          <a:prstGeom prst="roundRect">
+            <a:avLst>
+              <a:gd name="adj" fmla="val 15385"/>
+            </a:avLst>
+          </a:prstGeom>
+          <a:solidFill>
+            <a:srgbClr val="EEF3FB"/>
+          </a:solidFill>
+          <a:ln w="12700">
+            <a:solidFill>
+              <a:srgbClr val="D5DEEC"/>
+            </a:solidFill>
+            <a:prstDash val="solid"/>
+          </a:ln>
+        </p:spPr>
+      </p:sp>
+      <p:sp>
+        <p:nvSpPr>
+          <p:cNvPr id="79" name="Text 77"/>
+          <p:cNvSpPr/>
+          <p:nvPr/>
+        </p:nvSpPr>
+        <p:spPr>
+          <a:xfrm>
+            <a:off x="713232" y="6199632"/>
+            <a:ext cx="10835640" cy="475488"/>
+          </a:xfrm>
+          <a:prstGeom prst="rect">
+            <a:avLst/>
+          </a:prstGeom>
+          <a:noFill/>
+          <a:ln/>
+        </p:spPr>
+        <p:txBody>
+          <a:bodyPr wrap="square" lIns="0" tIns="0" rIns="0" bIns="0" rtlCol="0" anchor="ctr"/>
+          <a:lstStyle/>
+          <a:p>
+            <a:pPr indent="0" marL="0">
+              <a:buNone/>
+            </a:pPr>
+            <a:r>
+              <a:rPr lang="en-US" sz="1100" b="1" dirty="0">
+                <a:solidFill>
+                  <a:srgbClr val="1E2761"/>
+                </a:solidFill>
+                <a:latin typeface="Malgun Gothic" pitchFamily="34" charset="0"/>
+                <a:ea typeface="Malgun Gothic" pitchFamily="34" charset="-122"/>
+                <a:cs typeface="Malgun Gothic" pitchFamily="34" charset="-120"/>
+              </a:rPr>
+              <a:t>연구비 집행  </a:t>
+            </a:r>
+            <a:pPr indent="0" marL="0">
+              <a:buNone/>
+            </a:pPr>
+            <a:r>
+              <a:rPr lang="en-US" sz="1100" dirty="0">
+                <a:solidFill>
+                  <a:srgbClr val="4A5568"/>
+                </a:solidFill>
+                <a:latin typeface="Malgun Gothic" pitchFamily="34" charset="0"/>
+                <a:ea typeface="Malgun Gothic" pitchFamily="34" charset="-122"/>
+                <a:cs typeface="Malgun Gothic" pitchFamily="34" charset="-120"/>
+              </a:rPr>
+              <a:t>Claude Max 구독 — 월 $＿＿＿ × ＿＿＿ 개월 = $＿＿＿</a:t>
+            </a:r>
+            <a:pPr indent="0" marL="0">
+              <a:buNone/>
+            </a:pPr>
+            <a:r>
+              <a:rPr lang="en-US" sz="1000" dirty="0">
+                <a:solidFill>
+                  <a:srgbClr val="4A5568"/>
+                </a:solidFill>
+                <a:latin typeface="Malgun Gothic" pitchFamily="34" charset="0"/>
+                <a:ea typeface="Malgun Gothic" pitchFamily="34" charset="-122"/>
+                <a:cs typeface="Malgun Gothic" pitchFamily="34" charset="-120"/>
+              </a:rPr>
+              <a:t>      사용처 : 코드 작성 · 문헌 대조 · 검증 스크립트 작성</a:t>
+            </a:r>
+            <a:endParaRPr lang="en-US" sz="1100" dirty="0"/>
           </a:p>
         </p:txBody>
       </p:sp>
